--- a/EngDesign_Prototype_Showcase.pptx
+++ b/EngDesign_Prototype_Showcase.pptx
@@ -120,35 +120,35 @@
   <p:extLst>
     <p:ext uri="{521415D9-36F7-43E2-AB2F-B90AF26B5E84}">
       <p14:sectionLst xmlns:p14="http://schemas.microsoft.com/office/powerpoint/2010/main">
-        <p14:section name="Introduction" id="{635a72b8-e07f-1b9b-cebc-7fe3bc7e6fec}">
+        <p14:section name="Introduction" id="{e395480b-7174-b740-542e-288020580395}">
           <p14:sldIdLst>
             <p14:sldId id="256"/>
             <p14:sldId id="257"/>
             <p14:sldId id="258"/>
           </p14:sldIdLst>
         </p14:section>
-        <p14:section name="Design" id="{e5f8f3c2-0824-12c9-3c04-42c866608521}">
+        <p14:section name="Design" id="{2958fa1e-efa0-d17f-12e8-90179ee97db9}">
           <p14:sldIdLst>
             <p14:sldId id="259"/>
             <p14:sldId id="260"/>
             <p14:sldId id="261"/>
           </p14:sldIdLst>
         </p14:section>
-        <p14:section name="Modelling" id="{9ed7da1f-7b52-5d3a-d361-2f33be40482d}">
+        <p14:section name="Modelling" id="{784be22c-c428-a4c1-2463-e1444ae7a617}">
           <p14:sldIdLst>
             <p14:sldId id="262"/>
             <p14:sldId id="263"/>
             <p14:sldId id="264"/>
           </p14:sldIdLst>
         </p14:section>
-        <p14:section name="Build &amp; Test" id="{aecba613-3486-58f6-0ba1-89ada67f5277}">
+        <p14:section name="Build &amp; Test" id="{75766902-439b-61b3-2729-7cf81296b9d3}">
           <p14:sldIdLst>
             <p14:sldId id="265"/>
             <p14:sldId id="266"/>
             <p14:sldId id="267"/>
           </p14:sldIdLst>
         </p14:section>
-        <p14:section name="Wrap-up" id="{f3e2cd0a-618a-9bd5-8f4a-67a036bdbb77}">
+        <p14:section name="Wrap-up" id="{8ac7060a-6fe8-6224-06a4-046d254b517f}">
           <p14:sldIdLst>
             <p14:sldId id="268"/>
             <p14:sldId id="269"/>
@@ -2778,8 +2778,8 @@
         </p:nvSpPr>
         <p:spPr>
           <a:xfrm>
-            <a:off x="548640" y="365760"/>
-            <a:ext cx="11094415" cy="822960"/>
+            <a:off x="548640" y="621792"/>
+            <a:ext cx="11094415" cy="685800"/>
           </a:xfrm>
           <a:prstGeom prst="rect">
             <a:avLst/>
@@ -2809,13 +2809,36 @@
       </p:sp>
       <p:sp>
         <p:nvSpPr>
-          <p:cNvPr id="3" name="Text 0"/>
+          <p:cNvPr id="3" name="Shape 0"/>
           <p:cNvSpPr/>
           <p:nvPr/>
         </p:nvSpPr>
         <p:spPr>
           <a:xfrm>
-            <a:off x="548640" y="6400800"/>
+            <a:off x="228600" y="228600"/>
+            <a:ext cx="11734495" cy="6400800"/>
+          </a:xfrm>
+          <a:prstGeom prst="rect">
+            <a:avLst/>
+          </a:prstGeom>
+          <a:noFill/>
+          <a:ln w="9525">
+            <a:solidFill>
+              <a:srgbClr val="C9D5E1"/>
+            </a:solidFill>
+            <a:prstDash val="solid"/>
+          </a:ln>
+        </p:spPr>
+      </p:sp>
+      <p:sp>
+        <p:nvSpPr>
+          <p:cNvPr id="4" name="Text 1"/>
+          <p:cNvSpPr/>
+          <p:nvPr/>
+        </p:nvSpPr>
+        <p:spPr>
+          <a:xfrm>
+            <a:off x="548640" y="6291072"/>
             <a:ext cx="7315200" cy="274320"/>
           </a:xfrm>
           <a:prstGeom prst="rect">
@@ -2832,12 +2855,12 @@
               <a:buNone/>
             </a:pPr>
             <a:r>
-              <a:rPr lang="en-US" sz="1000" dirty="0">
+              <a:rPr lang="en-US" sz="1000" spc="200" kern="0" dirty="0">
                 <a:solidFill>
                   <a:schemeClr val="accent4"/>
                 </a:solidFill>
               </a:rPr>
-              <a:t>Engineering Design &amp; Modelling  ·  StandUp prototype</a:t>
+              <a:t>ENGINEERING DESIGN &amp; MODELLING  ·  STANDUP</a:t>
             </a:r>
             <a:endParaRPr lang="en-US" sz="1000" dirty="0"/>
           </a:p>
@@ -2855,7 +2878,7 @@
         </p:nvSpPr>
         <p:spPr>
           <a:xfrm>
-            <a:off x="11094415" y="6400800"/>
+            <a:off x="11094415" y="6291072"/>
             <a:ext cx="548640" cy="274320"/>
           </a:xfrm>
           <a:prstGeom prst="rect">
@@ -2925,7 +2948,7 @@
         </p:nvSpPr>
         <p:spPr>
           <a:xfrm>
-            <a:off x="11094415" y="6400800"/>
+            <a:off x="11094415" y="6291072"/>
             <a:ext cx="548640" cy="274320"/>
           </a:xfrm>
           <a:prstGeom prst="rect">
@@ -3393,12 +3416,12 @@
         </p:nvSpPr>
         <p:spPr>
           <a:xfrm>
-            <a:off x="6949440" y="1371600"/>
-            <a:ext cx="4663440" cy="4023360"/>
+            <a:off x="6675120" y="1097280"/>
+            <a:ext cx="4983480" cy="4572000"/>
           </a:xfrm>
           <a:prstGeom prst="roundRect">
             <a:avLst>
-              <a:gd name="adj" fmla="val 3409"/>
+              <a:gd name="adj" fmla="val 3000"/>
             </a:avLst>
           </a:prstGeom>
           <a:solidFill>
@@ -3421,9 +3444,400 @@
           <p:nvPr/>
         </p:nvSpPr>
         <p:spPr>
-          <a:xfrm>
-            <a:off x="7269480" y="4617720"/>
-            <a:ext cx="3853282" cy="0"/>
+          <a:xfrm flipV="1">
+            <a:off x="7096476" y="4343400"/>
+            <a:ext cx="138257" cy="138257"/>
+          </a:xfrm>
+          <a:prstGeom prst="line">
+            <a:avLst/>
+          </a:prstGeom>
+          <a:noFill/>
+          <a:ln w="9525">
+            <a:solidFill>
+              <a:srgbClr val="BFD7F2"/>
+            </a:solidFill>
+            <a:prstDash val="solid"/>
+          </a:ln>
+        </p:spPr>
+      </p:sp>
+      <p:sp>
+        <p:nvSpPr>
+          <p:cNvPr id="8" name="Stand drawing line"/>
+          <p:cNvSpPr/>
+          <p:nvPr/>
+        </p:nvSpPr>
+        <p:spPr>
+          <a:xfrm flipV="1">
+            <a:off x="7343364" y="4343400"/>
+            <a:ext cx="138257" cy="138257"/>
+          </a:xfrm>
+          <a:prstGeom prst="line">
+            <a:avLst/>
+          </a:prstGeom>
+          <a:noFill/>
+          <a:ln w="9525">
+            <a:solidFill>
+              <a:srgbClr val="BFD7F2"/>
+            </a:solidFill>
+            <a:prstDash val="solid"/>
+          </a:ln>
+        </p:spPr>
+      </p:sp>
+      <p:sp>
+        <p:nvSpPr>
+          <p:cNvPr id="9" name="Stand drawing line"/>
+          <p:cNvSpPr/>
+          <p:nvPr/>
+        </p:nvSpPr>
+        <p:spPr>
+          <a:xfrm flipV="1">
+            <a:off x="7590252" y="4343400"/>
+            <a:ext cx="138257" cy="138257"/>
+          </a:xfrm>
+          <a:prstGeom prst="line">
+            <a:avLst/>
+          </a:prstGeom>
+          <a:noFill/>
+          <a:ln w="9525">
+            <a:solidFill>
+              <a:srgbClr val="BFD7F2"/>
+            </a:solidFill>
+            <a:prstDash val="solid"/>
+          </a:ln>
+        </p:spPr>
+      </p:sp>
+      <p:sp>
+        <p:nvSpPr>
+          <p:cNvPr id="10" name="Stand drawing line"/>
+          <p:cNvSpPr/>
+          <p:nvPr/>
+        </p:nvSpPr>
+        <p:spPr>
+          <a:xfrm flipV="1">
+            <a:off x="7837140" y="4343400"/>
+            <a:ext cx="138257" cy="138257"/>
+          </a:xfrm>
+          <a:prstGeom prst="line">
+            <a:avLst/>
+          </a:prstGeom>
+          <a:noFill/>
+          <a:ln w="9525">
+            <a:solidFill>
+              <a:srgbClr val="BFD7F2"/>
+            </a:solidFill>
+            <a:prstDash val="solid"/>
+          </a:ln>
+        </p:spPr>
+      </p:sp>
+      <p:sp>
+        <p:nvSpPr>
+          <p:cNvPr id="11" name="Stand drawing line"/>
+          <p:cNvSpPr/>
+          <p:nvPr/>
+        </p:nvSpPr>
+        <p:spPr>
+          <a:xfrm flipV="1">
+            <a:off x="8084028" y="4343400"/>
+            <a:ext cx="138257" cy="138257"/>
+          </a:xfrm>
+          <a:prstGeom prst="line">
+            <a:avLst/>
+          </a:prstGeom>
+          <a:noFill/>
+          <a:ln w="9525">
+            <a:solidFill>
+              <a:srgbClr val="BFD7F2"/>
+            </a:solidFill>
+            <a:prstDash val="solid"/>
+          </a:ln>
+        </p:spPr>
+      </p:sp>
+      <p:sp>
+        <p:nvSpPr>
+          <p:cNvPr id="12" name="Stand drawing line"/>
+          <p:cNvSpPr/>
+          <p:nvPr/>
+        </p:nvSpPr>
+        <p:spPr>
+          <a:xfrm flipV="1">
+            <a:off x="8330916" y="4343400"/>
+            <a:ext cx="138257" cy="138257"/>
+          </a:xfrm>
+          <a:prstGeom prst="line">
+            <a:avLst/>
+          </a:prstGeom>
+          <a:noFill/>
+          <a:ln w="9525">
+            <a:solidFill>
+              <a:srgbClr val="BFD7F2"/>
+            </a:solidFill>
+            <a:prstDash val="solid"/>
+          </a:ln>
+        </p:spPr>
+      </p:sp>
+      <p:sp>
+        <p:nvSpPr>
+          <p:cNvPr id="13" name="Stand drawing line"/>
+          <p:cNvSpPr/>
+          <p:nvPr/>
+        </p:nvSpPr>
+        <p:spPr>
+          <a:xfrm flipV="1">
+            <a:off x="8577804" y="4343400"/>
+            <a:ext cx="138257" cy="138257"/>
+          </a:xfrm>
+          <a:prstGeom prst="line">
+            <a:avLst/>
+          </a:prstGeom>
+          <a:noFill/>
+          <a:ln w="9525">
+            <a:solidFill>
+              <a:srgbClr val="BFD7F2"/>
+            </a:solidFill>
+            <a:prstDash val="solid"/>
+          </a:ln>
+        </p:spPr>
+      </p:sp>
+      <p:sp>
+        <p:nvSpPr>
+          <p:cNvPr id="14" name="Stand drawing line"/>
+          <p:cNvSpPr/>
+          <p:nvPr/>
+        </p:nvSpPr>
+        <p:spPr>
+          <a:xfrm flipV="1">
+            <a:off x="8824692" y="4343400"/>
+            <a:ext cx="138257" cy="138257"/>
+          </a:xfrm>
+          <a:prstGeom prst="line">
+            <a:avLst/>
+          </a:prstGeom>
+          <a:noFill/>
+          <a:ln w="9525">
+            <a:solidFill>
+              <a:srgbClr val="BFD7F2"/>
+            </a:solidFill>
+            <a:prstDash val="solid"/>
+          </a:ln>
+        </p:spPr>
+      </p:sp>
+      <p:sp>
+        <p:nvSpPr>
+          <p:cNvPr id="15" name="Stand drawing line"/>
+          <p:cNvSpPr/>
+          <p:nvPr/>
+        </p:nvSpPr>
+        <p:spPr>
+          <a:xfrm flipV="1">
+            <a:off x="9071580" y="4343400"/>
+            <a:ext cx="138257" cy="138257"/>
+          </a:xfrm>
+          <a:prstGeom prst="line">
+            <a:avLst/>
+          </a:prstGeom>
+          <a:noFill/>
+          <a:ln w="9525">
+            <a:solidFill>
+              <a:srgbClr val="BFD7F2"/>
+            </a:solidFill>
+            <a:prstDash val="solid"/>
+          </a:ln>
+        </p:spPr>
+      </p:sp>
+      <p:sp>
+        <p:nvSpPr>
+          <p:cNvPr id="16" name="Stand drawing line"/>
+          <p:cNvSpPr/>
+          <p:nvPr/>
+        </p:nvSpPr>
+        <p:spPr>
+          <a:xfrm flipV="1">
+            <a:off x="9318468" y="4343400"/>
+            <a:ext cx="138257" cy="138257"/>
+          </a:xfrm>
+          <a:prstGeom prst="line">
+            <a:avLst/>
+          </a:prstGeom>
+          <a:noFill/>
+          <a:ln w="9525">
+            <a:solidFill>
+              <a:srgbClr val="BFD7F2"/>
+            </a:solidFill>
+            <a:prstDash val="solid"/>
+          </a:ln>
+        </p:spPr>
+      </p:sp>
+      <p:sp>
+        <p:nvSpPr>
+          <p:cNvPr id="17" name="Stand drawing line"/>
+          <p:cNvSpPr/>
+          <p:nvPr/>
+        </p:nvSpPr>
+        <p:spPr>
+          <a:xfrm flipV="1">
+            <a:off x="9565356" y="4343400"/>
+            <a:ext cx="138257" cy="138257"/>
+          </a:xfrm>
+          <a:prstGeom prst="line">
+            <a:avLst/>
+          </a:prstGeom>
+          <a:noFill/>
+          <a:ln w="9525">
+            <a:solidFill>
+              <a:srgbClr val="BFD7F2"/>
+            </a:solidFill>
+            <a:prstDash val="solid"/>
+          </a:ln>
+        </p:spPr>
+      </p:sp>
+      <p:sp>
+        <p:nvSpPr>
+          <p:cNvPr id="18" name="Stand drawing line"/>
+          <p:cNvSpPr/>
+          <p:nvPr/>
+        </p:nvSpPr>
+        <p:spPr>
+          <a:xfrm flipV="1">
+            <a:off x="9812244" y="4343400"/>
+            <a:ext cx="138257" cy="138257"/>
+          </a:xfrm>
+          <a:prstGeom prst="line">
+            <a:avLst/>
+          </a:prstGeom>
+          <a:noFill/>
+          <a:ln w="9525">
+            <a:solidFill>
+              <a:srgbClr val="BFD7F2"/>
+            </a:solidFill>
+            <a:prstDash val="solid"/>
+          </a:ln>
+        </p:spPr>
+      </p:sp>
+      <p:sp>
+        <p:nvSpPr>
+          <p:cNvPr id="19" name="Stand drawing line"/>
+          <p:cNvSpPr/>
+          <p:nvPr/>
+        </p:nvSpPr>
+        <p:spPr>
+          <a:xfrm flipV="1">
+            <a:off x="10059132" y="4343400"/>
+            <a:ext cx="138257" cy="138257"/>
+          </a:xfrm>
+          <a:prstGeom prst="line">
+            <a:avLst/>
+          </a:prstGeom>
+          <a:noFill/>
+          <a:ln w="9525">
+            <a:solidFill>
+              <a:srgbClr val="BFD7F2"/>
+            </a:solidFill>
+            <a:prstDash val="solid"/>
+          </a:ln>
+        </p:spPr>
+      </p:sp>
+      <p:sp>
+        <p:nvSpPr>
+          <p:cNvPr id="20" name="Stand drawing line"/>
+          <p:cNvSpPr/>
+          <p:nvPr/>
+        </p:nvSpPr>
+        <p:spPr>
+          <a:xfrm flipV="1">
+            <a:off x="10306020" y="4343400"/>
+            <a:ext cx="138257" cy="138257"/>
+          </a:xfrm>
+          <a:prstGeom prst="line">
+            <a:avLst/>
+          </a:prstGeom>
+          <a:noFill/>
+          <a:ln w="9525">
+            <a:solidFill>
+              <a:srgbClr val="BFD7F2"/>
+            </a:solidFill>
+            <a:prstDash val="solid"/>
+          </a:ln>
+        </p:spPr>
+      </p:sp>
+      <p:sp>
+        <p:nvSpPr>
+          <p:cNvPr id="21" name="Stand drawing line"/>
+          <p:cNvSpPr/>
+          <p:nvPr/>
+        </p:nvSpPr>
+        <p:spPr>
+          <a:xfrm flipV="1">
+            <a:off x="10552908" y="4343400"/>
+            <a:ext cx="138257" cy="138257"/>
+          </a:xfrm>
+          <a:prstGeom prst="line">
+            <a:avLst/>
+          </a:prstGeom>
+          <a:noFill/>
+          <a:ln w="9525">
+            <a:solidFill>
+              <a:srgbClr val="BFD7F2"/>
+            </a:solidFill>
+            <a:prstDash val="solid"/>
+          </a:ln>
+        </p:spPr>
+      </p:sp>
+      <p:sp>
+        <p:nvSpPr>
+          <p:cNvPr id="22" name="Stand drawing line"/>
+          <p:cNvSpPr/>
+          <p:nvPr/>
+        </p:nvSpPr>
+        <p:spPr>
+          <a:xfrm flipV="1">
+            <a:off x="10799796" y="4343400"/>
+            <a:ext cx="138257" cy="138257"/>
+          </a:xfrm>
+          <a:prstGeom prst="line">
+            <a:avLst/>
+          </a:prstGeom>
+          <a:noFill/>
+          <a:ln w="9525">
+            <a:solidFill>
+              <a:srgbClr val="BFD7F2"/>
+            </a:solidFill>
+            <a:prstDash val="solid"/>
+          </a:ln>
+        </p:spPr>
+      </p:sp>
+      <p:sp>
+        <p:nvSpPr>
+          <p:cNvPr id="23" name="Stand drawing line"/>
+          <p:cNvSpPr/>
+          <p:nvPr/>
+        </p:nvSpPr>
+        <p:spPr>
+          <a:xfrm flipV="1">
+            <a:off x="11046684" y="4343400"/>
+            <a:ext cx="138257" cy="138257"/>
+          </a:xfrm>
+          <a:prstGeom prst="line">
+            <a:avLst/>
+          </a:prstGeom>
+          <a:noFill/>
+          <a:ln w="9525">
+            <a:solidFill>
+              <a:srgbClr val="BFD7F2"/>
+            </a:solidFill>
+            <a:prstDash val="solid"/>
+          </a:ln>
+        </p:spPr>
+      </p:sp>
+      <p:sp>
+        <p:nvSpPr>
+          <p:cNvPr id="24" name="Stand drawing line"/>
+          <p:cNvSpPr/>
+          <p:nvPr/>
+        </p:nvSpPr>
+        <p:spPr>
+          <a:xfrm>
+            <a:off x="7086600" y="4343400"/>
+            <a:ext cx="4246474" cy="0"/>
           </a:xfrm>
           <a:prstGeom prst="line">
             <a:avLst/>
@@ -3439,14 +3853,14 @@
       </p:sp>
       <p:sp>
         <p:nvSpPr>
-          <p:cNvPr id="8" name="Stand drawing line"/>
+          <p:cNvPr id="25" name="Stand drawing line"/>
           <p:cNvSpPr/>
           <p:nvPr/>
         </p:nvSpPr>
         <p:spPr>
           <a:xfrm>
-            <a:off x="7538314" y="4169664"/>
-            <a:ext cx="0" cy="448056"/>
+            <a:off x="7382866" y="3849624"/>
+            <a:ext cx="0" cy="493776"/>
           </a:xfrm>
           <a:prstGeom prst="line">
             <a:avLst/>
@@ -3462,14 +3876,14 @@
       </p:sp>
       <p:sp>
         <p:nvSpPr>
-          <p:cNvPr id="9" name="Stand drawing line"/>
+          <p:cNvPr id="26" name="Stand drawing line"/>
           <p:cNvSpPr/>
           <p:nvPr/>
         </p:nvSpPr>
         <p:spPr>
           <a:xfrm flipV="1">
-            <a:off x="7538314" y="3318358"/>
-            <a:ext cx="3315614" cy="851306"/>
+            <a:off x="7382866" y="2911450"/>
+            <a:ext cx="3653942" cy="938174"/>
           </a:xfrm>
           <a:prstGeom prst="line">
             <a:avLst/>
@@ -3485,14 +3899,14 @@
       </p:sp>
       <p:sp>
         <p:nvSpPr>
-          <p:cNvPr id="10" name="Stand drawing line"/>
+          <p:cNvPr id="27" name="Stand drawing line"/>
           <p:cNvSpPr/>
           <p:nvPr/>
         </p:nvSpPr>
         <p:spPr>
           <a:xfrm flipV="1">
-            <a:off x="10047427" y="3387358"/>
-            <a:ext cx="537667" cy="1230362"/>
+            <a:off x="10148011" y="2987491"/>
+            <a:ext cx="592531" cy="1355909"/>
           </a:xfrm>
           <a:prstGeom prst="line">
             <a:avLst/>
@@ -3508,14 +3922,14 @@
       </p:sp>
       <p:sp>
         <p:nvSpPr>
-          <p:cNvPr id="11" name="Stand drawing line"/>
+          <p:cNvPr id="28" name="Stand drawing line"/>
           <p:cNvSpPr/>
           <p:nvPr/>
         </p:nvSpPr>
         <p:spPr>
           <a:xfrm flipV="1">
-            <a:off x="10450678" y="3387358"/>
-            <a:ext cx="134417" cy="1230362"/>
+            <a:off x="10592410" y="2987491"/>
+            <a:ext cx="148133" cy="1355909"/>
           </a:xfrm>
           <a:prstGeom prst="line">
             <a:avLst/>
@@ -3531,14 +3945,14 @@
       </p:sp>
       <p:sp>
         <p:nvSpPr>
-          <p:cNvPr id="12" name="Stand drawing line"/>
+          <p:cNvPr id="29" name="Stand drawing line"/>
           <p:cNvSpPr/>
           <p:nvPr/>
         </p:nvSpPr>
         <p:spPr>
           <a:xfrm flipV="1">
-            <a:off x="7672730" y="3225162"/>
-            <a:ext cx="3091586" cy="793955"/>
+            <a:off x="7530998" y="2808744"/>
+            <a:ext cx="3407054" cy="874971"/>
           </a:xfrm>
           <a:prstGeom prst="line">
             <a:avLst/>
@@ -3554,14 +3968,14 @@
       </p:sp>
       <p:sp>
         <p:nvSpPr>
-          <p:cNvPr id="13" name="Stand drawing line"/>
+          <p:cNvPr id="30" name="Stand drawing line"/>
           <p:cNvSpPr/>
           <p:nvPr/>
         </p:nvSpPr>
         <p:spPr>
           <a:xfrm>
-            <a:off x="10361066" y="2153412"/>
-            <a:ext cx="403250" cy="1071750"/>
+            <a:off x="10493654" y="1627632"/>
+            <a:ext cx="444398" cy="1181112"/>
           </a:xfrm>
           <a:prstGeom prst="line">
             <a:avLst/>
@@ -3577,14 +3991,14 @@
       </p:sp>
       <p:sp>
         <p:nvSpPr>
-          <p:cNvPr id="14" name="Stand drawing line"/>
+          <p:cNvPr id="31" name="Stand drawing line"/>
           <p:cNvSpPr/>
           <p:nvPr/>
         </p:nvSpPr>
         <p:spPr>
           <a:xfrm>
-            <a:off x="7645847" y="3856025"/>
-            <a:ext cx="0" cy="250911"/>
+            <a:off x="7501372" y="3503981"/>
+            <a:ext cx="0" cy="276515"/>
           </a:xfrm>
           <a:prstGeom prst="line">
             <a:avLst/>
@@ -3600,13 +4014,13 @@
       </p:sp>
       <p:sp>
         <p:nvSpPr>
-          <p:cNvPr id="15" name="Hinge"/>
+          <p:cNvPr id="32" name="Hinge"/>
           <p:cNvSpPr/>
           <p:nvPr/>
         </p:nvSpPr>
         <p:spPr>
           <a:xfrm>
-            <a:off x="7474306" y="4105656"/>
+            <a:off x="7318858" y="3785616"/>
             <a:ext cx="128016" cy="128016"/>
           </a:xfrm>
           <a:prstGeom prst="ellipse">
@@ -3625,13 +4039,13 @@
       </p:sp>
       <p:sp>
         <p:nvSpPr>
-          <p:cNvPr id="16" name="Hinge"/>
+          <p:cNvPr id="33" name="Hinge"/>
           <p:cNvSpPr/>
           <p:nvPr/>
         </p:nvSpPr>
         <p:spPr>
           <a:xfrm>
-            <a:off x="10521086" y="3323350"/>
+            <a:off x="10676534" y="2923483"/>
             <a:ext cx="128016" cy="128016"/>
           </a:xfrm>
           <a:prstGeom prst="ellipse">
@@ -3650,14 +4064,114 @@
       </p:sp>
       <p:sp>
         <p:nvSpPr>
-          <p:cNvPr id="17" name="Text 15"/>
+          <p:cNvPr id="34" name="Dimension line"/>
+          <p:cNvSpPr/>
+          <p:nvPr/>
+        </p:nvSpPr>
+        <p:spPr>
+          <a:xfrm>
+            <a:off x="7086600" y="4800600"/>
+            <a:ext cx="4246474" cy="0"/>
+          </a:xfrm>
+          <a:prstGeom prst="line">
+            <a:avLst/>
+          </a:prstGeom>
+          <a:noFill/>
+          <a:ln w="12700">
+            <a:solidFill>
+              <a:srgbClr val="BFD7F2"/>
+            </a:solidFill>
+            <a:prstDash val="solid"/>
+            <a:headEnd type="triangle"/>
+            <a:tailEnd type="triangle"/>
+          </a:ln>
+        </p:spPr>
+      </p:sp>
+      <p:sp>
+        <p:nvSpPr>
+          <p:cNvPr id="35" name="Text 33"/>
           <p:cNvSpPr txBox="1"/>
           <p:nvPr/>
         </p:nvSpPr>
         <p:spPr>
           <a:xfrm>
-            <a:off x="7178040" y="4892040"/>
-            <a:ext cx="4206240" cy="320040"/>
+            <a:off x="7086600" y="4828032"/>
+            <a:ext cx="4246474" cy="274320"/>
+          </a:xfrm>
+          <a:prstGeom prst="rect">
+            <a:avLst/>
+          </a:prstGeom>
+          <a:noFill/>
+          <a:ln/>
+        </p:spPr>
+        <p:txBody>
+          <a:bodyPr wrap="square" lIns="0" tIns="0" rIns="0" bIns="0" rtlCol="0" anchor="ctr"/>
+          <a:lstStyle/>
+          <a:p>
+            <a:pPr algn="ctr" indent="0" marL="0">
+              <a:buNone/>
+            </a:pPr>
+            <a:r>
+              <a:rPr lang="en-US" sz="1200" dirty="0">
+                <a:solidFill>
+                  <a:schemeClr val="bg2"/>
+                </a:solidFill>
+              </a:rPr>
+              <a:t>L = 250 mm</a:t>
+            </a:r>
+            <a:endParaRPr lang="en-US" sz="1200" dirty="0"/>
+          </a:p>
+        </p:txBody>
+      </p:sp>
+      <p:sp>
+        <p:nvSpPr>
+          <p:cNvPr id="36" name="Text 34"/>
+          <p:cNvSpPr txBox="1"/>
+          <p:nvPr/>
+        </p:nvSpPr>
+        <p:spPr>
+          <a:xfrm>
+            <a:off x="7543800" y="3520440"/>
+            <a:ext cx="365760" cy="365760"/>
+          </a:xfrm>
+          <a:prstGeom prst="rect">
+            <a:avLst/>
+          </a:prstGeom>
+          <a:noFill/>
+          <a:ln/>
+        </p:spPr>
+        <p:txBody>
+          <a:bodyPr wrap="square" lIns="0" tIns="0" rIns="0" bIns="0" rtlCol="0" anchor="ctr"/>
+          <a:lstStyle/>
+          <a:p>
+            <a:pPr indent="0" marL="0">
+              <a:buNone/>
+            </a:pPr>
+            <a:r>
+              <a:rPr lang="en-US" sz="1800" i="1" dirty="0">
+                <a:solidFill>
+                  <a:schemeClr val="accent1"/>
+                </a:solidFill>
+                <a:latin typeface="Cambria" pitchFamily="34" charset="0"/>
+                <a:ea typeface="Cambria" pitchFamily="34" charset="-122"/>
+                <a:cs typeface="Cambria" pitchFamily="34" charset="-120"/>
+              </a:rPr>
+              <a:t>θ</a:t>
+            </a:r>
+            <a:endParaRPr lang="en-US" sz="1800" dirty="0"/>
+          </a:p>
+        </p:txBody>
+      </p:sp>
+      <p:sp>
+        <p:nvSpPr>
+          <p:cNvPr id="37" name="Text 35"/>
+          <p:cNvSpPr txBox="1"/>
+          <p:nvPr/>
+        </p:nvSpPr>
+        <p:spPr>
+          <a:xfrm>
+            <a:off x="6858000" y="5257800"/>
+            <a:ext cx="4572000" cy="274320"/>
           </a:xfrm>
           <a:prstGeom prst="rect">
             <a:avLst/>
@@ -3719,8 +4233,8 @@
         </p:nvSpPr>
         <p:spPr>
           <a:xfrm>
-            <a:off x="548640" y="365760"/>
-            <a:ext cx="11094415" cy="822960"/>
+            <a:off x="548640" y="621792"/>
+            <a:ext cx="11094415" cy="685800"/>
           </a:xfrm>
           <a:prstGeom prst="rect">
             <a:avLst/>
@@ -3744,6 +4258,42 @@
               <a:t>Building it: materials, process and cost</a:t>
             </a:r>
             <a:endParaRPr lang="en-US" sz="3400" dirty="0"/>
+          </a:p>
+        </p:txBody>
+      </p:sp>
+      <p:sp>
+        <p:nvSpPr>
+          <p:cNvPr id="3" name="Text 1"/>
+          <p:cNvSpPr txBox="1"/>
+          <p:nvPr/>
+        </p:nvSpPr>
+        <p:spPr>
+          <a:xfrm>
+            <a:off x="548640" y="384048"/>
+            <a:ext cx="7315200" cy="256032"/>
+          </a:xfrm>
+          <a:prstGeom prst="rect">
+            <a:avLst/>
+          </a:prstGeom>
+          <a:noFill/>
+          <a:ln/>
+        </p:spPr>
+        <p:txBody>
+          <a:bodyPr wrap="square" lIns="0" tIns="0" rIns="0" bIns="0" rtlCol="0" anchor="ctr"/>
+          <a:lstStyle/>
+          <a:p>
+            <a:pPr indent="0" marL="0">
+              <a:buNone/>
+            </a:pPr>
+            <a:r>
+              <a:rPr lang="en-US" sz="1200" b="1" spc="300" kern="0" dirty="0">
+                <a:solidFill>
+                  <a:schemeClr val="accent2"/>
+                </a:solidFill>
+              </a:rPr>
+              <a:t>09  ·  BUILD</a:t>
+            </a:r>
+            <a:endParaRPr lang="en-US" sz="1200" dirty="0"/>
           </a:p>
         </p:txBody>
       </p:sp>
@@ -4815,7 +5365,7 @@
       </p:graphicFrame>
       <p:sp>
         <p:nvSpPr>
-          <p:cNvPr id="4" name="Text 1"/>
+          <p:cNvPr id="5" name="Text 2"/>
           <p:cNvSpPr txBox="1"/>
           <p:nvPr/>
         </p:nvSpPr>
@@ -4851,7 +5401,7 @@
       </p:sp>
       <p:sp>
         <p:nvSpPr>
-          <p:cNvPr id="5" name="Text 2"/>
+          <p:cNvPr id="6" name="Text 3"/>
           <p:cNvSpPr txBox="1"/>
           <p:nvPr/>
         </p:nvSpPr>
@@ -4887,7 +5437,7 @@
       </p:sp>
       <p:sp>
         <p:nvSpPr>
-          <p:cNvPr id="6" name="DFM icon circle 1"/>
+          <p:cNvPr id="7" name="DFM icon circle 1"/>
           <p:cNvSpPr/>
           <p:nvPr/>
         </p:nvSpPr>
@@ -4907,7 +5457,7 @@
       </p:sp>
       <p:pic>
         <p:nvPicPr>
-          <p:cNvPr id="7" name="Image 0" descr="Standard stock icon">    </p:cNvPr>
+          <p:cNvPr id="8" name="Image 0" descr="Standard stock icon">    </p:cNvPr>
           <p:cNvPicPr>
             <a:picLocks noChangeAspect="1"/>
           </p:cNvPicPr>
@@ -4931,7 +5481,7 @@
       </p:pic>
       <p:sp>
         <p:nvSpPr>
-          <p:cNvPr id="8" name="Text 4"/>
+          <p:cNvPr id="9" name="Text 5"/>
           <p:cNvSpPr txBox="1"/>
           <p:nvPr/>
         </p:nvSpPr>
@@ -4967,7 +5517,7 @@
       </p:sp>
       <p:sp>
         <p:nvSpPr>
-          <p:cNvPr id="9" name="Text 5"/>
+          <p:cNvPr id="10" name="Text 6"/>
           <p:cNvSpPr txBox="1"/>
           <p:nvPr/>
         </p:nvSpPr>
@@ -5003,7 +5553,7 @@
       </p:sp>
       <p:sp>
         <p:nvSpPr>
-          <p:cNvPr id="10" name="DFM icon circle 2"/>
+          <p:cNvPr id="11" name="DFM icon circle 2"/>
           <p:cNvSpPr/>
           <p:nvPr/>
         </p:nvSpPr>
@@ -5023,7 +5573,7 @@
       </p:sp>
       <p:pic>
         <p:nvPicPr>
-          <p:cNvPr id="11" name="Image 1" descr="Few unique parts icon">    </p:cNvPr>
+          <p:cNvPr id="12" name="Image 1" descr="Few unique parts icon">    </p:cNvPr>
           <p:cNvPicPr>
             <a:picLocks noChangeAspect="1"/>
           </p:cNvPicPr>
@@ -5047,7 +5597,7 @@
       </p:pic>
       <p:sp>
         <p:nvSpPr>
-          <p:cNvPr id="12" name="Text 7"/>
+          <p:cNvPr id="13" name="Text 8"/>
           <p:cNvSpPr txBox="1"/>
           <p:nvPr/>
         </p:nvSpPr>
@@ -5083,7 +5633,7 @@
       </p:sp>
       <p:sp>
         <p:nvSpPr>
-          <p:cNvPr id="13" name="Text 8"/>
+          <p:cNvPr id="14" name="Text 9"/>
           <p:cNvSpPr txBox="1"/>
           <p:nvPr/>
         </p:nvSpPr>
@@ -5119,7 +5669,7 @@
       </p:sp>
       <p:sp>
         <p:nvSpPr>
-          <p:cNvPr id="14" name="DFM icon circle 3"/>
+          <p:cNvPr id="15" name="DFM icon circle 3"/>
           <p:cNvSpPr/>
           <p:nvPr/>
         </p:nvSpPr>
@@ -5139,7 +5689,7 @@
       </p:sp>
       <p:pic>
         <p:nvPicPr>
-          <p:cNvPr id="15" name="Image 2" descr="Forgiving tolerances icon">    </p:cNvPr>
+          <p:cNvPr id="16" name="Image 2" descr="Forgiving tolerances icon">    </p:cNvPr>
           <p:cNvPicPr>
             <a:picLocks noChangeAspect="1"/>
           </p:cNvPicPr>
@@ -5163,7 +5713,7 @@
       </p:pic>
       <p:sp>
         <p:nvSpPr>
-          <p:cNvPr id="16" name="Text 10"/>
+          <p:cNvPr id="17" name="Text 11"/>
           <p:cNvSpPr txBox="1"/>
           <p:nvPr/>
         </p:nvSpPr>
@@ -5199,7 +5749,7 @@
       </p:sp>
       <p:sp>
         <p:nvSpPr>
-          <p:cNvPr id="17" name="Text 11"/>
+          <p:cNvPr id="18" name="Text 12"/>
           <p:cNvSpPr txBox="1"/>
           <p:nvPr/>
         </p:nvSpPr>
@@ -5245,7 +5795,7 @@
         </p:nvSpPr>
         <p:spPr>
           <a:xfrm>
-            <a:off x="11094415" y="6400800"/>
+            <a:off x="11094415" y="6291072"/>
             <a:ext cx="548640" cy="274320"/>
           </a:xfrm>
           <a:prstGeom prst="rect">
@@ -5313,8 +5863,8 @@
         </p:nvSpPr>
         <p:spPr>
           <a:xfrm>
-            <a:off x="548640" y="365760"/>
-            <a:ext cx="11094415" cy="822960"/>
+            <a:off x="548640" y="621792"/>
+            <a:ext cx="11094415" cy="685800"/>
           </a:xfrm>
           <a:prstGeom prst="rect">
             <a:avLst/>
@@ -5338,6 +5888,42 @@
               <a:t>Verification plan: model vs. measurement</a:t>
             </a:r>
             <a:endParaRPr lang="en-US" sz="3400" dirty="0"/>
+          </a:p>
+        </p:txBody>
+      </p:sp>
+      <p:sp>
+        <p:nvSpPr>
+          <p:cNvPr id="3" name="Text 1"/>
+          <p:cNvSpPr txBox="1"/>
+          <p:nvPr/>
+        </p:nvSpPr>
+        <p:spPr>
+          <a:xfrm>
+            <a:off x="548640" y="384048"/>
+            <a:ext cx="7315200" cy="256032"/>
+          </a:xfrm>
+          <a:prstGeom prst="rect">
+            <a:avLst/>
+          </a:prstGeom>
+          <a:noFill/>
+          <a:ln/>
+        </p:spPr>
+        <p:txBody>
+          <a:bodyPr wrap="square" lIns="0" tIns="0" rIns="0" bIns="0" rtlCol="0" anchor="ctr"/>
+          <a:lstStyle/>
+          <a:p>
+            <a:pPr indent="0" marL="0">
+              <a:buNone/>
+            </a:pPr>
+            <a:r>
+              <a:rPr lang="en-US" sz="1200" b="1" spc="300" kern="0" dirty="0">
+                <a:solidFill>
+                  <a:schemeClr val="accent2"/>
+                </a:solidFill>
+              </a:rPr>
+              <a:t>10  ·  TEST</a:t>
+            </a:r>
+            <a:endParaRPr lang="en-US" sz="1200" dirty="0"/>
           </a:p>
         </p:txBody>
       </p:sp>
@@ -6498,7 +7084,7 @@
       </p:graphicFrame>
       <p:sp>
         <p:nvSpPr>
-          <p:cNvPr id="4" name="Takeaway banner"/>
+          <p:cNvPr id="5" name="Takeaway banner"/>
           <p:cNvSpPr/>
           <p:nvPr/>
         </p:nvSpPr>
@@ -6520,7 +7106,7 @@
       </p:sp>
       <p:sp>
         <p:nvSpPr>
-          <p:cNvPr id="5" name="Text 2"/>
+          <p:cNvPr id="6" name="Text 3"/>
           <p:cNvSpPr txBox="1"/>
           <p:nvPr/>
         </p:nvSpPr>
@@ -6577,7 +7163,7 @@
         </p:nvSpPr>
         <p:spPr>
           <a:xfrm>
-            <a:off x="11094415" y="6400800"/>
+            <a:off x="11094415" y="6291072"/>
             <a:ext cx="548640" cy="274320"/>
           </a:xfrm>
           <a:prstGeom prst="rect">
@@ -6645,8 +7231,8 @@
         </p:nvSpPr>
         <p:spPr>
           <a:xfrm>
-            <a:off x="548640" y="365760"/>
-            <a:ext cx="11094415" cy="822960"/>
+            <a:off x="548640" y="621792"/>
+            <a:ext cx="11094415" cy="685800"/>
           </a:xfrm>
           <a:prstGeom prst="rect">
             <a:avLst/>
@@ -6675,7 +7261,43 @@
       </p:sp>
       <p:sp>
         <p:nvSpPr>
-          <p:cNvPr id="3" name="v1 card"/>
+          <p:cNvPr id="3" name="Text 1"/>
+          <p:cNvSpPr txBox="1"/>
+          <p:nvPr/>
+        </p:nvSpPr>
+        <p:spPr>
+          <a:xfrm>
+            <a:off x="548640" y="384048"/>
+            <a:ext cx="7315200" cy="256032"/>
+          </a:xfrm>
+          <a:prstGeom prst="rect">
+            <a:avLst/>
+          </a:prstGeom>
+          <a:noFill/>
+          <a:ln/>
+        </p:spPr>
+        <p:txBody>
+          <a:bodyPr wrap="square" lIns="0" tIns="0" rIns="0" bIns="0" rtlCol="0" anchor="ctr"/>
+          <a:lstStyle/>
+          <a:p>
+            <a:pPr indent="0" marL="0">
+              <a:buNone/>
+            </a:pPr>
+            <a:r>
+              <a:rPr lang="en-US" sz="1200" b="1" spc="300" kern="0" dirty="0">
+                <a:solidFill>
+                  <a:schemeClr val="accent2"/>
+                </a:solidFill>
+              </a:rPr>
+              <a:t>11  ·  ITERATE</a:t>
+            </a:r>
+            <a:endParaRPr lang="en-US" sz="1200" dirty="0"/>
+          </a:p>
+        </p:txBody>
+      </p:sp>
+      <p:sp>
+        <p:nvSpPr>
+          <p:cNvPr id="4" name="v1 card"/>
           <p:cNvSpPr/>
           <p:nvPr/>
         </p:nvSpPr>
@@ -6693,11 +7315,18 @@
             <a:schemeClr val="bg2"/>
           </a:solidFill>
           <a:ln/>
-        </p:spPr>
-      </p:sp>
-      <p:sp>
-        <p:nvSpPr>
-          <p:cNvPr id="4" name="Text 2"/>
+          <a:effectLst>
+            <a:outerShdw sx="100000" sy="100000" kx="0" ky="0" algn="bl" rotWithShape="0" blurRad="127000" dist="38100" dir="5400000">
+              <a:srgbClr val="0A2540">
+                <a:alpha val="10000"/>
+              </a:srgbClr>
+            </a:outerShdw>
+          </a:effectLst>
+        </p:spPr>
+      </p:sp>
+      <p:sp>
+        <p:nvSpPr>
+          <p:cNvPr id="5" name="Text 3"/>
           <p:cNvSpPr txBox="1"/>
           <p:nvPr/>
         </p:nvSpPr>
@@ -6733,7 +7362,7 @@
       </p:sp>
       <p:sp>
         <p:nvSpPr>
-          <p:cNvPr id="5" name="Text 3"/>
+          <p:cNvPr id="6" name="Text 4"/>
           <p:cNvSpPr txBox="1"/>
           <p:nvPr/>
         </p:nvSpPr>
@@ -6772,7 +7401,7 @@
       </p:sp>
       <p:sp>
         <p:nvSpPr>
-          <p:cNvPr id="6" name="Text 4"/>
+          <p:cNvPr id="7" name="Text 5"/>
           <p:cNvSpPr txBox="1"/>
           <p:nvPr/>
         </p:nvSpPr>
@@ -6808,7 +7437,7 @@
       </p:sp>
       <p:sp>
         <p:nvSpPr>
-          <p:cNvPr id="7" name="Arrow v1 to v2"/>
+          <p:cNvPr id="8" name="Arrow v1 to v2"/>
           <p:cNvSpPr/>
           <p:nvPr/>
         </p:nvSpPr>
@@ -6828,7 +7457,7 @@
       </p:sp>
       <p:sp>
         <p:nvSpPr>
-          <p:cNvPr id="8" name="v2 card"/>
+          <p:cNvPr id="9" name="v2 card"/>
           <p:cNvSpPr/>
           <p:nvPr/>
         </p:nvSpPr>
@@ -6850,7 +7479,7 @@
       </p:sp>
       <p:sp>
         <p:nvSpPr>
-          <p:cNvPr id="9" name="Text 7"/>
+          <p:cNvPr id="10" name="Text 8"/>
           <p:cNvSpPr txBox="1"/>
           <p:nvPr/>
         </p:nvSpPr>
@@ -6886,7 +7515,7 @@
       </p:sp>
       <p:sp>
         <p:nvSpPr>
-          <p:cNvPr id="10" name="Text 8"/>
+          <p:cNvPr id="11" name="Text 9"/>
           <p:cNvSpPr txBox="1"/>
           <p:nvPr/>
         </p:nvSpPr>
@@ -6925,7 +7554,7 @@
       </p:sp>
       <p:sp>
         <p:nvSpPr>
-          <p:cNvPr id="11" name="Text 9"/>
+          <p:cNvPr id="12" name="Text 10"/>
           <p:cNvSpPr txBox="1"/>
           <p:nvPr/>
         </p:nvSpPr>
@@ -7705,7 +8334,7 @@
         </p:nvSpPr>
         <p:spPr>
           <a:xfrm>
-            <a:off x="11094415" y="6400800"/>
+            <a:off x="11094415" y="6291072"/>
             <a:ext cx="548640" cy="274320"/>
           </a:xfrm>
           <a:prstGeom prst="rect">
@@ -7773,8 +8402,8 @@
         </p:nvSpPr>
         <p:spPr>
           <a:xfrm>
-            <a:off x="548640" y="365760"/>
-            <a:ext cx="11094415" cy="822960"/>
+            <a:off x="548640" y="621792"/>
+            <a:ext cx="11094415" cy="685800"/>
           </a:xfrm>
           <a:prstGeom prst="rect">
             <a:avLst/>
@@ -7803,29 +8432,72 @@
       </p:sp>
       <p:sp>
         <p:nvSpPr>
-          <p:cNvPr id="3" name="Consideration card 1"/>
+          <p:cNvPr id="3" name="Text 1"/>
+          <p:cNvSpPr txBox="1"/>
+          <p:nvPr/>
+        </p:nvSpPr>
+        <p:spPr>
+          <a:xfrm>
+            <a:off x="548640" y="384048"/>
+            <a:ext cx="7315200" cy="256032"/>
+          </a:xfrm>
+          <a:prstGeom prst="rect">
+            <a:avLst/>
+          </a:prstGeom>
+          <a:noFill/>
+          <a:ln/>
+        </p:spPr>
+        <p:txBody>
+          <a:bodyPr wrap="square" lIns="0" tIns="0" rIns="0" bIns="0" rtlCol="0" anchor="ctr"/>
+          <a:lstStyle/>
+          <a:p>
+            <a:pPr indent="0" marL="0">
+              <a:buNone/>
+            </a:pPr>
+            <a:r>
+              <a:rPr lang="en-US" sz="1200" b="1" spc="300" kern="0" dirty="0">
+                <a:solidFill>
+                  <a:schemeClr val="accent2"/>
+                </a:solidFill>
+              </a:rPr>
+              <a:t>12  ·  REFLECT</a:t>
+            </a:r>
+            <a:endParaRPr lang="en-US" sz="1200" dirty="0"/>
+          </a:p>
+        </p:txBody>
+      </p:sp>
+      <p:sp>
+        <p:nvSpPr>
+          <p:cNvPr id="4" name="Consideration card 1"/>
           <p:cNvSpPr/>
           <p:nvPr/>
         </p:nvSpPr>
         <p:spPr>
           <a:xfrm>
             <a:off x="548640" y="1508760"/>
-            <a:ext cx="5468112" cy="2286000"/>
+            <a:ext cx="5468112" cy="2103120"/>
           </a:xfrm>
           <a:prstGeom prst="roundRect">
             <a:avLst>
-              <a:gd name="adj" fmla="val 4800"/>
+              <a:gd name="adj" fmla="val 5217"/>
             </a:avLst>
           </a:prstGeom>
           <a:solidFill>
             <a:schemeClr val="bg2"/>
           </a:solidFill>
           <a:ln/>
-        </p:spPr>
-      </p:sp>
-      <p:sp>
-        <p:nvSpPr>
-          <p:cNvPr id="4" name="Consideration icon circle 1"/>
+          <a:effectLst>
+            <a:outerShdw sx="100000" sy="100000" kx="0" ky="0" algn="bl" rotWithShape="0" blurRad="127000" dist="38100" dir="5400000">
+              <a:srgbClr val="0A2540">
+                <a:alpha val="10000"/>
+              </a:srgbClr>
+            </a:outerShdw>
+          </a:effectLst>
+        </p:spPr>
+      </p:sp>
+      <p:sp>
+        <p:nvSpPr>
+          <p:cNvPr id="5" name="Consideration icon circle 1"/>
           <p:cNvSpPr/>
           <p:nvPr/>
         </p:nvSpPr>
@@ -7845,7 +8517,7 @@
       </p:sp>
       <p:pic>
         <p:nvPicPr>
-          <p:cNvPr id="5" name="Image 0" descr="Safety icon">    </p:cNvPr>
+          <p:cNvPr id="6" name="Image 0" descr="Safety icon">    </p:cNvPr>
           <p:cNvPicPr>
             <a:picLocks noChangeAspect="1"/>
           </p:cNvPicPr>
@@ -7869,7 +8541,7 @@
       </p:pic>
       <p:sp>
         <p:nvSpPr>
-          <p:cNvPr id="6" name="Text 3"/>
+          <p:cNvPr id="7" name="Text 4"/>
           <p:cNvSpPr txBox="1"/>
           <p:nvPr/>
         </p:nvSpPr>
@@ -7905,14 +8577,14 @@
       </p:sp>
       <p:sp>
         <p:nvSpPr>
-          <p:cNvPr id="7" name="Text 4"/>
+          <p:cNvPr id="8" name="Text 5"/>
           <p:cNvSpPr txBox="1"/>
           <p:nvPr/>
         </p:nvSpPr>
         <p:spPr>
           <a:xfrm>
-            <a:off x="822960" y="2697480"/>
-            <a:ext cx="4937760" cy="960120"/>
+            <a:off x="822960" y="2606040"/>
+            <a:ext cx="4937760" cy="868680"/>
           </a:xfrm>
           <a:prstGeom prst="rect">
             <a:avLst/>
@@ -7941,29 +8613,36 @@
       </p:sp>
       <p:sp>
         <p:nvSpPr>
-          <p:cNvPr id="8" name="Consideration card 2"/>
+          <p:cNvPr id="9" name="Consideration card 2"/>
           <p:cNvSpPr/>
           <p:nvPr/>
         </p:nvSpPr>
         <p:spPr>
           <a:xfrm>
             <a:off x="6172200" y="1508760"/>
-            <a:ext cx="5468112" cy="2286000"/>
+            <a:ext cx="5468112" cy="2103120"/>
           </a:xfrm>
           <a:prstGeom prst="roundRect">
             <a:avLst>
-              <a:gd name="adj" fmla="val 4800"/>
+              <a:gd name="adj" fmla="val 5217"/>
             </a:avLst>
           </a:prstGeom>
           <a:solidFill>
             <a:schemeClr val="bg2"/>
           </a:solidFill>
           <a:ln/>
-        </p:spPr>
-      </p:sp>
-      <p:sp>
-        <p:nvSpPr>
-          <p:cNvPr id="9" name="Consideration icon circle 2"/>
+          <a:effectLst>
+            <a:outerShdw sx="100000" sy="100000" kx="0" ky="0" algn="bl" rotWithShape="0" blurRad="127000" dist="38100" dir="5400000">
+              <a:srgbClr val="0A2540">
+                <a:alpha val="10000"/>
+              </a:srgbClr>
+            </a:outerShdw>
+          </a:effectLst>
+        </p:spPr>
+      </p:sp>
+      <p:sp>
+        <p:nvSpPr>
+          <p:cNvPr id="10" name="Consideration icon circle 2"/>
           <p:cNvSpPr/>
           <p:nvPr/>
         </p:nvSpPr>
@@ -7983,7 +8662,7 @@
       </p:sp>
       <p:pic>
         <p:nvPicPr>
-          <p:cNvPr id="10" name="Image 1" descr="Sustainability icon">    </p:cNvPr>
+          <p:cNvPr id="11" name="Image 1" descr="Sustainability icon">    </p:cNvPr>
           <p:cNvPicPr>
             <a:picLocks noChangeAspect="1"/>
           </p:cNvPicPr>
@@ -8007,7 +8686,7 @@
       </p:pic>
       <p:sp>
         <p:nvSpPr>
-          <p:cNvPr id="11" name="Text 7"/>
+          <p:cNvPr id="12" name="Text 8"/>
           <p:cNvSpPr txBox="1"/>
           <p:nvPr/>
         </p:nvSpPr>
@@ -8043,14 +8722,14 @@
       </p:sp>
       <p:sp>
         <p:nvSpPr>
-          <p:cNvPr id="12" name="Text 8"/>
+          <p:cNvPr id="13" name="Text 9"/>
           <p:cNvSpPr txBox="1"/>
           <p:nvPr/>
         </p:nvSpPr>
         <p:spPr>
           <a:xfrm>
-            <a:off x="6446520" y="2697480"/>
-            <a:ext cx="4937760" cy="960120"/>
+            <a:off x="6446520" y="2606040"/>
+            <a:ext cx="4937760" cy="868680"/>
           </a:xfrm>
           <a:prstGeom prst="rect">
             <a:avLst/>
@@ -8079,35 +8758,42 @@
       </p:sp>
       <p:sp>
         <p:nvSpPr>
-          <p:cNvPr id="13" name="Consideration card 3"/>
+          <p:cNvPr id="14" name="Consideration card 3"/>
           <p:cNvSpPr/>
           <p:nvPr/>
         </p:nvSpPr>
         <p:spPr>
           <a:xfrm>
-            <a:off x="548640" y="4023360"/>
-            <a:ext cx="5468112" cy="2286000"/>
+            <a:off x="548640" y="3840480"/>
+            <a:ext cx="5468112" cy="2103120"/>
           </a:xfrm>
           <a:prstGeom prst="roundRect">
             <a:avLst>
-              <a:gd name="adj" fmla="val 4800"/>
+              <a:gd name="adj" fmla="val 5217"/>
             </a:avLst>
           </a:prstGeom>
           <a:solidFill>
             <a:schemeClr val="bg2"/>
           </a:solidFill>
           <a:ln/>
-        </p:spPr>
-      </p:sp>
-      <p:sp>
-        <p:nvSpPr>
-          <p:cNvPr id="14" name="Consideration icon circle 3"/>
+          <a:effectLst>
+            <a:outerShdw sx="100000" sy="100000" kx="0" ky="0" algn="bl" rotWithShape="0" blurRad="127000" dist="38100" dir="5400000">
+              <a:srgbClr val="0A2540">
+                <a:alpha val="10000"/>
+              </a:srgbClr>
+            </a:outerShdw>
+          </a:effectLst>
+        </p:spPr>
+      </p:sp>
+      <p:sp>
+        <p:nvSpPr>
+          <p:cNvPr id="15" name="Consideration icon circle 3"/>
           <p:cNvSpPr/>
           <p:nvPr/>
         </p:nvSpPr>
         <p:spPr>
           <a:xfrm>
-            <a:off x="822960" y="4297680"/>
+            <a:off x="822960" y="4114800"/>
             <a:ext cx="685800" cy="685800"/>
           </a:xfrm>
           <a:prstGeom prst="ellipse">
@@ -8121,7 +8807,7 @@
       </p:sp>
       <p:pic>
         <p:nvPicPr>
-          <p:cNvPr id="15" name="Image 2" descr="Ergonomics icon">    </p:cNvPr>
+          <p:cNvPr id="16" name="Image 2" descr="Ergonomics icon">    </p:cNvPr>
           <p:cNvPicPr>
             <a:picLocks noChangeAspect="1"/>
           </p:cNvPicPr>
@@ -8135,7 +8821,7 @@
         </p:blipFill>
         <p:spPr>
           <a:xfrm>
-            <a:off x="1005840" y="4480560"/>
+            <a:off x="1005840" y="4297680"/>
             <a:ext cx="320040" cy="320040"/>
           </a:xfrm>
           <a:prstGeom prst="rect">
@@ -8145,13 +8831,13 @@
       </p:pic>
       <p:sp>
         <p:nvSpPr>
-          <p:cNvPr id="16" name="Text 11"/>
+          <p:cNvPr id="17" name="Text 12"/>
           <p:cNvSpPr txBox="1"/>
           <p:nvPr/>
         </p:nvSpPr>
         <p:spPr>
           <a:xfrm>
-            <a:off x="1737360" y="4297680"/>
+            <a:off x="1737360" y="4114800"/>
             <a:ext cx="4023360" cy="685800"/>
           </a:xfrm>
           <a:prstGeom prst="rect">
@@ -8181,14 +8867,14 @@
       </p:sp>
       <p:sp>
         <p:nvSpPr>
-          <p:cNvPr id="17" name="Text 12"/>
+          <p:cNvPr id="18" name="Text 13"/>
           <p:cNvSpPr txBox="1"/>
           <p:nvPr/>
         </p:nvSpPr>
         <p:spPr>
           <a:xfrm>
-            <a:off x="822960" y="5212080"/>
-            <a:ext cx="4937760" cy="960120"/>
+            <a:off x="822960" y="4937760"/>
+            <a:ext cx="4937760" cy="868680"/>
           </a:xfrm>
           <a:prstGeom prst="rect">
             <a:avLst/>
@@ -8217,35 +8903,42 @@
       </p:sp>
       <p:sp>
         <p:nvSpPr>
-          <p:cNvPr id="18" name="Consideration card 4"/>
+          <p:cNvPr id="19" name="Consideration card 4"/>
           <p:cNvSpPr/>
           <p:nvPr/>
         </p:nvSpPr>
         <p:spPr>
           <a:xfrm>
-            <a:off x="6172200" y="4023360"/>
-            <a:ext cx="5468112" cy="2286000"/>
+            <a:off x="6172200" y="3840480"/>
+            <a:ext cx="5468112" cy="2103120"/>
           </a:xfrm>
           <a:prstGeom prst="roundRect">
             <a:avLst>
-              <a:gd name="adj" fmla="val 4800"/>
+              <a:gd name="adj" fmla="val 5217"/>
             </a:avLst>
           </a:prstGeom>
           <a:solidFill>
             <a:schemeClr val="tx2"/>
           </a:solidFill>
           <a:ln/>
-        </p:spPr>
-      </p:sp>
-      <p:sp>
-        <p:nvSpPr>
-          <p:cNvPr id="19" name="Consideration icon circle 4"/>
+          <a:effectLst>
+            <a:outerShdw sx="100000" sy="100000" kx="0" ky="0" algn="bl" rotWithShape="0" blurRad="127000" dist="38100" dir="5400000">
+              <a:srgbClr val="0A2540">
+                <a:alpha val="10000"/>
+              </a:srgbClr>
+            </a:outerShdw>
+          </a:effectLst>
+        </p:spPr>
+      </p:sp>
+      <p:sp>
+        <p:nvSpPr>
+          <p:cNvPr id="20" name="Consideration icon circle 4"/>
           <p:cNvSpPr/>
           <p:nvPr/>
         </p:nvSpPr>
         <p:spPr>
           <a:xfrm>
-            <a:off x="6446520" y="4297680"/>
+            <a:off x="6446520" y="4114800"/>
             <a:ext cx="685800" cy="685800"/>
           </a:xfrm>
           <a:prstGeom prst="ellipse">
@@ -8259,7 +8952,7 @@
       </p:sp>
       <p:pic>
         <p:nvPicPr>
-          <p:cNvPr id="20" name="Image 3" descr="Limitations icon">    </p:cNvPr>
+          <p:cNvPr id="21" name="Image 3" descr="Limitations icon">    </p:cNvPr>
           <p:cNvPicPr>
             <a:picLocks noChangeAspect="1"/>
           </p:cNvPicPr>
@@ -8273,7 +8966,7 @@
         </p:blipFill>
         <p:spPr>
           <a:xfrm>
-            <a:off x="6629400" y="4480560"/>
+            <a:off x="6629400" y="4297680"/>
             <a:ext cx="320040" cy="320040"/>
           </a:xfrm>
           <a:prstGeom prst="rect">
@@ -8283,13 +8976,13 @@
       </p:pic>
       <p:sp>
         <p:nvSpPr>
-          <p:cNvPr id="21" name="Text 15"/>
+          <p:cNvPr id="22" name="Text 16"/>
           <p:cNvSpPr txBox="1"/>
           <p:nvPr/>
         </p:nvSpPr>
         <p:spPr>
           <a:xfrm>
-            <a:off x="7360920" y="4297680"/>
+            <a:off x="7360920" y="4114800"/>
             <a:ext cx="4023360" cy="685800"/>
           </a:xfrm>
           <a:prstGeom prst="rect">
@@ -8319,14 +9012,14 @@
       </p:sp>
       <p:sp>
         <p:nvSpPr>
-          <p:cNvPr id="22" name="Text 16"/>
+          <p:cNvPr id="23" name="Text 17"/>
           <p:cNvSpPr txBox="1"/>
           <p:nvPr/>
         </p:nvSpPr>
         <p:spPr>
           <a:xfrm>
-            <a:off x="6446520" y="5212080"/>
-            <a:ext cx="4937760" cy="960120"/>
+            <a:off x="6446520" y="4937760"/>
+            <a:ext cx="4937760" cy="868680"/>
           </a:xfrm>
           <a:prstGeom prst="rect">
             <a:avLst/>
@@ -8365,7 +9058,7 @@
         </p:nvSpPr>
         <p:spPr>
           <a:xfrm>
-            <a:off x="11094415" y="6400800"/>
+            <a:off x="11094415" y="6291072"/>
             <a:ext cx="548640" cy="274320"/>
           </a:xfrm>
           <a:prstGeom prst="rect">
@@ -8884,7 +9577,632 @@
       </p:sp>
       <p:sp>
         <p:nvSpPr>
-          <p:cNvPr id="15" name="Text 13"/>
+          <p:cNvPr id="15" name="Stand drawing line"/>
+          <p:cNvSpPr/>
+          <p:nvPr/>
+        </p:nvSpPr>
+        <p:spPr>
+          <a:xfrm flipV="1">
+            <a:off x="9422892" y="1691640"/>
+            <a:ext cx="64008" cy="64008"/>
+          </a:xfrm>
+          <a:prstGeom prst="line">
+            <a:avLst/>
+          </a:prstGeom>
+          <a:noFill/>
+          <a:ln w="9525">
+            <a:solidFill>
+              <a:srgbClr val="BFD7F2"/>
+            </a:solidFill>
+            <a:prstDash val="solid"/>
+          </a:ln>
+        </p:spPr>
+      </p:sp>
+      <p:sp>
+        <p:nvSpPr>
+          <p:cNvPr id="16" name="Stand drawing line"/>
+          <p:cNvSpPr/>
+          <p:nvPr/>
+        </p:nvSpPr>
+        <p:spPr>
+          <a:xfrm flipV="1">
+            <a:off x="9537192" y="1691640"/>
+            <a:ext cx="64008" cy="64008"/>
+          </a:xfrm>
+          <a:prstGeom prst="line">
+            <a:avLst/>
+          </a:prstGeom>
+          <a:noFill/>
+          <a:ln w="9525">
+            <a:solidFill>
+              <a:srgbClr val="BFD7F2"/>
+            </a:solidFill>
+            <a:prstDash val="solid"/>
+          </a:ln>
+        </p:spPr>
+      </p:sp>
+      <p:sp>
+        <p:nvSpPr>
+          <p:cNvPr id="17" name="Stand drawing line"/>
+          <p:cNvSpPr/>
+          <p:nvPr/>
+        </p:nvSpPr>
+        <p:spPr>
+          <a:xfrm flipV="1">
+            <a:off x="9651492" y="1691640"/>
+            <a:ext cx="64008" cy="64008"/>
+          </a:xfrm>
+          <a:prstGeom prst="line">
+            <a:avLst/>
+          </a:prstGeom>
+          <a:noFill/>
+          <a:ln w="9525">
+            <a:solidFill>
+              <a:srgbClr val="BFD7F2"/>
+            </a:solidFill>
+            <a:prstDash val="solid"/>
+          </a:ln>
+        </p:spPr>
+      </p:sp>
+      <p:sp>
+        <p:nvSpPr>
+          <p:cNvPr id="18" name="Stand drawing line"/>
+          <p:cNvSpPr/>
+          <p:nvPr/>
+        </p:nvSpPr>
+        <p:spPr>
+          <a:xfrm flipV="1">
+            <a:off x="9765792" y="1691640"/>
+            <a:ext cx="64008" cy="64008"/>
+          </a:xfrm>
+          <a:prstGeom prst="line">
+            <a:avLst/>
+          </a:prstGeom>
+          <a:noFill/>
+          <a:ln w="9525">
+            <a:solidFill>
+              <a:srgbClr val="BFD7F2"/>
+            </a:solidFill>
+            <a:prstDash val="solid"/>
+          </a:ln>
+        </p:spPr>
+      </p:sp>
+      <p:sp>
+        <p:nvSpPr>
+          <p:cNvPr id="19" name="Stand drawing line"/>
+          <p:cNvSpPr/>
+          <p:nvPr/>
+        </p:nvSpPr>
+        <p:spPr>
+          <a:xfrm flipV="1">
+            <a:off x="9880092" y="1691640"/>
+            <a:ext cx="64008" cy="64008"/>
+          </a:xfrm>
+          <a:prstGeom prst="line">
+            <a:avLst/>
+          </a:prstGeom>
+          <a:noFill/>
+          <a:ln w="9525">
+            <a:solidFill>
+              <a:srgbClr val="BFD7F2"/>
+            </a:solidFill>
+            <a:prstDash val="solid"/>
+          </a:ln>
+        </p:spPr>
+      </p:sp>
+      <p:sp>
+        <p:nvSpPr>
+          <p:cNvPr id="20" name="Stand drawing line"/>
+          <p:cNvSpPr/>
+          <p:nvPr/>
+        </p:nvSpPr>
+        <p:spPr>
+          <a:xfrm flipV="1">
+            <a:off x="9994392" y="1691640"/>
+            <a:ext cx="64008" cy="64008"/>
+          </a:xfrm>
+          <a:prstGeom prst="line">
+            <a:avLst/>
+          </a:prstGeom>
+          <a:noFill/>
+          <a:ln w="9525">
+            <a:solidFill>
+              <a:srgbClr val="BFD7F2"/>
+            </a:solidFill>
+            <a:prstDash val="solid"/>
+          </a:ln>
+        </p:spPr>
+      </p:sp>
+      <p:sp>
+        <p:nvSpPr>
+          <p:cNvPr id="21" name="Stand drawing line"/>
+          <p:cNvSpPr/>
+          <p:nvPr/>
+        </p:nvSpPr>
+        <p:spPr>
+          <a:xfrm flipV="1">
+            <a:off x="10108692" y="1691640"/>
+            <a:ext cx="64008" cy="64008"/>
+          </a:xfrm>
+          <a:prstGeom prst="line">
+            <a:avLst/>
+          </a:prstGeom>
+          <a:noFill/>
+          <a:ln w="9525">
+            <a:solidFill>
+              <a:srgbClr val="BFD7F2"/>
+            </a:solidFill>
+            <a:prstDash val="solid"/>
+          </a:ln>
+        </p:spPr>
+      </p:sp>
+      <p:sp>
+        <p:nvSpPr>
+          <p:cNvPr id="22" name="Stand drawing line"/>
+          <p:cNvSpPr/>
+          <p:nvPr/>
+        </p:nvSpPr>
+        <p:spPr>
+          <a:xfrm flipV="1">
+            <a:off x="10222992" y="1691640"/>
+            <a:ext cx="64008" cy="64008"/>
+          </a:xfrm>
+          <a:prstGeom prst="line">
+            <a:avLst/>
+          </a:prstGeom>
+          <a:noFill/>
+          <a:ln w="9525">
+            <a:solidFill>
+              <a:srgbClr val="BFD7F2"/>
+            </a:solidFill>
+            <a:prstDash val="solid"/>
+          </a:ln>
+        </p:spPr>
+      </p:sp>
+      <p:sp>
+        <p:nvSpPr>
+          <p:cNvPr id="23" name="Stand drawing line"/>
+          <p:cNvSpPr/>
+          <p:nvPr/>
+        </p:nvSpPr>
+        <p:spPr>
+          <a:xfrm flipV="1">
+            <a:off x="10337292" y="1691640"/>
+            <a:ext cx="64008" cy="64008"/>
+          </a:xfrm>
+          <a:prstGeom prst="line">
+            <a:avLst/>
+          </a:prstGeom>
+          <a:noFill/>
+          <a:ln w="9525">
+            <a:solidFill>
+              <a:srgbClr val="BFD7F2"/>
+            </a:solidFill>
+            <a:prstDash val="solid"/>
+          </a:ln>
+        </p:spPr>
+      </p:sp>
+      <p:sp>
+        <p:nvSpPr>
+          <p:cNvPr id="24" name="Stand drawing line"/>
+          <p:cNvSpPr/>
+          <p:nvPr/>
+        </p:nvSpPr>
+        <p:spPr>
+          <a:xfrm flipV="1">
+            <a:off x="10451592" y="1691640"/>
+            <a:ext cx="64008" cy="64008"/>
+          </a:xfrm>
+          <a:prstGeom prst="line">
+            <a:avLst/>
+          </a:prstGeom>
+          <a:noFill/>
+          <a:ln w="9525">
+            <a:solidFill>
+              <a:srgbClr val="BFD7F2"/>
+            </a:solidFill>
+            <a:prstDash val="solid"/>
+          </a:ln>
+        </p:spPr>
+      </p:sp>
+      <p:sp>
+        <p:nvSpPr>
+          <p:cNvPr id="25" name="Stand drawing line"/>
+          <p:cNvSpPr/>
+          <p:nvPr/>
+        </p:nvSpPr>
+        <p:spPr>
+          <a:xfrm flipV="1">
+            <a:off x="10565892" y="1691640"/>
+            <a:ext cx="64008" cy="64008"/>
+          </a:xfrm>
+          <a:prstGeom prst="line">
+            <a:avLst/>
+          </a:prstGeom>
+          <a:noFill/>
+          <a:ln w="9525">
+            <a:solidFill>
+              <a:srgbClr val="BFD7F2"/>
+            </a:solidFill>
+            <a:prstDash val="solid"/>
+          </a:ln>
+        </p:spPr>
+      </p:sp>
+      <p:sp>
+        <p:nvSpPr>
+          <p:cNvPr id="26" name="Stand drawing line"/>
+          <p:cNvSpPr/>
+          <p:nvPr/>
+        </p:nvSpPr>
+        <p:spPr>
+          <a:xfrm flipV="1">
+            <a:off x="10680192" y="1691640"/>
+            <a:ext cx="64008" cy="64008"/>
+          </a:xfrm>
+          <a:prstGeom prst="line">
+            <a:avLst/>
+          </a:prstGeom>
+          <a:noFill/>
+          <a:ln w="9525">
+            <a:solidFill>
+              <a:srgbClr val="BFD7F2"/>
+            </a:solidFill>
+            <a:prstDash val="solid"/>
+          </a:ln>
+        </p:spPr>
+      </p:sp>
+      <p:sp>
+        <p:nvSpPr>
+          <p:cNvPr id="27" name="Stand drawing line"/>
+          <p:cNvSpPr/>
+          <p:nvPr/>
+        </p:nvSpPr>
+        <p:spPr>
+          <a:xfrm flipV="1">
+            <a:off x="10794492" y="1691640"/>
+            <a:ext cx="64008" cy="64008"/>
+          </a:xfrm>
+          <a:prstGeom prst="line">
+            <a:avLst/>
+          </a:prstGeom>
+          <a:noFill/>
+          <a:ln w="9525">
+            <a:solidFill>
+              <a:srgbClr val="BFD7F2"/>
+            </a:solidFill>
+            <a:prstDash val="solid"/>
+          </a:ln>
+        </p:spPr>
+      </p:sp>
+      <p:sp>
+        <p:nvSpPr>
+          <p:cNvPr id="28" name="Stand drawing line"/>
+          <p:cNvSpPr/>
+          <p:nvPr/>
+        </p:nvSpPr>
+        <p:spPr>
+          <a:xfrm flipV="1">
+            <a:off x="10908792" y="1691640"/>
+            <a:ext cx="64008" cy="64008"/>
+          </a:xfrm>
+          <a:prstGeom prst="line">
+            <a:avLst/>
+          </a:prstGeom>
+          <a:noFill/>
+          <a:ln w="9525">
+            <a:solidFill>
+              <a:srgbClr val="BFD7F2"/>
+            </a:solidFill>
+            <a:prstDash val="solid"/>
+          </a:ln>
+        </p:spPr>
+      </p:sp>
+      <p:sp>
+        <p:nvSpPr>
+          <p:cNvPr id="29" name="Stand drawing line"/>
+          <p:cNvSpPr/>
+          <p:nvPr/>
+        </p:nvSpPr>
+        <p:spPr>
+          <a:xfrm flipV="1">
+            <a:off x="11023092" y="1691640"/>
+            <a:ext cx="64008" cy="64008"/>
+          </a:xfrm>
+          <a:prstGeom prst="line">
+            <a:avLst/>
+          </a:prstGeom>
+          <a:noFill/>
+          <a:ln w="9525">
+            <a:solidFill>
+              <a:srgbClr val="BFD7F2"/>
+            </a:solidFill>
+            <a:prstDash val="solid"/>
+          </a:ln>
+        </p:spPr>
+      </p:sp>
+      <p:sp>
+        <p:nvSpPr>
+          <p:cNvPr id="30" name="Stand drawing line"/>
+          <p:cNvSpPr/>
+          <p:nvPr/>
+        </p:nvSpPr>
+        <p:spPr>
+          <a:xfrm flipV="1">
+            <a:off x="11137392" y="1691640"/>
+            <a:ext cx="64008" cy="64008"/>
+          </a:xfrm>
+          <a:prstGeom prst="line">
+            <a:avLst/>
+          </a:prstGeom>
+          <a:noFill/>
+          <a:ln w="9525">
+            <a:solidFill>
+              <a:srgbClr val="BFD7F2"/>
+            </a:solidFill>
+            <a:prstDash val="solid"/>
+          </a:ln>
+        </p:spPr>
+      </p:sp>
+      <p:sp>
+        <p:nvSpPr>
+          <p:cNvPr id="31" name="Stand drawing line"/>
+          <p:cNvSpPr/>
+          <p:nvPr/>
+        </p:nvSpPr>
+        <p:spPr>
+          <a:xfrm flipV="1">
+            <a:off x="11251692" y="1691640"/>
+            <a:ext cx="64008" cy="64008"/>
+          </a:xfrm>
+          <a:prstGeom prst="line">
+            <a:avLst/>
+          </a:prstGeom>
+          <a:noFill/>
+          <a:ln w="9525">
+            <a:solidFill>
+              <a:srgbClr val="BFD7F2"/>
+            </a:solidFill>
+            <a:prstDash val="solid"/>
+          </a:ln>
+        </p:spPr>
+      </p:sp>
+      <p:sp>
+        <p:nvSpPr>
+          <p:cNvPr id="32" name="Stand drawing line"/>
+          <p:cNvSpPr/>
+          <p:nvPr/>
+        </p:nvSpPr>
+        <p:spPr>
+          <a:xfrm>
+            <a:off x="9418320" y="1691640"/>
+            <a:ext cx="1965960" cy="0"/>
+          </a:xfrm>
+          <a:prstGeom prst="line">
+            <a:avLst/>
+          </a:prstGeom>
+          <a:noFill/>
+          <a:ln w="38100">
+            <a:solidFill>
+              <a:srgbClr val="BFD7F2"/>
+            </a:solidFill>
+            <a:prstDash val="solid"/>
+          </a:ln>
+        </p:spPr>
+      </p:sp>
+      <p:sp>
+        <p:nvSpPr>
+          <p:cNvPr id="33" name="Stand drawing line"/>
+          <p:cNvSpPr/>
+          <p:nvPr/>
+        </p:nvSpPr>
+        <p:spPr>
+          <a:xfrm>
+            <a:off x="9555480" y="1463040"/>
+            <a:ext cx="0" cy="228600"/>
+          </a:xfrm>
+          <a:prstGeom prst="line">
+            <a:avLst/>
+          </a:prstGeom>
+          <a:noFill/>
+          <a:ln w="38100">
+            <a:solidFill>
+              <a:srgbClr val="BFD7F2"/>
+            </a:solidFill>
+            <a:prstDash val="solid"/>
+          </a:ln>
+        </p:spPr>
+      </p:sp>
+      <p:sp>
+        <p:nvSpPr>
+          <p:cNvPr id="34" name="Stand drawing line"/>
+          <p:cNvSpPr/>
+          <p:nvPr/>
+        </p:nvSpPr>
+        <p:spPr>
+          <a:xfrm flipV="1">
+            <a:off x="9555480" y="1028700"/>
+            <a:ext cx="1691640" cy="434340"/>
+          </a:xfrm>
+          <a:prstGeom prst="line">
+            <a:avLst/>
+          </a:prstGeom>
+          <a:noFill/>
+          <a:ln w="50800">
+            <a:solidFill>
+              <a:srgbClr val="BFD7F2"/>
+            </a:solidFill>
+            <a:prstDash val="solid"/>
+          </a:ln>
+        </p:spPr>
+      </p:sp>
+      <p:sp>
+        <p:nvSpPr>
+          <p:cNvPr id="35" name="Stand drawing line"/>
+          <p:cNvSpPr/>
+          <p:nvPr/>
+        </p:nvSpPr>
+        <p:spPr>
+          <a:xfrm flipV="1">
+            <a:off x="10835640" y="1063904"/>
+            <a:ext cx="274320" cy="627736"/>
+          </a:xfrm>
+          <a:prstGeom prst="line">
+            <a:avLst/>
+          </a:prstGeom>
+          <a:noFill/>
+          <a:ln w="38100">
+            <a:solidFill>
+              <a:srgbClr val="BFD7F2"/>
+            </a:solidFill>
+            <a:prstDash val="solid"/>
+          </a:ln>
+        </p:spPr>
+      </p:sp>
+      <p:sp>
+        <p:nvSpPr>
+          <p:cNvPr id="36" name="Stand drawing line"/>
+          <p:cNvSpPr/>
+          <p:nvPr/>
+        </p:nvSpPr>
+        <p:spPr>
+          <a:xfrm flipV="1">
+            <a:off x="11041380" y="1063904"/>
+            <a:ext cx="68580" cy="627736"/>
+          </a:xfrm>
+          <a:prstGeom prst="line">
+            <a:avLst/>
+          </a:prstGeom>
+          <a:noFill/>
+          <a:ln w="19050">
+            <a:solidFill>
+              <a:srgbClr val="BFD7F2"/>
+            </a:solidFill>
+            <a:prstDash val="dash"/>
+          </a:ln>
+        </p:spPr>
+      </p:sp>
+      <p:sp>
+        <p:nvSpPr>
+          <p:cNvPr id="37" name="Stand drawing line"/>
+          <p:cNvSpPr/>
+          <p:nvPr/>
+        </p:nvSpPr>
+        <p:spPr>
+          <a:xfrm flipV="1">
+            <a:off x="9624060" y="981151"/>
+            <a:ext cx="1577340" cy="405079"/>
+          </a:xfrm>
+          <a:prstGeom prst="line">
+            <a:avLst/>
+          </a:prstGeom>
+          <a:noFill/>
+          <a:ln w="76200">
+            <a:solidFill>
+              <a:srgbClr val="F28C28"/>
+            </a:solidFill>
+            <a:prstDash val="solid"/>
+          </a:ln>
+        </p:spPr>
+      </p:sp>
+      <p:sp>
+        <p:nvSpPr>
+          <p:cNvPr id="38" name="Stand drawing line"/>
+          <p:cNvSpPr/>
+          <p:nvPr/>
+        </p:nvSpPr>
+        <p:spPr>
+          <a:xfrm>
+            <a:off x="10995660" y="434340"/>
+            <a:ext cx="205740" cy="546811"/>
+          </a:xfrm>
+          <a:prstGeom prst="line">
+            <a:avLst/>
+          </a:prstGeom>
+          <a:noFill/>
+          <a:ln w="76200">
+            <a:solidFill>
+              <a:srgbClr val="F28C28"/>
+            </a:solidFill>
+            <a:prstDash val="solid"/>
+          </a:ln>
+        </p:spPr>
+      </p:sp>
+      <p:sp>
+        <p:nvSpPr>
+          <p:cNvPr id="39" name="Stand drawing line"/>
+          <p:cNvSpPr/>
+          <p:nvPr/>
+        </p:nvSpPr>
+        <p:spPr>
+          <a:xfrm>
+            <a:off x="9610344" y="1303020"/>
+            <a:ext cx="0" cy="128016"/>
+          </a:xfrm>
+          <a:prstGeom prst="line">
+            <a:avLst/>
+          </a:prstGeom>
+          <a:noFill/>
+          <a:ln w="38100">
+            <a:solidFill>
+              <a:srgbClr val="F28C28"/>
+            </a:solidFill>
+            <a:prstDash val="solid"/>
+          </a:ln>
+        </p:spPr>
+      </p:sp>
+      <p:sp>
+        <p:nvSpPr>
+          <p:cNvPr id="40" name="Hinge"/>
+          <p:cNvSpPr/>
+          <p:nvPr/>
+        </p:nvSpPr>
+        <p:spPr>
+          <a:xfrm>
+            <a:off x="9491472" y="1399032"/>
+            <a:ext cx="128016" cy="128016"/>
+          </a:xfrm>
+          <a:prstGeom prst="ellipse">
+            <a:avLst/>
+          </a:prstGeom>
+          <a:solidFill>
+            <a:srgbClr val="F28C28"/>
+          </a:solidFill>
+          <a:ln w="9525">
+            <a:solidFill>
+              <a:srgbClr val="F28C28"/>
+            </a:solidFill>
+            <a:prstDash val="solid"/>
+          </a:ln>
+        </p:spPr>
+      </p:sp>
+      <p:sp>
+        <p:nvSpPr>
+          <p:cNvPr id="41" name="Hinge"/>
+          <p:cNvSpPr/>
+          <p:nvPr/>
+        </p:nvSpPr>
+        <p:spPr>
+          <a:xfrm>
+            <a:off x="11045952" y="999896"/>
+            <a:ext cx="128016" cy="128016"/>
+          </a:xfrm>
+          <a:prstGeom prst="ellipse">
+            <a:avLst/>
+          </a:prstGeom>
+          <a:solidFill>
+            <a:srgbClr val="F28C28"/>
+          </a:solidFill>
+          <a:ln w="9525">
+            <a:solidFill>
+              <a:srgbClr val="F28C28"/>
+            </a:solidFill>
+            <a:prstDash val="solid"/>
+          </a:ln>
+        </p:spPr>
+      </p:sp>
+      <p:sp>
+        <p:nvSpPr>
+          <p:cNvPr id="42" name="Text 40"/>
           <p:cNvSpPr txBox="1"/>
           <p:nvPr/>
         </p:nvSpPr>
@@ -8920,7 +10238,7 @@
       </p:sp>
       <p:sp>
         <p:nvSpPr>
-          <p:cNvPr id="16" name="Text 14"/>
+          <p:cNvPr id="43" name="Text 41"/>
           <p:cNvSpPr txBox="1"/>
           <p:nvPr/>
         </p:nvSpPr>
@@ -8996,7 +10314,7 @@
       </p:sp>
       <p:sp>
         <p:nvSpPr>
-          <p:cNvPr id="17" name="Text 15"/>
+          <p:cNvPr id="44" name="Text 42"/>
           <p:cNvSpPr txBox="1"/>
           <p:nvPr/>
         </p:nvSpPr>
@@ -9035,7 +10353,7 @@
       </p:sp>
       <p:sp>
         <p:nvSpPr>
-          <p:cNvPr id="18" name="Text 16"/>
+          <p:cNvPr id="45" name="Text 43"/>
           <p:cNvSpPr txBox="1"/>
           <p:nvPr/>
         </p:nvSpPr>
@@ -9071,7 +10389,7 @@
       </p:sp>
       <p:sp>
         <p:nvSpPr>
-          <p:cNvPr id="20" name="Text 0"/>
+          <p:cNvPr id="47" name="Text 0"/>
           <p:cNvSpPr/>
           <p:nvPr>
             <p:ph idx="100" type="title" hasCustomPrompt="1"/>
@@ -9101,7 +10419,7 @@
       </p:sp>
       <p:sp>
         <p:nvSpPr>
-          <p:cNvPr id="21" name="Text 0"/>
+          <p:cNvPr id="48" name="Text 0"/>
           <p:cNvSpPr/>
           <p:nvPr>
             <p:ph idx="101" type="body" hasCustomPrompt="1"/>
@@ -9164,8 +10482,8 @@
         </p:nvSpPr>
         <p:spPr>
           <a:xfrm>
-            <a:off x="548640" y="365760"/>
-            <a:ext cx="11094415" cy="822960"/>
+            <a:off x="548640" y="621792"/>
+            <a:ext cx="11094415" cy="685800"/>
           </a:xfrm>
           <a:prstGeom prst="rect">
             <a:avLst/>
@@ -9192,15 +10510,51 @@
           </a:p>
         </p:txBody>
       </p:sp>
+      <p:sp>
+        <p:nvSpPr>
+          <p:cNvPr id="3" name="Text 1"/>
+          <p:cNvSpPr txBox="1"/>
+          <p:nvPr/>
+        </p:nvSpPr>
+        <p:spPr>
+          <a:xfrm>
+            <a:off x="548640" y="384048"/>
+            <a:ext cx="7315200" cy="256032"/>
+          </a:xfrm>
+          <a:prstGeom prst="rect">
+            <a:avLst/>
+          </a:prstGeom>
+          <a:noFill/>
+          <a:ln/>
+        </p:spPr>
+        <p:txBody>
+          <a:bodyPr wrap="square" lIns="0" tIns="0" rIns="0" bIns="0" rtlCol="0" anchor="ctr"/>
+          <a:lstStyle/>
+          <a:p>
+            <a:pPr indent="0" marL="0">
+              <a:buNone/>
+            </a:pPr>
+            <a:r>
+              <a:rPr lang="en-US" sz="1200" b="1" spc="300" kern="0" dirty="0">
+                <a:solidFill>
+                  <a:schemeClr val="accent2"/>
+                </a:solidFill>
+              </a:rPr>
+              <a:t>01  ·  THE PROBLEM</a:t>
+            </a:r>
+            <a:endParaRPr lang="en-US" sz="1200" dirty="0"/>
+          </a:p>
+        </p:txBody>
+      </p:sp>
       <p:graphicFrame>
         <p:nvGraphicFramePr>
-          <p:cNvPr id="3" name="Chart 0" descr=""/>
+          <p:cNvPr id="4" name="Chart 0" descr=""/>
           <p:cNvGraphicFramePr/>
           <p:nvPr/>
         </p:nvGraphicFramePr>
         <p:xfrm>
-          <a:off x="548640" y="1417320"/>
-          <a:ext cx="6675120" cy="4663440"/>
+          <a:off x="548640" y="1463040"/>
+          <a:ext cx="6675120" cy="4480560"/>
         </p:xfrm>
         <a:graphic xmlns:a="http://schemas.openxmlformats.org/drawingml/2006/main">
           <a:graphicData uri="http://schemas.openxmlformats.org/drawingml/2006/chart">
@@ -9210,14 +10564,14 @@
       </p:graphicFrame>
       <p:sp>
         <p:nvSpPr>
-          <p:cNvPr id="4" name="Text 1"/>
+          <p:cNvPr id="5" name="Text 2"/>
           <p:cNvSpPr txBox="1"/>
           <p:nvPr/>
         </p:nvSpPr>
         <p:spPr>
           <a:xfrm>
-            <a:off x="548640" y="6080760"/>
-            <a:ext cx="6675120" cy="274320"/>
+            <a:off x="548640" y="5943600"/>
+            <a:ext cx="6675120" cy="228600"/>
           </a:xfrm>
           <a:prstGeom prst="rect">
             <a:avLst/>
@@ -9246,7 +10600,7 @@
       </p:sp>
       <p:sp>
         <p:nvSpPr>
-          <p:cNvPr id="5" name="Stat card"/>
+          <p:cNvPr id="6" name="Stat card"/>
           <p:cNvSpPr/>
           <p:nvPr/>
         </p:nvSpPr>
@@ -9268,7 +10622,7 @@
       </p:sp>
       <p:sp>
         <p:nvSpPr>
-          <p:cNvPr id="6" name="Text 3"/>
+          <p:cNvPr id="7" name="Text 4"/>
           <p:cNvSpPr txBox="1"/>
           <p:nvPr/>
         </p:nvSpPr>
@@ -9307,7 +10661,7 @@
       </p:sp>
       <p:sp>
         <p:nvSpPr>
-          <p:cNvPr id="7" name="Text 4"/>
+          <p:cNvPr id="8" name="Text 5"/>
           <p:cNvSpPr txBox="1"/>
           <p:nvPr/>
         </p:nvSpPr>
@@ -9343,7 +10697,7 @@
       </p:sp>
       <p:sp>
         <p:nvSpPr>
-          <p:cNvPr id="8" name="Need card"/>
+          <p:cNvPr id="9" name="Need card"/>
           <p:cNvSpPr/>
           <p:nvPr/>
         </p:nvSpPr>
@@ -9361,11 +10715,18 @@
             <a:schemeClr val="bg2"/>
           </a:solidFill>
           <a:ln/>
-        </p:spPr>
-      </p:sp>
-      <p:sp>
-        <p:nvSpPr>
-          <p:cNvPr id="9" name="Text 6"/>
+          <a:effectLst>
+            <a:outerShdw sx="100000" sy="100000" kx="0" ky="0" algn="bl" rotWithShape="0" blurRad="127000" dist="38100" dir="5400000">
+              <a:srgbClr val="0A2540">
+                <a:alpha val="10000"/>
+              </a:srgbClr>
+            </a:outerShdw>
+          </a:effectLst>
+        </p:spPr>
+      </p:sp>
+      <p:sp>
+        <p:nvSpPr>
+          <p:cNvPr id="10" name="Text 7"/>
           <p:cNvSpPr txBox="1"/>
           <p:nvPr/>
         </p:nvSpPr>
@@ -9401,7 +10762,7 @@
       </p:sp>
       <p:sp>
         <p:nvSpPr>
-          <p:cNvPr id="10" name="Text 7"/>
+          <p:cNvPr id="11" name="Text 8"/>
           <p:cNvSpPr txBox="1"/>
           <p:nvPr/>
         </p:nvSpPr>
@@ -9447,7 +10808,7 @@
         </p:nvSpPr>
         <p:spPr>
           <a:xfrm>
-            <a:off x="11094415" y="6400800"/>
+            <a:off x="11094415" y="6291072"/>
             <a:ext cx="548640" cy="274320"/>
           </a:xfrm>
           <a:prstGeom prst="rect">
@@ -9515,8 +10876,8 @@
         </p:nvSpPr>
         <p:spPr>
           <a:xfrm>
-            <a:off x="548640" y="365760"/>
-            <a:ext cx="11094415" cy="822960"/>
+            <a:off x="548640" y="621792"/>
+            <a:ext cx="11094415" cy="685800"/>
           </a:xfrm>
           <a:prstGeom prst="rect">
             <a:avLst/>
@@ -9545,7 +10906,43 @@
       </p:sp>
       <p:sp>
         <p:nvSpPr>
-          <p:cNvPr id="3" name="Step card 1"/>
+          <p:cNvPr id="3" name="Text 1"/>
+          <p:cNvSpPr txBox="1"/>
+          <p:nvPr/>
+        </p:nvSpPr>
+        <p:spPr>
+          <a:xfrm>
+            <a:off x="548640" y="384048"/>
+            <a:ext cx="7315200" cy="256032"/>
+          </a:xfrm>
+          <a:prstGeom prst="rect">
+            <a:avLst/>
+          </a:prstGeom>
+          <a:noFill/>
+          <a:ln/>
+        </p:spPr>
+        <p:txBody>
+          <a:bodyPr wrap="square" lIns="0" tIns="0" rIns="0" bIns="0" rtlCol="0" anchor="ctr"/>
+          <a:lstStyle/>
+          <a:p>
+            <a:pPr indent="0" marL="0">
+              <a:buNone/>
+            </a:pPr>
+            <a:r>
+              <a:rPr lang="en-US" sz="1200" b="1" spc="300" kern="0" dirty="0">
+                <a:solidFill>
+                  <a:schemeClr val="accent2"/>
+                </a:solidFill>
+              </a:rPr>
+              <a:t>02  ·  APPROACH</a:t>
+            </a:r>
+            <a:endParaRPr lang="en-US" sz="1200" dirty="0"/>
+          </a:p>
+        </p:txBody>
+      </p:sp>
+      <p:sp>
+        <p:nvSpPr>
+          <p:cNvPr id="4" name="Step card 1"/>
           <p:cNvSpPr/>
           <p:nvPr/>
         </p:nvSpPr>
@@ -9574,7 +10971,7 @@
       </p:sp>
       <p:sp>
         <p:nvSpPr>
-          <p:cNvPr id="4" name="Step icon circle 1"/>
+          <p:cNvPr id="5" name="Step icon circle 1"/>
           <p:cNvSpPr/>
           <p:nvPr/>
         </p:nvSpPr>
@@ -9594,7 +10991,7 @@
       </p:sp>
       <p:pic>
         <p:nvPicPr>
-          <p:cNvPr id="5" name="Image 0" descr="Empathise icon">    </p:cNvPr>
+          <p:cNvPr id="6" name="Image 0" descr="Empathise icon">    </p:cNvPr>
           <p:cNvPicPr>
             <a:picLocks noChangeAspect="1"/>
           </p:cNvPicPr>
@@ -9618,7 +11015,7 @@
       </p:pic>
       <p:sp>
         <p:nvSpPr>
-          <p:cNvPr id="6" name="Text 3"/>
+          <p:cNvPr id="7" name="Text 4"/>
           <p:cNvSpPr txBox="1"/>
           <p:nvPr/>
         </p:nvSpPr>
@@ -9657,7 +11054,7 @@
       </p:sp>
       <p:sp>
         <p:nvSpPr>
-          <p:cNvPr id="7" name="Text 4"/>
+          <p:cNvPr id="8" name="Text 5"/>
           <p:cNvSpPr txBox="1"/>
           <p:nvPr/>
         </p:nvSpPr>
@@ -9693,7 +11090,7 @@
       </p:sp>
       <p:sp>
         <p:nvSpPr>
-          <p:cNvPr id="8" name="Text 5"/>
+          <p:cNvPr id="9" name="Text 6"/>
           <p:cNvSpPr txBox="1"/>
           <p:nvPr/>
         </p:nvSpPr>
@@ -9729,7 +11126,7 @@
       </p:sp>
       <p:sp>
         <p:nvSpPr>
-          <p:cNvPr id="9" name="Step card 2"/>
+          <p:cNvPr id="10" name="Step card 2"/>
           <p:cNvSpPr/>
           <p:nvPr/>
         </p:nvSpPr>
@@ -9758,7 +11155,7 @@
       </p:sp>
       <p:sp>
         <p:nvSpPr>
-          <p:cNvPr id="10" name="Step icon circle 2"/>
+          <p:cNvPr id="11" name="Step icon circle 2"/>
           <p:cNvSpPr/>
           <p:nvPr/>
         </p:nvSpPr>
@@ -9778,7 +11175,7 @@
       </p:sp>
       <p:pic>
         <p:nvPicPr>
-          <p:cNvPr id="11" name="Image 1" descr="Define icon">    </p:cNvPr>
+          <p:cNvPr id="12" name="Image 1" descr="Define icon">    </p:cNvPr>
           <p:cNvPicPr>
             <a:picLocks noChangeAspect="1"/>
           </p:cNvPicPr>
@@ -9802,7 +11199,7 @@
       </p:pic>
       <p:sp>
         <p:nvSpPr>
-          <p:cNvPr id="12" name="Text 8"/>
+          <p:cNvPr id="13" name="Text 9"/>
           <p:cNvSpPr txBox="1"/>
           <p:nvPr/>
         </p:nvSpPr>
@@ -9841,7 +11238,7 @@
       </p:sp>
       <p:sp>
         <p:nvSpPr>
-          <p:cNvPr id="13" name="Text 9"/>
+          <p:cNvPr id="14" name="Text 10"/>
           <p:cNvSpPr txBox="1"/>
           <p:nvPr/>
         </p:nvSpPr>
@@ -9877,7 +11274,7 @@
       </p:sp>
       <p:sp>
         <p:nvSpPr>
-          <p:cNvPr id="14" name="Text 10"/>
+          <p:cNvPr id="15" name="Text 11"/>
           <p:cNvSpPr txBox="1"/>
           <p:nvPr/>
         </p:nvSpPr>
@@ -9913,7 +11310,7 @@
       </p:sp>
       <p:sp>
         <p:nvSpPr>
-          <p:cNvPr id="15" name="Step card 3"/>
+          <p:cNvPr id="16" name="Step card 3"/>
           <p:cNvSpPr/>
           <p:nvPr/>
         </p:nvSpPr>
@@ -9942,7 +11339,7 @@
       </p:sp>
       <p:sp>
         <p:nvSpPr>
-          <p:cNvPr id="16" name="Step icon circle 3"/>
+          <p:cNvPr id="17" name="Step icon circle 3"/>
           <p:cNvSpPr/>
           <p:nvPr/>
         </p:nvSpPr>
@@ -9962,7 +11359,7 @@
       </p:sp>
       <p:pic>
         <p:nvPicPr>
-          <p:cNvPr id="17" name="Image 2" descr="Ideate icon">    </p:cNvPr>
+          <p:cNvPr id="18" name="Image 2" descr="Ideate icon">    </p:cNvPr>
           <p:cNvPicPr>
             <a:picLocks noChangeAspect="1"/>
           </p:cNvPicPr>
@@ -9986,7 +11383,7 @@
       </p:pic>
       <p:sp>
         <p:nvSpPr>
-          <p:cNvPr id="18" name="Text 13"/>
+          <p:cNvPr id="19" name="Text 14"/>
           <p:cNvSpPr txBox="1"/>
           <p:nvPr/>
         </p:nvSpPr>
@@ -10025,7 +11422,7 @@
       </p:sp>
       <p:sp>
         <p:nvSpPr>
-          <p:cNvPr id="19" name="Text 14"/>
+          <p:cNvPr id="20" name="Text 15"/>
           <p:cNvSpPr txBox="1"/>
           <p:nvPr/>
         </p:nvSpPr>
@@ -10061,7 +11458,7 @@
       </p:sp>
       <p:sp>
         <p:nvSpPr>
-          <p:cNvPr id="20" name="Text 15"/>
+          <p:cNvPr id="21" name="Text 16"/>
           <p:cNvSpPr txBox="1"/>
           <p:nvPr/>
         </p:nvSpPr>
@@ -10097,7 +11494,7 @@
       </p:sp>
       <p:sp>
         <p:nvSpPr>
-          <p:cNvPr id="21" name="Step card 4"/>
+          <p:cNvPr id="22" name="Step card 4"/>
           <p:cNvSpPr/>
           <p:nvPr/>
         </p:nvSpPr>
@@ -10126,7 +11523,7 @@
       </p:sp>
       <p:sp>
         <p:nvSpPr>
-          <p:cNvPr id="22" name="Step icon circle 4"/>
+          <p:cNvPr id="23" name="Step icon circle 4"/>
           <p:cNvSpPr/>
           <p:nvPr/>
         </p:nvSpPr>
@@ -10146,7 +11543,7 @@
       </p:sp>
       <p:pic>
         <p:nvPicPr>
-          <p:cNvPr id="23" name="Image 3" descr="Prototype icon">    </p:cNvPr>
+          <p:cNvPr id="24" name="Image 3" descr="Prototype icon">    </p:cNvPr>
           <p:cNvPicPr>
             <a:picLocks noChangeAspect="1"/>
           </p:cNvPicPr>
@@ -10170,7 +11567,7 @@
       </p:pic>
       <p:sp>
         <p:nvSpPr>
-          <p:cNvPr id="24" name="Text 18"/>
+          <p:cNvPr id="25" name="Text 19"/>
           <p:cNvSpPr txBox="1"/>
           <p:nvPr/>
         </p:nvSpPr>
@@ -10209,7 +11606,7 @@
       </p:sp>
       <p:sp>
         <p:nvSpPr>
-          <p:cNvPr id="25" name="Text 19"/>
+          <p:cNvPr id="26" name="Text 20"/>
           <p:cNvSpPr txBox="1"/>
           <p:nvPr/>
         </p:nvSpPr>
@@ -10245,7 +11642,7 @@
       </p:sp>
       <p:sp>
         <p:nvSpPr>
-          <p:cNvPr id="26" name="Text 20"/>
+          <p:cNvPr id="27" name="Text 21"/>
           <p:cNvSpPr txBox="1"/>
           <p:nvPr/>
         </p:nvSpPr>
@@ -10281,7 +11678,7 @@
       </p:sp>
       <p:sp>
         <p:nvSpPr>
-          <p:cNvPr id="27" name="Step card 5"/>
+          <p:cNvPr id="28" name="Step card 5"/>
           <p:cNvSpPr/>
           <p:nvPr/>
         </p:nvSpPr>
@@ -10310,7 +11707,7 @@
       </p:sp>
       <p:sp>
         <p:nvSpPr>
-          <p:cNvPr id="28" name="Step icon circle 5"/>
+          <p:cNvPr id="29" name="Step icon circle 5"/>
           <p:cNvSpPr/>
           <p:nvPr/>
         </p:nvSpPr>
@@ -10330,7 +11727,7 @@
       </p:sp>
       <p:pic>
         <p:nvPicPr>
-          <p:cNvPr id="29" name="Image 4" descr="Test icon">    </p:cNvPr>
+          <p:cNvPr id="30" name="Image 4" descr="Test icon">    </p:cNvPr>
           <p:cNvPicPr>
             <a:picLocks noChangeAspect="1"/>
           </p:cNvPicPr>
@@ -10354,7 +11751,7 @@
       </p:pic>
       <p:sp>
         <p:nvSpPr>
-          <p:cNvPr id="30" name="Text 23"/>
+          <p:cNvPr id="31" name="Text 24"/>
           <p:cNvSpPr txBox="1"/>
           <p:nvPr/>
         </p:nvSpPr>
@@ -10393,7 +11790,7 @@
       </p:sp>
       <p:sp>
         <p:nvSpPr>
-          <p:cNvPr id="31" name="Text 24"/>
+          <p:cNvPr id="32" name="Text 25"/>
           <p:cNvSpPr txBox="1"/>
           <p:nvPr/>
         </p:nvSpPr>
@@ -10429,7 +11826,7 @@
       </p:sp>
       <p:sp>
         <p:nvSpPr>
-          <p:cNvPr id="32" name="Text 25"/>
+          <p:cNvPr id="33" name="Text 26"/>
           <p:cNvSpPr txBox="1"/>
           <p:nvPr/>
         </p:nvSpPr>
@@ -10465,7 +11862,7 @@
       </p:sp>
       <p:sp>
         <p:nvSpPr>
-          <p:cNvPr id="33" name="Iteration banner"/>
+          <p:cNvPr id="34" name="Iteration banner"/>
           <p:cNvSpPr/>
           <p:nvPr/>
         </p:nvSpPr>
@@ -10492,7 +11889,7 @@
       </p:sp>
       <p:pic>
         <p:nvPicPr>
-          <p:cNvPr id="34" name="Image 5" descr="Iteration icon">    </p:cNvPr>
+          <p:cNvPr id="35" name="Image 5" descr="Iteration icon">    </p:cNvPr>
           <p:cNvPicPr>
             <a:picLocks noChangeAspect="1"/>
           </p:cNvPicPr>
@@ -10516,7 +11913,7 @@
       </p:pic>
       <p:sp>
         <p:nvSpPr>
-          <p:cNvPr id="35" name="Text 27"/>
+          <p:cNvPr id="36" name="Text 28"/>
           <p:cNvSpPr txBox="1"/>
           <p:nvPr/>
         </p:nvSpPr>
@@ -10573,7 +11970,7 @@
         </p:nvSpPr>
         <p:spPr>
           <a:xfrm>
-            <a:off x="11094415" y="6400800"/>
+            <a:off x="11094415" y="6291072"/>
             <a:ext cx="548640" cy="274320"/>
           </a:xfrm>
           <a:prstGeom prst="rect">
@@ -10641,8 +12038,8 @@
         </p:nvSpPr>
         <p:spPr>
           <a:xfrm>
-            <a:off x="548640" y="365760"/>
-            <a:ext cx="11094415" cy="822960"/>
+            <a:off x="548640" y="621792"/>
+            <a:ext cx="11094415" cy="685800"/>
           </a:xfrm>
           <a:prstGeom prst="rect">
             <a:avLst/>
@@ -10666,6 +12063,42 @@
               <a:t>From user needs to measurable specs</a:t>
             </a:r>
             <a:endParaRPr lang="en-US" sz="3400" dirty="0"/>
+          </a:p>
+        </p:txBody>
+      </p:sp>
+      <p:sp>
+        <p:nvSpPr>
+          <p:cNvPr id="3" name="Text 1"/>
+          <p:cNvSpPr txBox="1"/>
+          <p:nvPr/>
+        </p:nvSpPr>
+        <p:spPr>
+          <a:xfrm>
+            <a:off x="548640" y="384048"/>
+            <a:ext cx="7315200" cy="256032"/>
+          </a:xfrm>
+          <a:prstGeom prst="rect">
+            <a:avLst/>
+          </a:prstGeom>
+          <a:noFill/>
+          <a:ln/>
+        </p:spPr>
+        <p:txBody>
+          <a:bodyPr wrap="square" lIns="0" tIns="0" rIns="0" bIns="0" rtlCol="0" anchor="ctr"/>
+          <a:lstStyle/>
+          <a:p>
+            <a:pPr indent="0" marL="0">
+              <a:buNone/>
+            </a:pPr>
+            <a:r>
+              <a:rPr lang="en-US" sz="1200" b="1" spc="300" kern="0" dirty="0">
+                <a:solidFill>
+                  <a:schemeClr val="accent2"/>
+                </a:solidFill>
+              </a:rPr>
+              <a:t>03  ·  DEFINE</a:t>
+            </a:r>
+            <a:endParaRPr lang="en-US" sz="1200" dirty="0"/>
           </a:p>
         </p:txBody>
       </p:sp>
@@ -10692,11 +12125,41 @@
             <a:tbl>
               <a:tblPr/>
               <a:tblGrid>
-                <a:gridCol w="4297680"/>
-                <a:gridCol w="4297680"/>
-                <a:gridCol w="2496312"/>
+                <a:gridCol w="777240"/>
+                <a:gridCol w="3840480"/>
+                <a:gridCol w="4023360"/>
+                <a:gridCol w="2450592"/>
               </a:tblGrid>
               <a:tr h="512064">
+                <a:tc>
+                  <a:txBody>
+                    <a:bodyPr/>
+                    <a:lstStyle/>
+                    <a:p>
+                      <a:pPr indent="0" marL="0">
+                        <a:buNone/>
+                      </a:pPr>
+                      <a:endParaRPr lang="en-US" sz="1400" dirty="0"/>
+                    </a:p>
+                  </a:txBody>
+                  <a:tcPr marL="137160" marR="137160" marT="0" marB="0" anchor="ctr">
+                    <a:lnL w="0" cap="flat" cmpd="sng" algn="ctr">
+                      <a:noFill/>
+                    </a:lnL>
+                    <a:lnR w="0" cap="flat" cmpd="sng" algn="ctr">
+                      <a:noFill/>
+                    </a:lnR>
+                    <a:lnT w="0" cap="flat" cmpd="sng" algn="ctr">
+                      <a:noFill/>
+                    </a:lnT>
+                    <a:lnB w="0" cap="flat" cmpd="sng" algn="ctr">
+                      <a:noFill/>
+                    </a:lnB>
+                    <a:solidFill>
+                      <a:schemeClr val="tx2"/>
+                    </a:solidFill>
+                  </a:tcPr>
+                </a:tc>
                 <a:tc>
                   <a:txBody>
                     <a:bodyPr/>
@@ -10818,6 +12281,35 @@
                       <a:pPr indent="0" marL="0">
                         <a:buNone/>
                       </a:pPr>
+                      <a:endParaRPr lang="en-US" sz="1400" dirty="0"/>
+                    </a:p>
+                  </a:txBody>
+                  <a:tcPr marL="137160" marR="137160" marT="0" marB="0" anchor="ctr">
+                    <a:lnL w="0" cap="flat" cmpd="sng" algn="ctr">
+                      <a:noFill/>
+                    </a:lnL>
+                    <a:lnR w="0" cap="flat" cmpd="sng" algn="ctr">
+                      <a:noFill/>
+                    </a:lnR>
+                    <a:lnT w="0" cap="flat" cmpd="sng" algn="ctr">
+                      <a:noFill/>
+                    </a:lnT>
+                    <a:lnB w="0" cap="flat" cmpd="sng" algn="ctr">
+                      <a:noFill/>
+                    </a:lnB>
+                    <a:solidFill>
+                      <a:schemeClr val="bg2"/>
+                    </a:solidFill>
+                  </a:tcPr>
+                </a:tc>
+                <a:tc>
+                  <a:txBody>
+                    <a:bodyPr/>
+                    <a:lstStyle/>
+                    <a:p>
+                      <a:pPr indent="0" marL="0">
+                        <a:buNone/>
+                      </a:pPr>
                       <a:r>
                         <a:rPr lang="en-US" sz="1400" dirty="0">
                           <a:solidFill>
@@ -10931,6 +12423,35 @@
                       <a:pPr indent="0" marL="0">
                         <a:buNone/>
                       </a:pPr>
+                      <a:endParaRPr lang="en-US" sz="1400" dirty="0"/>
+                    </a:p>
+                  </a:txBody>
+                  <a:tcPr marL="137160" marR="137160" marT="0" marB="0" anchor="ctr">
+                    <a:lnL w="0" cap="flat" cmpd="sng" algn="ctr">
+                      <a:noFill/>
+                    </a:lnL>
+                    <a:lnR w="0" cap="flat" cmpd="sng" algn="ctr">
+                      <a:noFill/>
+                    </a:lnR>
+                    <a:lnT w="0" cap="flat" cmpd="sng" algn="ctr">
+                      <a:noFill/>
+                    </a:lnT>
+                    <a:lnB w="0" cap="flat" cmpd="sng" algn="ctr">
+                      <a:noFill/>
+                    </a:lnB>
+                    <a:solidFill>
+                      <a:schemeClr val="bg1"/>
+                    </a:solidFill>
+                  </a:tcPr>
+                </a:tc>
+                <a:tc>
+                  <a:txBody>
+                    <a:bodyPr/>
+                    <a:lstStyle/>
+                    <a:p>
+                      <a:pPr indent="0" marL="0">
+                        <a:buNone/>
+                      </a:pPr>
                       <a:r>
                         <a:rPr lang="en-US" sz="1400" dirty="0">
                           <a:solidFill>
@@ -11044,6 +12565,35 @@
                       <a:pPr indent="0" marL="0">
                         <a:buNone/>
                       </a:pPr>
+                      <a:endParaRPr lang="en-US" sz="1400" dirty="0"/>
+                    </a:p>
+                  </a:txBody>
+                  <a:tcPr marL="137160" marR="137160" marT="0" marB="0" anchor="ctr">
+                    <a:lnL w="0" cap="flat" cmpd="sng" algn="ctr">
+                      <a:noFill/>
+                    </a:lnL>
+                    <a:lnR w="0" cap="flat" cmpd="sng" algn="ctr">
+                      <a:noFill/>
+                    </a:lnR>
+                    <a:lnT w="0" cap="flat" cmpd="sng" algn="ctr">
+                      <a:noFill/>
+                    </a:lnT>
+                    <a:lnB w="0" cap="flat" cmpd="sng" algn="ctr">
+                      <a:noFill/>
+                    </a:lnB>
+                    <a:solidFill>
+                      <a:schemeClr val="bg2"/>
+                    </a:solidFill>
+                  </a:tcPr>
+                </a:tc>
+                <a:tc>
+                  <a:txBody>
+                    <a:bodyPr/>
+                    <a:lstStyle/>
+                    <a:p>
+                      <a:pPr indent="0" marL="0">
+                        <a:buNone/>
+                      </a:pPr>
                       <a:r>
                         <a:rPr lang="en-US" sz="1400" dirty="0">
                           <a:solidFill>
@@ -11157,6 +12707,35 @@
                       <a:pPr indent="0" marL="0">
                         <a:buNone/>
                       </a:pPr>
+                      <a:endParaRPr lang="en-US" sz="1400" dirty="0"/>
+                    </a:p>
+                  </a:txBody>
+                  <a:tcPr marL="137160" marR="137160" marT="0" marB="0" anchor="ctr">
+                    <a:lnL w="0" cap="flat" cmpd="sng" algn="ctr">
+                      <a:noFill/>
+                    </a:lnL>
+                    <a:lnR w="0" cap="flat" cmpd="sng" algn="ctr">
+                      <a:noFill/>
+                    </a:lnR>
+                    <a:lnT w="0" cap="flat" cmpd="sng" algn="ctr">
+                      <a:noFill/>
+                    </a:lnT>
+                    <a:lnB w="0" cap="flat" cmpd="sng" algn="ctr">
+                      <a:noFill/>
+                    </a:lnB>
+                    <a:solidFill>
+                      <a:schemeClr val="bg1"/>
+                    </a:solidFill>
+                  </a:tcPr>
+                </a:tc>
+                <a:tc>
+                  <a:txBody>
+                    <a:bodyPr/>
+                    <a:lstStyle/>
+                    <a:p>
+                      <a:pPr indent="0" marL="0">
+                        <a:buNone/>
+                      </a:pPr>
                       <a:r>
                         <a:rPr lang="en-US" sz="1400" dirty="0">
                           <a:solidFill>
@@ -11270,6 +12849,35 @@
                       <a:pPr indent="0" marL="0">
                         <a:buNone/>
                       </a:pPr>
+                      <a:endParaRPr lang="en-US" sz="1400" dirty="0"/>
+                    </a:p>
+                  </a:txBody>
+                  <a:tcPr marL="137160" marR="137160" marT="0" marB="0" anchor="ctr">
+                    <a:lnL w="0" cap="flat" cmpd="sng" algn="ctr">
+                      <a:noFill/>
+                    </a:lnL>
+                    <a:lnR w="0" cap="flat" cmpd="sng" algn="ctr">
+                      <a:noFill/>
+                    </a:lnR>
+                    <a:lnT w="0" cap="flat" cmpd="sng" algn="ctr">
+                      <a:noFill/>
+                    </a:lnT>
+                    <a:lnB w="0" cap="flat" cmpd="sng" algn="ctr">
+                      <a:noFill/>
+                    </a:lnB>
+                    <a:solidFill>
+                      <a:schemeClr val="bg2"/>
+                    </a:solidFill>
+                  </a:tcPr>
+                </a:tc>
+                <a:tc>
+                  <a:txBody>
+                    <a:bodyPr/>
+                    <a:lstStyle/>
+                    <a:p>
+                      <a:pPr indent="0" marL="0">
+                        <a:buNone/>
+                      </a:pPr>
                       <a:r>
                         <a:rPr lang="en-US" sz="1400" dirty="0">
                           <a:solidFill>
@@ -11383,6 +12991,35 @@
                       <a:pPr indent="0" marL="0">
                         <a:buNone/>
                       </a:pPr>
+                      <a:endParaRPr lang="en-US" sz="1400" dirty="0"/>
+                    </a:p>
+                  </a:txBody>
+                  <a:tcPr marL="137160" marR="137160" marT="0" marB="0" anchor="ctr">
+                    <a:lnL w="0" cap="flat" cmpd="sng" algn="ctr">
+                      <a:noFill/>
+                    </a:lnL>
+                    <a:lnR w="0" cap="flat" cmpd="sng" algn="ctr">
+                      <a:noFill/>
+                    </a:lnR>
+                    <a:lnT w="0" cap="flat" cmpd="sng" algn="ctr">
+                      <a:noFill/>
+                    </a:lnT>
+                    <a:lnB w="0" cap="flat" cmpd="sng" algn="ctr">
+                      <a:noFill/>
+                    </a:lnB>
+                    <a:solidFill>
+                      <a:schemeClr val="bg1"/>
+                    </a:solidFill>
+                  </a:tcPr>
+                </a:tc>
+                <a:tc>
+                  <a:txBody>
+                    <a:bodyPr/>
+                    <a:lstStyle/>
+                    <a:p>
+                      <a:pPr indent="0" marL="0">
+                        <a:buNone/>
+                      </a:pPr>
                       <a:r>
                         <a:rPr lang="en-US" sz="1400" dirty="0">
                           <a:solidFill>
@@ -11493,7 +13130,271 @@
       </p:graphicFrame>
       <p:sp>
         <p:nvSpPr>
-          <p:cNvPr id="4" name="Text 1"/>
+          <p:cNvPr id="5" name="Spec icon circle 1"/>
+          <p:cNvSpPr/>
+          <p:nvPr/>
+        </p:nvSpPr>
+        <p:spPr>
+          <a:xfrm>
+            <a:off x="731520" y="2112264"/>
+            <a:ext cx="329184" cy="329184"/>
+          </a:xfrm>
+          <a:prstGeom prst="ellipse">
+            <a:avLst/>
+          </a:prstGeom>
+          <a:solidFill>
+            <a:schemeClr val="accent2"/>
+          </a:solidFill>
+          <a:ln/>
+        </p:spPr>
+      </p:sp>
+      <p:pic>
+        <p:nvPicPr>
+          <p:cNvPr id="6" name="Image 0" descr="Spec icon">    </p:cNvPr>
+          <p:cNvPicPr>
+            <a:picLocks noChangeAspect="1"/>
+          </p:cNvPicPr>
+          <p:nvPr/>
+        </p:nvPicPr>
+        <p:blipFill>
+          <a:blip r:embed="rId1"/>
+          <a:stretch>
+            <a:fillRect/>
+          </a:stretch>
+        </p:blipFill>
+        <p:spPr>
+          <a:xfrm>
+            <a:off x="813816" y="2194560"/>
+            <a:ext cx="164592" cy="164592"/>
+          </a:xfrm>
+          <a:prstGeom prst="rect">
+            <a:avLst/>
+          </a:prstGeom>
+        </p:spPr>
+      </p:pic>
+      <p:sp>
+        <p:nvSpPr>
+          <p:cNvPr id="7" name="Spec icon circle 2"/>
+          <p:cNvSpPr/>
+          <p:nvPr/>
+        </p:nvSpPr>
+        <p:spPr>
+          <a:xfrm>
+            <a:off x="731520" y="2624328"/>
+            <a:ext cx="329184" cy="329184"/>
+          </a:xfrm>
+          <a:prstGeom prst="ellipse">
+            <a:avLst/>
+          </a:prstGeom>
+          <a:solidFill>
+            <a:schemeClr val="accent2"/>
+          </a:solidFill>
+          <a:ln/>
+        </p:spPr>
+      </p:sp>
+      <p:pic>
+        <p:nvPicPr>
+          <p:cNvPr id="8" name="Image 1" descr="Spec icon">    </p:cNvPr>
+          <p:cNvPicPr>
+            <a:picLocks noChangeAspect="1"/>
+          </p:cNvPicPr>
+          <p:nvPr/>
+        </p:nvPicPr>
+        <p:blipFill>
+          <a:blip r:embed="rId2"/>
+          <a:stretch>
+            <a:fillRect/>
+          </a:stretch>
+        </p:blipFill>
+        <p:spPr>
+          <a:xfrm>
+            <a:off x="813816" y="2706624"/>
+            <a:ext cx="164592" cy="164592"/>
+          </a:xfrm>
+          <a:prstGeom prst="rect">
+            <a:avLst/>
+          </a:prstGeom>
+        </p:spPr>
+      </p:pic>
+      <p:sp>
+        <p:nvSpPr>
+          <p:cNvPr id="9" name="Spec icon circle 3"/>
+          <p:cNvSpPr/>
+          <p:nvPr/>
+        </p:nvSpPr>
+        <p:spPr>
+          <a:xfrm>
+            <a:off x="731520" y="3136392"/>
+            <a:ext cx="329184" cy="329184"/>
+          </a:xfrm>
+          <a:prstGeom prst="ellipse">
+            <a:avLst/>
+          </a:prstGeom>
+          <a:solidFill>
+            <a:schemeClr val="accent2"/>
+          </a:solidFill>
+          <a:ln/>
+        </p:spPr>
+      </p:sp>
+      <p:pic>
+        <p:nvPicPr>
+          <p:cNvPr id="10" name="Image 2" descr="Spec icon">    </p:cNvPr>
+          <p:cNvPicPr>
+            <a:picLocks noChangeAspect="1"/>
+          </p:cNvPicPr>
+          <p:nvPr/>
+        </p:nvPicPr>
+        <p:blipFill>
+          <a:blip r:embed="rId3"/>
+          <a:stretch>
+            <a:fillRect/>
+          </a:stretch>
+        </p:blipFill>
+        <p:spPr>
+          <a:xfrm>
+            <a:off x="813816" y="3218688"/>
+            <a:ext cx="164592" cy="164592"/>
+          </a:xfrm>
+          <a:prstGeom prst="rect">
+            <a:avLst/>
+          </a:prstGeom>
+        </p:spPr>
+      </p:pic>
+      <p:sp>
+        <p:nvSpPr>
+          <p:cNvPr id="11" name="Spec icon circle 4"/>
+          <p:cNvSpPr/>
+          <p:nvPr/>
+        </p:nvSpPr>
+        <p:spPr>
+          <a:xfrm>
+            <a:off x="731520" y="3648456"/>
+            <a:ext cx="329184" cy="329184"/>
+          </a:xfrm>
+          <a:prstGeom prst="ellipse">
+            <a:avLst/>
+          </a:prstGeom>
+          <a:solidFill>
+            <a:schemeClr val="accent2"/>
+          </a:solidFill>
+          <a:ln/>
+        </p:spPr>
+      </p:sp>
+      <p:pic>
+        <p:nvPicPr>
+          <p:cNvPr id="12" name="Image 3" descr="Spec icon">    </p:cNvPr>
+          <p:cNvPicPr>
+            <a:picLocks noChangeAspect="1"/>
+          </p:cNvPicPr>
+          <p:nvPr/>
+        </p:nvPicPr>
+        <p:blipFill>
+          <a:blip r:embed="rId4"/>
+          <a:stretch>
+            <a:fillRect/>
+          </a:stretch>
+        </p:blipFill>
+        <p:spPr>
+          <a:xfrm>
+            <a:off x="813816" y="3730752"/>
+            <a:ext cx="164592" cy="164592"/>
+          </a:xfrm>
+          <a:prstGeom prst="rect">
+            <a:avLst/>
+          </a:prstGeom>
+        </p:spPr>
+      </p:pic>
+      <p:sp>
+        <p:nvSpPr>
+          <p:cNvPr id="13" name="Spec icon circle 5"/>
+          <p:cNvSpPr/>
+          <p:nvPr/>
+        </p:nvSpPr>
+        <p:spPr>
+          <a:xfrm>
+            <a:off x="731520" y="4160520"/>
+            <a:ext cx="329184" cy="329184"/>
+          </a:xfrm>
+          <a:prstGeom prst="ellipse">
+            <a:avLst/>
+          </a:prstGeom>
+          <a:solidFill>
+            <a:schemeClr val="accent2"/>
+          </a:solidFill>
+          <a:ln/>
+        </p:spPr>
+      </p:sp>
+      <p:pic>
+        <p:nvPicPr>
+          <p:cNvPr id="14" name="Image 4" descr="Spec icon">    </p:cNvPr>
+          <p:cNvPicPr>
+            <a:picLocks noChangeAspect="1"/>
+          </p:cNvPicPr>
+          <p:nvPr/>
+        </p:nvPicPr>
+        <p:blipFill>
+          <a:blip r:embed="rId5"/>
+          <a:stretch>
+            <a:fillRect/>
+          </a:stretch>
+        </p:blipFill>
+        <p:spPr>
+          <a:xfrm>
+            <a:off x="813816" y="4242816"/>
+            <a:ext cx="164592" cy="164592"/>
+          </a:xfrm>
+          <a:prstGeom prst="rect">
+            <a:avLst/>
+          </a:prstGeom>
+        </p:spPr>
+      </p:pic>
+      <p:sp>
+        <p:nvSpPr>
+          <p:cNvPr id="15" name="Spec icon circle 6"/>
+          <p:cNvSpPr/>
+          <p:nvPr/>
+        </p:nvSpPr>
+        <p:spPr>
+          <a:xfrm>
+            <a:off x="731520" y="4672584"/>
+            <a:ext cx="329184" cy="329184"/>
+          </a:xfrm>
+          <a:prstGeom prst="ellipse">
+            <a:avLst/>
+          </a:prstGeom>
+          <a:solidFill>
+            <a:schemeClr val="accent2"/>
+          </a:solidFill>
+          <a:ln/>
+        </p:spPr>
+      </p:sp>
+      <p:pic>
+        <p:nvPicPr>
+          <p:cNvPr id="16" name="Image 5" descr="Spec icon">    </p:cNvPr>
+          <p:cNvPicPr>
+            <a:picLocks noChangeAspect="1"/>
+          </p:cNvPicPr>
+          <p:nvPr/>
+        </p:nvPicPr>
+        <p:blipFill>
+          <a:blip r:embed="rId6"/>
+          <a:stretch>
+            <a:fillRect/>
+          </a:stretch>
+        </p:blipFill>
+        <p:spPr>
+          <a:xfrm>
+            <a:off x="813816" y="4754880"/>
+            <a:ext cx="164592" cy="164592"/>
+          </a:xfrm>
+          <a:prstGeom prst="rect">
+            <a:avLst/>
+          </a:prstGeom>
+        </p:spPr>
+      </p:pic>
+      <p:sp>
+        <p:nvSpPr>
+          <p:cNvPr id="17" name="Text 8"/>
           <p:cNvSpPr txBox="1"/>
           <p:nvPr/>
         </p:nvSpPr>
@@ -11539,7 +13440,7 @@
         </p:nvSpPr>
         <p:spPr>
           <a:xfrm>
-            <a:off x="11094415" y="6400800"/>
+            <a:off x="11094415" y="6291072"/>
             <a:ext cx="548640" cy="274320"/>
           </a:xfrm>
           <a:prstGeom prst="rect">
@@ -11607,8 +13508,8 @@
         </p:nvSpPr>
         <p:spPr>
           <a:xfrm>
-            <a:off x="548640" y="365760"/>
-            <a:ext cx="11094415" cy="822960"/>
+            <a:off x="548640" y="621792"/>
+            <a:ext cx="11094415" cy="685800"/>
           </a:xfrm>
           <a:prstGeom prst="rect">
             <a:avLst/>
@@ -11637,7 +13538,43 @@
       </p:sp>
       <p:sp>
         <p:nvSpPr>
-          <p:cNvPr id="3" name="Concept card A"/>
+          <p:cNvPr id="3" name="Text 1"/>
+          <p:cNvSpPr txBox="1"/>
+          <p:nvPr/>
+        </p:nvSpPr>
+        <p:spPr>
+          <a:xfrm>
+            <a:off x="548640" y="384048"/>
+            <a:ext cx="7315200" cy="256032"/>
+          </a:xfrm>
+          <a:prstGeom prst="rect">
+            <a:avLst/>
+          </a:prstGeom>
+          <a:noFill/>
+          <a:ln/>
+        </p:spPr>
+        <p:txBody>
+          <a:bodyPr wrap="square" lIns="0" tIns="0" rIns="0" bIns="0" rtlCol="0" anchor="ctr"/>
+          <a:lstStyle/>
+          <a:p>
+            <a:pPr indent="0" marL="0">
+              <a:buNone/>
+            </a:pPr>
+            <a:r>
+              <a:rPr lang="en-US" sz="1200" b="1" spc="300" kern="0" dirty="0">
+                <a:solidFill>
+                  <a:schemeClr val="accent2"/>
+                </a:solidFill>
+              </a:rPr>
+              <a:t>04  ·  IDEATE</a:t>
+            </a:r>
+            <a:endParaRPr lang="en-US" sz="1200" dirty="0"/>
+          </a:p>
+        </p:txBody>
+      </p:sp>
+      <p:sp>
+        <p:nvSpPr>
+          <p:cNvPr id="4" name="Concept card A"/>
           <p:cNvSpPr/>
           <p:nvPr/>
         </p:nvSpPr>
@@ -11655,11 +13592,18 @@
             <a:schemeClr val="bg2"/>
           </a:solidFill>
           <a:ln/>
-        </p:spPr>
-      </p:sp>
-      <p:sp>
-        <p:nvSpPr>
-          <p:cNvPr id="4" name="Concept badge A"/>
+          <a:effectLst>
+            <a:outerShdw sx="100000" sy="100000" kx="0" ky="0" algn="bl" rotWithShape="0" blurRad="127000" dist="38100" dir="5400000">
+              <a:srgbClr val="0A2540">
+                <a:alpha val="10000"/>
+              </a:srgbClr>
+            </a:outerShdw>
+          </a:effectLst>
+        </p:spPr>
+      </p:sp>
+      <p:sp>
+        <p:nvSpPr>
+          <p:cNvPr id="5" name="Concept badge A"/>
           <p:cNvSpPr/>
           <p:nvPr/>
         </p:nvSpPr>
@@ -11679,7 +13623,7 @@
       </p:sp>
       <p:sp>
         <p:nvSpPr>
-          <p:cNvPr id="5" name="Text 3"/>
+          <p:cNvPr id="6" name="Text 4"/>
           <p:cNvSpPr txBox="1"/>
           <p:nvPr/>
         </p:nvSpPr>
@@ -11718,7 +13662,7 @@
       </p:sp>
       <p:sp>
         <p:nvSpPr>
-          <p:cNvPr id="6" name="Text 4"/>
+          <p:cNvPr id="7" name="Text 5"/>
           <p:cNvSpPr txBox="1"/>
           <p:nvPr/>
         </p:nvSpPr>
@@ -11754,7 +13698,7 @@
       </p:sp>
       <p:sp>
         <p:nvSpPr>
-          <p:cNvPr id="7" name="Text 5"/>
+          <p:cNvPr id="8" name="Text 6"/>
           <p:cNvSpPr txBox="1"/>
           <p:nvPr/>
         </p:nvSpPr>
@@ -11790,7 +13734,7 @@
       </p:sp>
       <p:sp>
         <p:nvSpPr>
-          <p:cNvPr id="8" name="Concept card B"/>
+          <p:cNvPr id="9" name="Concept card B"/>
           <p:cNvSpPr/>
           <p:nvPr/>
         </p:nvSpPr>
@@ -11808,11 +13752,18 @@
             <a:schemeClr val="bg2"/>
           </a:solidFill>
           <a:ln/>
-        </p:spPr>
-      </p:sp>
-      <p:sp>
-        <p:nvSpPr>
-          <p:cNvPr id="9" name="Concept badge B"/>
+          <a:effectLst>
+            <a:outerShdw sx="100000" sy="100000" kx="0" ky="0" algn="bl" rotWithShape="0" blurRad="127000" dist="38100" dir="5400000">
+              <a:srgbClr val="0A2540">
+                <a:alpha val="10000"/>
+              </a:srgbClr>
+            </a:outerShdw>
+          </a:effectLst>
+        </p:spPr>
+      </p:sp>
+      <p:sp>
+        <p:nvSpPr>
+          <p:cNvPr id="10" name="Concept badge B"/>
           <p:cNvSpPr/>
           <p:nvPr/>
         </p:nvSpPr>
@@ -11832,7 +13783,7 @@
       </p:sp>
       <p:sp>
         <p:nvSpPr>
-          <p:cNvPr id="10" name="Text 8"/>
+          <p:cNvPr id="11" name="Text 9"/>
           <p:cNvSpPr txBox="1"/>
           <p:nvPr/>
         </p:nvSpPr>
@@ -11871,7 +13822,7 @@
       </p:sp>
       <p:sp>
         <p:nvSpPr>
-          <p:cNvPr id="11" name="Text 9"/>
+          <p:cNvPr id="12" name="Text 10"/>
           <p:cNvSpPr txBox="1"/>
           <p:nvPr/>
         </p:nvSpPr>
@@ -11907,7 +13858,7 @@
       </p:sp>
       <p:sp>
         <p:nvSpPr>
-          <p:cNvPr id="12" name="Text 10"/>
+          <p:cNvPr id="13" name="Text 11"/>
           <p:cNvSpPr txBox="1"/>
           <p:nvPr/>
         </p:nvSpPr>
@@ -11943,7 +13894,7 @@
       </p:sp>
       <p:sp>
         <p:nvSpPr>
-          <p:cNvPr id="13" name="Concept card C"/>
+          <p:cNvPr id="14" name="Concept card C"/>
           <p:cNvSpPr/>
           <p:nvPr/>
         </p:nvSpPr>
@@ -11961,11 +13912,18 @@
             <a:schemeClr val="tx2"/>
           </a:solidFill>
           <a:ln/>
-        </p:spPr>
-      </p:sp>
-      <p:sp>
-        <p:nvSpPr>
-          <p:cNvPr id="14" name="Concept badge C"/>
+          <a:effectLst>
+            <a:outerShdw sx="100000" sy="100000" kx="0" ky="0" algn="bl" rotWithShape="0" blurRad="127000" dist="38100" dir="5400000">
+              <a:srgbClr val="0A2540">
+                <a:alpha val="10000"/>
+              </a:srgbClr>
+            </a:outerShdw>
+          </a:effectLst>
+        </p:spPr>
+      </p:sp>
+      <p:sp>
+        <p:nvSpPr>
+          <p:cNvPr id="15" name="Concept badge C"/>
           <p:cNvSpPr/>
           <p:nvPr/>
         </p:nvSpPr>
@@ -11985,7 +13943,7 @@
       </p:sp>
       <p:sp>
         <p:nvSpPr>
-          <p:cNvPr id="15" name="Text 13"/>
+          <p:cNvPr id="16" name="Text 14"/>
           <p:cNvSpPr txBox="1"/>
           <p:nvPr/>
         </p:nvSpPr>
@@ -12024,7 +13982,7 @@
       </p:sp>
       <p:sp>
         <p:nvSpPr>
-          <p:cNvPr id="16" name="Text 14"/>
+          <p:cNvPr id="17" name="Text 15"/>
           <p:cNvSpPr txBox="1"/>
           <p:nvPr/>
         </p:nvSpPr>
@@ -12060,7 +14018,7 @@
       </p:sp>
       <p:sp>
         <p:nvSpPr>
-          <p:cNvPr id="17" name="Text 15"/>
+          <p:cNvPr id="18" name="Text 16"/>
           <p:cNvSpPr txBox="1"/>
           <p:nvPr/>
         </p:nvSpPr>
@@ -12470,7 +14428,7 @@
                       <a:r>
                         <a:rPr lang="en-US" sz="1400" b="1" dirty="0">
                           <a:solidFill>
-                            <a:schemeClr val="tx1"/>
+                            <a:schemeClr val="tx2"/>
                           </a:solidFill>
                         </a:rPr>
                         <a:t>4</a:t>
@@ -12492,7 +14450,7 @@
                       <a:noFill/>
                     </a:lnB>
                     <a:solidFill>
-                      <a:schemeClr val="bg2"/>
+                      <a:srgbClr val="DCE8F5"/>
                     </a:solidFill>
                   </a:tcPr>
                 </a:tc>
@@ -12657,7 +14615,7 @@
                       <a:r>
                         <a:rPr lang="en-US" sz="1400" b="1" dirty="0">
                           <a:solidFill>
-                            <a:schemeClr val="tx1"/>
+                            <a:schemeClr val="tx2"/>
                           </a:solidFill>
                         </a:rPr>
                         <a:t>5</a:t>
@@ -12679,7 +14637,7 @@
                       <a:noFill/>
                     </a:lnB>
                     <a:solidFill>
-                      <a:schemeClr val="bg1"/>
+                      <a:srgbClr val="DCE8F5"/>
                     </a:solidFill>
                   </a:tcPr>
                 </a:tc>
@@ -12844,7 +14802,7 @@
                       <a:r>
                         <a:rPr lang="en-US" sz="1400" b="1" dirty="0">
                           <a:solidFill>
-                            <a:schemeClr val="tx1"/>
+                            <a:schemeClr val="tx2"/>
                           </a:solidFill>
                         </a:rPr>
                         <a:t>4</a:t>
@@ -12866,7 +14824,7 @@
                       <a:noFill/>
                     </a:lnB>
                     <a:solidFill>
-                      <a:schemeClr val="bg2"/>
+                      <a:srgbClr val="DCE8F5"/>
                     </a:solidFill>
                   </a:tcPr>
                 </a:tc>
@@ -13031,7 +14989,7 @@
                       <a:r>
                         <a:rPr lang="en-US" sz="1400" b="1" dirty="0">
                           <a:solidFill>
-                            <a:schemeClr val="tx1"/>
+                            <a:schemeClr val="tx2"/>
                           </a:solidFill>
                         </a:rPr>
                         <a:t>4</a:t>
@@ -13053,7 +15011,7 @@
                       <a:noFill/>
                     </a:lnB>
                     <a:solidFill>
-                      <a:schemeClr val="bg1"/>
+                      <a:srgbClr val="DCE8F5"/>
                     </a:solidFill>
                   </a:tcPr>
                 </a:tc>
@@ -13218,7 +15176,7 @@
                       <a:r>
                         <a:rPr lang="en-US" sz="1400" b="1" dirty="0">
                           <a:solidFill>
-                            <a:schemeClr val="tx1"/>
+                            <a:schemeClr val="tx2"/>
                           </a:solidFill>
                         </a:rPr>
                         <a:t>4</a:t>
@@ -13240,7 +15198,7 @@
                       <a:noFill/>
                     </a:lnB>
                     <a:solidFill>
-                      <a:schemeClr val="bg2"/>
+                      <a:srgbClr val="DCE8F5"/>
                     </a:solidFill>
                   </a:tcPr>
                 </a:tc>
@@ -13405,7 +15363,7 @@
                       <a:r>
                         <a:rPr lang="en-US" sz="1400" b="1" dirty="0">
                           <a:solidFill>
-                            <a:schemeClr val="tx1"/>
+                            <a:schemeClr val="tx2"/>
                           </a:solidFill>
                         </a:rPr>
                         <a:t>4</a:t>
@@ -13427,7 +15385,7 @@
                       <a:noFill/>
                     </a:lnB>
                     <a:solidFill>
-                      <a:schemeClr val="bg1"/>
+                      <a:srgbClr val="DCE8F5"/>
                     </a:solidFill>
                   </a:tcPr>
                 </a:tc>
@@ -13625,7 +15583,7 @@
       </p:graphicFrame>
       <p:sp>
         <p:nvSpPr>
-          <p:cNvPr id="19" name="Text 16"/>
+          <p:cNvPr id="20" name="Text 17"/>
           <p:cNvSpPr txBox="1"/>
           <p:nvPr/>
         </p:nvSpPr>
@@ -13671,7 +15629,7 @@
         </p:nvSpPr>
         <p:spPr>
           <a:xfrm>
-            <a:off x="11094415" y="6400800"/>
+            <a:off x="11094415" y="6291072"/>
             <a:ext cx="548640" cy="274320"/>
           </a:xfrm>
           <a:prstGeom prst="rect">
@@ -13739,8 +15697,8 @@
         </p:nvSpPr>
         <p:spPr>
           <a:xfrm>
-            <a:off x="548640" y="365760"/>
-            <a:ext cx="11094415" cy="822960"/>
+            <a:off x="548640" y="621792"/>
+            <a:ext cx="11094415" cy="685800"/>
           </a:xfrm>
           <a:prstGeom prst="rect">
             <a:avLst/>
@@ -13769,29 +15727,67 @@
       </p:sp>
       <p:sp>
         <p:nvSpPr>
-          <p:cNvPr id="3" name="Diagram panel"/>
-          <p:cNvSpPr/>
-          <p:nvPr/>
-        </p:nvSpPr>
+          <p:cNvPr id="3" name="Text 1"/>
+          <p:cNvSpPr txBox="1"/>
+          <p:nvPr/>
+        </p:nvSpPr>
+        <p:spPr>
+          <a:xfrm>
+            <a:off x="548640" y="384048"/>
+            <a:ext cx="7315200" cy="256032"/>
+          </a:xfrm>
+          <a:prstGeom prst="rect">
+            <a:avLst/>
+          </a:prstGeom>
+          <a:noFill/>
+          <a:ln/>
+        </p:spPr>
+        <p:txBody>
+          <a:bodyPr wrap="square" lIns="0" tIns="0" rIns="0" bIns="0" rtlCol="0" anchor="ctr"/>
+          <a:lstStyle/>
+          <a:p>
+            <a:pPr indent="0" marL="0">
+              <a:buNone/>
+            </a:pPr>
+            <a:r>
+              <a:rPr lang="en-US" sz="1200" b="1" spc="300" kern="0" dirty="0">
+                <a:solidFill>
+                  <a:schemeClr val="accent2"/>
+                </a:solidFill>
+              </a:rPr>
+              <a:t>05  ·  CONCEPT</a:t>
+            </a:r>
+            <a:endParaRPr lang="en-US" sz="1200" dirty="0"/>
+          </a:p>
+        </p:txBody>
+      </p:sp>
+      <p:pic>
+        <p:nvPicPr>
+          <p:cNvPr id="4" name="Image 0" descr="Drafting grid background">    </p:cNvPr>
+          <p:cNvPicPr>
+            <a:picLocks noChangeAspect="1"/>
+          </p:cNvPicPr>
+          <p:nvPr/>
+        </p:nvPicPr>
+        <p:blipFill>
+          <a:blip r:embed="rId1"/>
+          <a:stretch>
+            <a:fillRect/>
+          </a:stretch>
+        </p:blipFill>
         <p:spPr>
           <a:xfrm>
             <a:off x="548640" y="1508760"/>
             <a:ext cx="6400800" cy="4572000"/>
           </a:xfrm>
-          <a:prstGeom prst="roundRect">
-            <a:avLst>
-              <a:gd name="adj" fmla="val 2400"/>
-            </a:avLst>
-          </a:prstGeom>
-          <a:solidFill>
-            <a:schemeClr val="bg2"/>
-          </a:solidFill>
-          <a:ln/>
-        </p:spPr>
-      </p:sp>
-      <p:sp>
-        <p:nvSpPr>
-          <p:cNvPr id="4" name="Stand drawing line"/>
+          <a:prstGeom prst="rect">
+            <a:avLst/>
+          </a:prstGeom>
+        </p:spPr>
+      </p:pic>
+      <p:sp>
+        <p:nvSpPr>
+          <p:cNvPr id="5" name="Stand drawing line"/>
           <p:cNvSpPr/>
           <p:nvPr/>
         </p:nvSpPr>
@@ -13814,7 +15810,7 @@
       </p:sp>
       <p:sp>
         <p:nvSpPr>
-          <p:cNvPr id="5" name="Stand drawing line"/>
+          <p:cNvPr id="6" name="Stand drawing line"/>
           <p:cNvSpPr/>
           <p:nvPr/>
         </p:nvSpPr>
@@ -13837,7 +15833,7 @@
       </p:sp>
       <p:sp>
         <p:nvSpPr>
-          <p:cNvPr id="6" name="Stand drawing line"/>
+          <p:cNvPr id="7" name="Stand drawing line"/>
           <p:cNvSpPr/>
           <p:nvPr/>
         </p:nvSpPr>
@@ -13860,7 +15856,7 @@
       </p:sp>
       <p:sp>
         <p:nvSpPr>
-          <p:cNvPr id="7" name="Stand drawing line"/>
+          <p:cNvPr id="8" name="Stand drawing line"/>
           <p:cNvSpPr/>
           <p:nvPr/>
         </p:nvSpPr>
@@ -13883,7 +15879,7 @@
       </p:sp>
       <p:sp>
         <p:nvSpPr>
-          <p:cNvPr id="8" name="Stand drawing line"/>
+          <p:cNvPr id="9" name="Stand drawing line"/>
           <p:cNvSpPr/>
           <p:nvPr/>
         </p:nvSpPr>
@@ -13906,7 +15902,7 @@
       </p:sp>
       <p:sp>
         <p:nvSpPr>
-          <p:cNvPr id="9" name="Stand drawing line"/>
+          <p:cNvPr id="10" name="Stand drawing line"/>
           <p:cNvSpPr/>
           <p:nvPr/>
         </p:nvSpPr>
@@ -13929,7 +15925,7 @@
       </p:sp>
       <p:sp>
         <p:nvSpPr>
-          <p:cNvPr id="10" name="Stand drawing line"/>
+          <p:cNvPr id="11" name="Stand drawing line"/>
           <p:cNvSpPr/>
           <p:nvPr/>
         </p:nvSpPr>
@@ -13952,7 +15948,7 @@
       </p:sp>
       <p:sp>
         <p:nvSpPr>
-          <p:cNvPr id="11" name="Stand drawing line"/>
+          <p:cNvPr id="12" name="Stand drawing line"/>
           <p:cNvSpPr/>
           <p:nvPr/>
         </p:nvSpPr>
@@ -13975,7 +15971,7 @@
       </p:sp>
       <p:sp>
         <p:nvSpPr>
-          <p:cNvPr id="12" name="Hinge"/>
+          <p:cNvPr id="13" name="Hinge"/>
           <p:cNvSpPr/>
           <p:nvPr/>
         </p:nvSpPr>
@@ -14000,7 +15996,7 @@
       </p:sp>
       <p:sp>
         <p:nvSpPr>
-          <p:cNvPr id="13" name="Hinge"/>
+          <p:cNvPr id="14" name="Hinge"/>
           <p:cNvSpPr/>
           <p:nvPr/>
         </p:nvSpPr>
@@ -14025,7 +16021,7 @@
       </p:sp>
       <p:sp>
         <p:nvSpPr>
-          <p:cNvPr id="14" name="Leader 1"/>
+          <p:cNvPr id="15" name="Leader 1"/>
           <p:cNvSpPr/>
           <p:nvPr/>
         </p:nvSpPr>
@@ -14048,7 +16044,7 @@
       </p:sp>
       <p:sp>
         <p:nvSpPr>
-          <p:cNvPr id="15" name="Callout 1"/>
+          <p:cNvPr id="16" name="Callout 1"/>
           <p:cNvSpPr/>
           <p:nvPr/>
         </p:nvSpPr>
@@ -14068,7 +16064,7 @@
       </p:sp>
       <p:sp>
         <p:nvSpPr>
-          <p:cNvPr id="16" name="Text 14"/>
+          <p:cNvPr id="17" name="Text 14"/>
           <p:cNvSpPr txBox="1"/>
           <p:nvPr/>
         </p:nvSpPr>
@@ -14104,7 +16100,7 @@
       </p:sp>
       <p:sp>
         <p:nvSpPr>
-          <p:cNvPr id="17" name="Leader 2"/>
+          <p:cNvPr id="18" name="Leader 2"/>
           <p:cNvSpPr/>
           <p:nvPr/>
         </p:nvSpPr>
@@ -14127,7 +16123,7 @@
       </p:sp>
       <p:sp>
         <p:nvSpPr>
-          <p:cNvPr id="18" name="Callout 2"/>
+          <p:cNvPr id="19" name="Callout 2"/>
           <p:cNvSpPr/>
           <p:nvPr/>
         </p:nvSpPr>
@@ -14147,7 +16143,7 @@
       </p:sp>
       <p:sp>
         <p:nvSpPr>
-          <p:cNvPr id="19" name="Text 17"/>
+          <p:cNvPr id="20" name="Text 17"/>
           <p:cNvSpPr txBox="1"/>
           <p:nvPr/>
         </p:nvSpPr>
@@ -14183,7 +16179,7 @@
       </p:sp>
       <p:sp>
         <p:nvSpPr>
-          <p:cNvPr id="20" name="Leader 3"/>
+          <p:cNvPr id="21" name="Leader 3"/>
           <p:cNvSpPr/>
           <p:nvPr/>
         </p:nvSpPr>
@@ -14206,7 +16202,7 @@
       </p:sp>
       <p:sp>
         <p:nvSpPr>
-          <p:cNvPr id="21" name="Callout 3"/>
+          <p:cNvPr id="22" name="Callout 3"/>
           <p:cNvSpPr/>
           <p:nvPr/>
         </p:nvSpPr>
@@ -14226,7 +16222,7 @@
       </p:sp>
       <p:sp>
         <p:nvSpPr>
-          <p:cNvPr id="22" name="Text 20"/>
+          <p:cNvPr id="23" name="Text 20"/>
           <p:cNvSpPr txBox="1"/>
           <p:nvPr/>
         </p:nvSpPr>
@@ -14262,7 +16258,7 @@
       </p:sp>
       <p:sp>
         <p:nvSpPr>
-          <p:cNvPr id="23" name="Leader 4"/>
+          <p:cNvPr id="24" name="Leader 4"/>
           <p:cNvSpPr/>
           <p:nvPr/>
         </p:nvSpPr>
@@ -14285,7 +16281,7 @@
       </p:sp>
       <p:sp>
         <p:nvSpPr>
-          <p:cNvPr id="24" name="Callout 4"/>
+          <p:cNvPr id="25" name="Callout 4"/>
           <p:cNvSpPr/>
           <p:nvPr/>
         </p:nvSpPr>
@@ -14305,7 +16301,7 @@
       </p:sp>
       <p:sp>
         <p:nvSpPr>
-          <p:cNvPr id="25" name="Text 23"/>
+          <p:cNvPr id="26" name="Text 23"/>
           <p:cNvSpPr txBox="1"/>
           <p:nvPr/>
         </p:nvSpPr>
@@ -14341,7 +16337,7 @@
       </p:sp>
       <p:sp>
         <p:nvSpPr>
-          <p:cNvPr id="26" name="Text 24"/>
+          <p:cNvPr id="27" name="Text 24"/>
           <p:cNvSpPr txBox="1"/>
           <p:nvPr/>
         </p:nvSpPr>
@@ -14380,7 +16376,7 @@
       </p:sp>
       <p:sp>
         <p:nvSpPr>
-          <p:cNvPr id="27" name="Text 25"/>
+          <p:cNvPr id="28" name="Text 25"/>
           <p:cNvSpPr txBox="1"/>
           <p:nvPr/>
         </p:nvSpPr>
@@ -14416,7 +16412,7 @@
       </p:sp>
       <p:sp>
         <p:nvSpPr>
-          <p:cNvPr id="28" name="Part badge 1"/>
+          <p:cNvPr id="29" name="Part badge 1"/>
           <p:cNvSpPr/>
           <p:nvPr/>
         </p:nvSpPr>
@@ -14436,7 +16432,7 @@
       </p:sp>
       <p:sp>
         <p:nvSpPr>
-          <p:cNvPr id="29" name="Text 27"/>
+          <p:cNvPr id="30" name="Text 27"/>
           <p:cNvSpPr txBox="1"/>
           <p:nvPr/>
         </p:nvSpPr>
@@ -14472,7 +16468,7 @@
       </p:sp>
       <p:sp>
         <p:nvSpPr>
-          <p:cNvPr id="30" name="Text 28"/>
+          <p:cNvPr id="31" name="Text 28"/>
           <p:cNvSpPr txBox="1"/>
           <p:nvPr/>
         </p:nvSpPr>
@@ -14508,7 +16504,7 @@
       </p:sp>
       <p:sp>
         <p:nvSpPr>
-          <p:cNvPr id="31" name="Text 29"/>
+          <p:cNvPr id="32" name="Text 29"/>
           <p:cNvSpPr txBox="1"/>
           <p:nvPr/>
         </p:nvSpPr>
@@ -14544,7 +16540,7 @@
       </p:sp>
       <p:sp>
         <p:nvSpPr>
-          <p:cNvPr id="32" name="Part badge 2"/>
+          <p:cNvPr id="33" name="Part badge 2"/>
           <p:cNvSpPr/>
           <p:nvPr/>
         </p:nvSpPr>
@@ -14564,7 +16560,7 @@
       </p:sp>
       <p:sp>
         <p:nvSpPr>
-          <p:cNvPr id="33" name="Text 31"/>
+          <p:cNvPr id="34" name="Text 31"/>
           <p:cNvSpPr txBox="1"/>
           <p:nvPr/>
         </p:nvSpPr>
@@ -14600,7 +16596,7 @@
       </p:sp>
       <p:sp>
         <p:nvSpPr>
-          <p:cNvPr id="34" name="Text 32"/>
+          <p:cNvPr id="35" name="Text 32"/>
           <p:cNvSpPr txBox="1"/>
           <p:nvPr/>
         </p:nvSpPr>
@@ -14636,7 +16632,7 @@
       </p:sp>
       <p:sp>
         <p:nvSpPr>
-          <p:cNvPr id="35" name="Text 33"/>
+          <p:cNvPr id="36" name="Text 33"/>
           <p:cNvSpPr txBox="1"/>
           <p:nvPr/>
         </p:nvSpPr>
@@ -14672,7 +16668,7 @@
       </p:sp>
       <p:sp>
         <p:nvSpPr>
-          <p:cNvPr id="36" name="Part badge 3"/>
+          <p:cNvPr id="37" name="Part badge 3"/>
           <p:cNvSpPr/>
           <p:nvPr/>
         </p:nvSpPr>
@@ -14692,7 +16688,7 @@
       </p:sp>
       <p:sp>
         <p:nvSpPr>
-          <p:cNvPr id="37" name="Text 35"/>
+          <p:cNvPr id="38" name="Text 35"/>
           <p:cNvSpPr txBox="1"/>
           <p:nvPr/>
         </p:nvSpPr>
@@ -14728,7 +16724,7 @@
       </p:sp>
       <p:sp>
         <p:nvSpPr>
-          <p:cNvPr id="38" name="Text 36"/>
+          <p:cNvPr id="39" name="Text 36"/>
           <p:cNvSpPr txBox="1"/>
           <p:nvPr/>
         </p:nvSpPr>
@@ -14764,7 +16760,7 @@
       </p:sp>
       <p:sp>
         <p:nvSpPr>
-          <p:cNvPr id="39" name="Text 37"/>
+          <p:cNvPr id="40" name="Text 37"/>
           <p:cNvSpPr txBox="1"/>
           <p:nvPr/>
         </p:nvSpPr>
@@ -14800,7 +16796,7 @@
       </p:sp>
       <p:sp>
         <p:nvSpPr>
-          <p:cNvPr id="40" name="Part badge 4"/>
+          <p:cNvPr id="41" name="Part badge 4"/>
           <p:cNvSpPr/>
           <p:nvPr/>
         </p:nvSpPr>
@@ -14820,7 +16816,7 @@
       </p:sp>
       <p:sp>
         <p:nvSpPr>
-          <p:cNvPr id="41" name="Text 39"/>
+          <p:cNvPr id="42" name="Text 39"/>
           <p:cNvSpPr txBox="1"/>
           <p:nvPr/>
         </p:nvSpPr>
@@ -14856,7 +16852,7 @@
       </p:sp>
       <p:sp>
         <p:nvSpPr>
-          <p:cNvPr id="42" name="Text 40"/>
+          <p:cNvPr id="43" name="Text 40"/>
           <p:cNvSpPr txBox="1"/>
           <p:nvPr/>
         </p:nvSpPr>
@@ -14892,7 +16888,7 @@
       </p:sp>
       <p:sp>
         <p:nvSpPr>
-          <p:cNvPr id="43" name="Text 41"/>
+          <p:cNvPr id="44" name="Text 41"/>
           <p:cNvSpPr txBox="1"/>
           <p:nvPr/>
         </p:nvSpPr>
@@ -14938,7 +16934,7 @@
         </p:nvSpPr>
         <p:spPr>
           <a:xfrm>
-            <a:off x="11094415" y="6400800"/>
+            <a:off x="11094415" y="6291072"/>
             <a:ext cx="548640" cy="274320"/>
           </a:xfrm>
           <a:prstGeom prst="rect">
@@ -15006,8 +17002,8 @@
         </p:nvSpPr>
         <p:spPr>
           <a:xfrm>
-            <a:off x="548640" y="365760"/>
-            <a:ext cx="11094415" cy="822960"/>
+            <a:off x="548640" y="621792"/>
+            <a:ext cx="11094415" cy="685800"/>
           </a:xfrm>
           <a:prstGeom prst="rect">
             <a:avLst/>
@@ -15036,29 +17032,67 @@
       </p:sp>
       <p:sp>
         <p:nvSpPr>
-          <p:cNvPr id="3" name="FBD panel"/>
-          <p:cNvSpPr/>
-          <p:nvPr/>
-        </p:nvSpPr>
+          <p:cNvPr id="3" name="Text 1"/>
+          <p:cNvSpPr txBox="1"/>
+          <p:nvPr/>
+        </p:nvSpPr>
+        <p:spPr>
+          <a:xfrm>
+            <a:off x="548640" y="384048"/>
+            <a:ext cx="7315200" cy="256032"/>
+          </a:xfrm>
+          <a:prstGeom prst="rect">
+            <a:avLst/>
+          </a:prstGeom>
+          <a:noFill/>
+          <a:ln/>
+        </p:spPr>
+        <p:txBody>
+          <a:bodyPr wrap="square" lIns="0" tIns="0" rIns="0" bIns="0" rtlCol="0" anchor="ctr"/>
+          <a:lstStyle/>
+          <a:p>
+            <a:pPr indent="0" marL="0">
+              <a:buNone/>
+            </a:pPr>
+            <a:r>
+              <a:rPr lang="en-US" sz="1200" b="1" spc="300" kern="0" dirty="0">
+                <a:solidFill>
+                  <a:schemeClr val="accent2"/>
+                </a:solidFill>
+              </a:rPr>
+              <a:t>06  ·  MODELLING</a:t>
+            </a:r>
+            <a:endParaRPr lang="en-US" sz="1200" dirty="0"/>
+          </a:p>
+        </p:txBody>
+      </p:sp>
+      <p:pic>
+        <p:nvPicPr>
+          <p:cNvPr id="4" name="Image 0" descr="Drafting grid background">    </p:cNvPr>
+          <p:cNvPicPr>
+            <a:picLocks noChangeAspect="1"/>
+          </p:cNvPicPr>
+          <p:nvPr/>
+        </p:nvPicPr>
+        <p:blipFill>
+          <a:blip r:embed="rId1"/>
+          <a:stretch>
+            <a:fillRect/>
+          </a:stretch>
+        </p:blipFill>
         <p:spPr>
           <a:xfrm>
             <a:off x="548640" y="1508760"/>
             <a:ext cx="5669280" cy="2788920"/>
           </a:xfrm>
-          <a:prstGeom prst="roundRect">
-            <a:avLst>
-              <a:gd name="adj" fmla="val 3934"/>
-            </a:avLst>
-          </a:prstGeom>
-          <a:solidFill>
-            <a:schemeClr val="bg2"/>
-          </a:solidFill>
-          <a:ln/>
-        </p:spPr>
-      </p:sp>
-      <p:sp>
-        <p:nvSpPr>
-          <p:cNvPr id="4" name="Beam"/>
+          <a:prstGeom prst="rect">
+            <a:avLst/>
+          </a:prstGeom>
+        </p:spPr>
+      </p:pic>
+      <p:sp>
+        <p:nvSpPr>
+          <p:cNvPr id="5" name="Beam"/>
           <p:cNvSpPr/>
           <p:nvPr/>
         </p:nvSpPr>
@@ -15078,7 +17112,7 @@
       </p:sp>
       <p:sp>
         <p:nvSpPr>
-          <p:cNvPr id="5" name="Pin support"/>
+          <p:cNvPr id="6" name="Pin support"/>
           <p:cNvSpPr/>
           <p:nvPr/>
         </p:nvSpPr>
@@ -15098,7 +17132,7 @@
       </p:sp>
       <p:sp>
         <p:nvSpPr>
-          <p:cNvPr id="6" name="Roller support"/>
+          <p:cNvPr id="7" name="Roller support"/>
           <p:cNvSpPr/>
           <p:nvPr/>
         </p:nvSpPr>
@@ -15118,7 +17152,7 @@
       </p:sp>
       <p:sp>
         <p:nvSpPr>
-          <p:cNvPr id="7" name="Load arrow"/>
+          <p:cNvPr id="8" name="Load arrow"/>
           <p:cNvSpPr/>
           <p:nvPr/>
         </p:nvSpPr>
@@ -15142,7 +17176,7 @@
       </p:sp>
       <p:sp>
         <p:nvSpPr>
-          <p:cNvPr id="8" name="Text 6"/>
+          <p:cNvPr id="9" name="Text 6"/>
           <p:cNvSpPr txBox="1"/>
           <p:nvPr/>
         </p:nvSpPr>
@@ -15178,7 +17212,7 @@
       </p:sp>
       <p:sp>
         <p:nvSpPr>
-          <p:cNvPr id="9" name="Span dimension"/>
+          <p:cNvPr id="10" name="Span dimension"/>
           <p:cNvSpPr/>
           <p:nvPr/>
         </p:nvSpPr>
@@ -15203,7 +17237,7 @@
       </p:sp>
       <p:sp>
         <p:nvSpPr>
-          <p:cNvPr id="10" name="Text 8"/>
+          <p:cNvPr id="11" name="Text 8"/>
           <p:cNvSpPr txBox="1"/>
           <p:nvPr/>
         </p:nvSpPr>
@@ -15239,7 +17273,7 @@
       </p:sp>
       <p:sp>
         <p:nvSpPr>
-          <p:cNvPr id="11" name="Equation panel"/>
+          <p:cNvPr id="12" name="Equation panel"/>
           <p:cNvSpPr/>
           <p:nvPr/>
         </p:nvSpPr>
@@ -15261,7 +17295,7 @@
       </p:sp>
       <p:sp>
         <p:nvSpPr>
-          <p:cNvPr id="12" name="Text 10"/>
+          <p:cNvPr id="13" name="Text 10"/>
           <p:cNvSpPr txBox="1"/>
           <p:nvPr/>
         </p:nvSpPr>
@@ -15357,7 +17391,7 @@
       </p:sp>
       <p:sp>
         <p:nvSpPr>
-          <p:cNvPr id="13" name="Text 11"/>
+          <p:cNvPr id="14" name="Text 11"/>
           <p:cNvSpPr txBox="1"/>
           <p:nvPr/>
         </p:nvSpPr>
@@ -15393,7 +17427,7 @@
       </p:sp>
       <p:sp>
         <p:nvSpPr>
-          <p:cNvPr id="14" name="Text 12"/>
+          <p:cNvPr id="15" name="Text 12"/>
           <p:cNvSpPr txBox="1"/>
           <p:nvPr/>
         </p:nvSpPr>
@@ -15469,7 +17503,7 @@
       </p:sp>
       <p:sp>
         <p:nvSpPr>
-          <p:cNvPr id="15" name="Result card 1"/>
+          <p:cNvPr id="16" name="Result card 1"/>
           <p:cNvSpPr/>
           <p:nvPr/>
         </p:nvSpPr>
@@ -15487,11 +17521,18 @@
             <a:schemeClr val="bg2"/>
           </a:solidFill>
           <a:ln/>
-        </p:spPr>
-      </p:sp>
-      <p:sp>
-        <p:nvSpPr>
-          <p:cNvPr id="16" name="Text 14"/>
+          <a:effectLst>
+            <a:outerShdw sx="100000" sy="100000" kx="0" ky="0" algn="bl" rotWithShape="0" blurRad="127000" dist="38100" dir="5400000">
+              <a:srgbClr val="0A2540">
+                <a:alpha val="10000"/>
+              </a:srgbClr>
+            </a:outerShdw>
+          </a:effectLst>
+        </p:spPr>
+      </p:sp>
+      <p:sp>
+        <p:nvSpPr>
+          <p:cNvPr id="17" name="Text 14"/>
           <p:cNvSpPr txBox="1"/>
           <p:nvPr/>
         </p:nvSpPr>
@@ -15530,7 +17571,7 @@
       </p:sp>
       <p:sp>
         <p:nvSpPr>
-          <p:cNvPr id="17" name="Text 15"/>
+          <p:cNvPr id="18" name="Text 15"/>
           <p:cNvSpPr txBox="1"/>
           <p:nvPr/>
         </p:nvSpPr>
@@ -15566,7 +17607,7 @@
       </p:sp>
       <p:sp>
         <p:nvSpPr>
-          <p:cNvPr id="18" name="Result card 2"/>
+          <p:cNvPr id="19" name="Result card 2"/>
           <p:cNvSpPr/>
           <p:nvPr/>
         </p:nvSpPr>
@@ -15584,11 +17625,18 @@
             <a:schemeClr val="bg2"/>
           </a:solidFill>
           <a:ln/>
-        </p:spPr>
-      </p:sp>
-      <p:sp>
-        <p:nvSpPr>
-          <p:cNvPr id="19" name="Text 17"/>
+          <a:effectLst>
+            <a:outerShdw sx="100000" sy="100000" kx="0" ky="0" algn="bl" rotWithShape="0" blurRad="127000" dist="38100" dir="5400000">
+              <a:srgbClr val="0A2540">
+                <a:alpha val="10000"/>
+              </a:srgbClr>
+            </a:outerShdw>
+          </a:effectLst>
+        </p:spPr>
+      </p:sp>
+      <p:sp>
+        <p:nvSpPr>
+          <p:cNvPr id="20" name="Text 17"/>
           <p:cNvSpPr txBox="1"/>
           <p:nvPr/>
         </p:nvSpPr>
@@ -15627,7 +17675,7 @@
       </p:sp>
       <p:sp>
         <p:nvSpPr>
-          <p:cNvPr id="20" name="Text 18"/>
+          <p:cNvPr id="21" name="Text 18"/>
           <p:cNvSpPr txBox="1"/>
           <p:nvPr/>
         </p:nvSpPr>
@@ -15663,7 +17711,7 @@
       </p:sp>
       <p:sp>
         <p:nvSpPr>
-          <p:cNvPr id="21" name="Result card 3"/>
+          <p:cNvPr id="22" name="Result card 3"/>
           <p:cNvSpPr/>
           <p:nvPr/>
         </p:nvSpPr>
@@ -15681,11 +17729,18 @@
             <a:schemeClr val="bg2"/>
           </a:solidFill>
           <a:ln/>
-        </p:spPr>
-      </p:sp>
-      <p:sp>
-        <p:nvSpPr>
-          <p:cNvPr id="22" name="Text 20"/>
+          <a:effectLst>
+            <a:outerShdw sx="100000" sy="100000" kx="0" ky="0" algn="bl" rotWithShape="0" blurRad="127000" dist="38100" dir="5400000">
+              <a:srgbClr val="0A2540">
+                <a:alpha val="10000"/>
+              </a:srgbClr>
+            </a:outerShdw>
+          </a:effectLst>
+        </p:spPr>
+      </p:sp>
+      <p:sp>
+        <p:nvSpPr>
+          <p:cNvPr id="23" name="Text 20"/>
           <p:cNvSpPr txBox="1"/>
           <p:nvPr/>
         </p:nvSpPr>
@@ -15724,7 +17779,7 @@
       </p:sp>
       <p:sp>
         <p:nvSpPr>
-          <p:cNvPr id="23" name="Text 21"/>
+          <p:cNvPr id="24" name="Text 21"/>
           <p:cNvSpPr txBox="1"/>
           <p:nvPr/>
         </p:nvSpPr>
@@ -15770,7 +17825,7 @@
         </p:nvSpPr>
         <p:spPr>
           <a:xfrm>
-            <a:off x="11094415" y="6400800"/>
+            <a:off x="11094415" y="6291072"/>
             <a:ext cx="548640" cy="274320"/>
           </a:xfrm>
           <a:prstGeom prst="rect">
@@ -15838,8 +17893,8 @@
         </p:nvSpPr>
         <p:spPr>
           <a:xfrm>
-            <a:off x="548640" y="365760"/>
-            <a:ext cx="11094415" cy="822960"/>
+            <a:off x="548640" y="621792"/>
+            <a:ext cx="11094415" cy="685800"/>
           </a:xfrm>
           <a:prstGeom prst="rect">
             <a:avLst/>
@@ -15866,15 +17921,51 @@
           </a:p>
         </p:txBody>
       </p:sp>
+      <p:sp>
+        <p:nvSpPr>
+          <p:cNvPr id="3" name="Text 1"/>
+          <p:cNvSpPr txBox="1"/>
+          <p:nvPr/>
+        </p:nvSpPr>
+        <p:spPr>
+          <a:xfrm>
+            <a:off x="548640" y="384048"/>
+            <a:ext cx="7315200" cy="256032"/>
+          </a:xfrm>
+          <a:prstGeom prst="rect">
+            <a:avLst/>
+          </a:prstGeom>
+          <a:noFill/>
+          <a:ln/>
+        </p:spPr>
+        <p:txBody>
+          <a:bodyPr wrap="square" lIns="0" tIns="0" rIns="0" bIns="0" rtlCol="0" anchor="ctr"/>
+          <a:lstStyle/>
+          <a:p>
+            <a:pPr indent="0" marL="0">
+              <a:buNone/>
+            </a:pPr>
+            <a:r>
+              <a:rPr lang="en-US" sz="1200" b="1" spc="300" kern="0" dirty="0">
+                <a:solidFill>
+                  <a:schemeClr val="accent2"/>
+                </a:solidFill>
+              </a:rPr>
+              <a:t>07  ·  ANALYSIS</a:t>
+            </a:r>
+            <a:endParaRPr lang="en-US" sz="1200" dirty="0"/>
+          </a:p>
+        </p:txBody>
+      </p:sp>
       <p:graphicFrame>
         <p:nvGraphicFramePr>
-          <p:cNvPr id="3" name="Chart 0" descr=""/>
+          <p:cNvPr id="4" name="Chart 0" descr=""/>
           <p:cNvGraphicFramePr/>
           <p:nvPr/>
         </p:nvGraphicFramePr>
         <p:xfrm>
-          <a:off x="548640" y="1417320"/>
-          <a:ext cx="6766560" cy="4663440"/>
+          <a:off x="548640" y="1463040"/>
+          <a:ext cx="6766560" cy="4526280"/>
         </p:xfrm>
         <a:graphic xmlns:a="http://schemas.openxmlformats.org/drawingml/2006/main">
           <a:graphicData uri="http://schemas.openxmlformats.org/drawingml/2006/chart">
@@ -15884,7 +17975,7 @@
       </p:graphicFrame>
       <p:sp>
         <p:nvSpPr>
-          <p:cNvPr id="4" name="Insight card 1"/>
+          <p:cNvPr id="5" name="Insight card 1"/>
           <p:cNvSpPr/>
           <p:nvPr/>
         </p:nvSpPr>
@@ -15902,11 +17993,18 @@
             <a:schemeClr val="bg2"/>
           </a:solidFill>
           <a:ln/>
-        </p:spPr>
-      </p:sp>
-      <p:sp>
-        <p:nvSpPr>
-          <p:cNvPr id="5" name="Insight icon circle 1"/>
+          <a:effectLst>
+            <a:outerShdw sx="100000" sy="100000" kx="0" ky="0" algn="bl" rotWithShape="0" blurRad="127000" dist="38100" dir="5400000">
+              <a:srgbClr val="0A2540">
+                <a:alpha val="10000"/>
+              </a:srgbClr>
+            </a:outerShdw>
+          </a:effectLst>
+        </p:spPr>
+      </p:sp>
+      <p:sp>
+        <p:nvSpPr>
+          <p:cNvPr id="6" name="Insight icon circle 1"/>
           <p:cNvSpPr/>
           <p:nvPr/>
         </p:nvSpPr>
@@ -15926,7 +18024,7 @@
       </p:sp>
       <p:pic>
         <p:nvPicPr>
-          <p:cNvPr id="6" name="Image 0" descr="Strength is easy icon">    </p:cNvPr>
+          <p:cNvPr id="7" name="Image 0" descr="Strength is easy icon">    </p:cNvPr>
           <p:cNvPicPr>
             <a:picLocks noChangeAspect="1"/>
           </p:cNvPicPr>
@@ -15950,7 +18048,7 @@
       </p:pic>
       <p:sp>
         <p:nvSpPr>
-          <p:cNvPr id="7" name="Text 3"/>
+          <p:cNvPr id="8" name="Text 4"/>
           <p:cNvSpPr txBox="1"/>
           <p:nvPr/>
         </p:nvSpPr>
@@ -15986,7 +18084,7 @@
       </p:sp>
       <p:sp>
         <p:nvSpPr>
-          <p:cNvPr id="8" name="Text 4"/>
+          <p:cNvPr id="9" name="Text 5"/>
           <p:cNvSpPr txBox="1"/>
           <p:nvPr/>
         </p:nvSpPr>
@@ -16022,7 +18120,7 @@
       </p:sp>
       <p:sp>
         <p:nvSpPr>
-          <p:cNvPr id="9" name="Insight card 2"/>
+          <p:cNvPr id="10" name="Insight card 2"/>
           <p:cNvSpPr/>
           <p:nvPr/>
         </p:nvSpPr>
@@ -16040,11 +18138,18 @@
             <a:schemeClr val="bg2"/>
           </a:solidFill>
           <a:ln/>
-        </p:spPr>
-      </p:sp>
-      <p:sp>
-        <p:nvSpPr>
-          <p:cNvPr id="10" name="Insight icon circle 2"/>
+          <a:effectLst>
+            <a:outerShdw sx="100000" sy="100000" kx="0" ky="0" algn="bl" rotWithShape="0" blurRad="127000" dist="38100" dir="5400000">
+              <a:srgbClr val="0A2540">
+                <a:alpha val="10000"/>
+              </a:srgbClr>
+            </a:outerShdw>
+          </a:effectLst>
+        </p:spPr>
+      </p:sp>
+      <p:sp>
+        <p:nvSpPr>
+          <p:cNvPr id="11" name="Insight icon circle 2"/>
           <p:cNvSpPr/>
           <p:nvPr/>
         </p:nvSpPr>
@@ -16064,7 +18169,7 @@
       </p:sp>
       <p:pic>
         <p:nvPicPr>
-          <p:cNvPr id="11" name="Image 1" descr="Stiffness is the limit icon">    </p:cNvPr>
+          <p:cNvPr id="12" name="Image 1" descr="Stiffness is the limit icon">    </p:cNvPr>
           <p:cNvPicPr>
             <a:picLocks noChangeAspect="1"/>
           </p:cNvPicPr>
@@ -16088,7 +18193,7 @@
       </p:pic>
       <p:sp>
         <p:nvSpPr>
-          <p:cNvPr id="12" name="Text 7"/>
+          <p:cNvPr id="13" name="Text 8"/>
           <p:cNvSpPr txBox="1"/>
           <p:nvPr/>
         </p:nvSpPr>
@@ -16124,7 +18229,7 @@
       </p:sp>
       <p:sp>
         <p:nvSpPr>
-          <p:cNvPr id="13" name="Text 8"/>
+          <p:cNvPr id="14" name="Text 9"/>
           <p:cNvSpPr txBox="1"/>
           <p:nvPr/>
         </p:nvSpPr>
@@ -16160,7 +18265,7 @@
       </p:sp>
       <p:sp>
         <p:nvSpPr>
-          <p:cNvPr id="14" name="Insight card 3"/>
+          <p:cNvPr id="15" name="Insight card 3"/>
           <p:cNvSpPr/>
           <p:nvPr/>
         </p:nvSpPr>
@@ -16178,11 +18283,18 @@
             <a:schemeClr val="bg2"/>
           </a:solidFill>
           <a:ln/>
-        </p:spPr>
-      </p:sp>
-      <p:sp>
-        <p:nvSpPr>
-          <p:cNvPr id="15" name="Insight icon circle 3"/>
+          <a:effectLst>
+            <a:outerShdw sx="100000" sy="100000" kx="0" ky="0" algn="bl" rotWithShape="0" blurRad="127000" dist="38100" dir="5400000">
+              <a:srgbClr val="0A2540">
+                <a:alpha val="10000"/>
+              </a:srgbClr>
+            </a:outerShdw>
+          </a:effectLst>
+        </p:spPr>
+      </p:sp>
+      <p:sp>
+        <p:nvSpPr>
+          <p:cNvPr id="16" name="Insight icon circle 3"/>
           <p:cNvSpPr/>
           <p:nvPr/>
         </p:nvSpPr>
@@ -16202,7 +18314,7 @@
       </p:sp>
       <p:pic>
         <p:nvPicPr>
-          <p:cNvPr id="16" name="Image 2" descr="Mass scales linearly icon">    </p:cNvPr>
+          <p:cNvPr id="17" name="Image 2" descr="Mass scales linearly icon">    </p:cNvPr>
           <p:cNvPicPr>
             <a:picLocks noChangeAspect="1"/>
           </p:cNvPicPr>
@@ -16226,7 +18338,7 @@
       </p:pic>
       <p:sp>
         <p:nvSpPr>
-          <p:cNvPr id="17" name="Text 11"/>
+          <p:cNvPr id="18" name="Text 12"/>
           <p:cNvSpPr txBox="1"/>
           <p:nvPr/>
         </p:nvSpPr>
@@ -16262,7 +18374,7 @@
       </p:sp>
       <p:sp>
         <p:nvSpPr>
-          <p:cNvPr id="18" name="Text 12"/>
+          <p:cNvPr id="19" name="Text 13"/>
           <p:cNvSpPr txBox="1"/>
           <p:nvPr/>
         </p:nvSpPr>
@@ -16308,7 +18420,7 @@
         </p:nvSpPr>
         <p:spPr>
           <a:xfrm>
-            <a:off x="11094415" y="6400800"/>
+            <a:off x="11094415" y="6291072"/>
             <a:ext cx="548640" cy="274320"/>
           </a:xfrm>
           <a:prstGeom prst="rect">
@@ -16376,8 +18488,8 @@
         </p:nvSpPr>
         <p:spPr>
           <a:xfrm>
-            <a:off x="548640" y="365760"/>
-            <a:ext cx="11094415" cy="822960"/>
+            <a:off x="548640" y="621792"/>
+            <a:ext cx="11094415" cy="685800"/>
           </a:xfrm>
           <a:prstGeom prst="rect">
             <a:avLst/>
@@ -16406,7 +18518,43 @@
       </p:sp>
       <p:sp>
         <p:nvSpPr>
-          <p:cNvPr id="3" name="Workflow card 1"/>
+          <p:cNvPr id="3" name="Text 1"/>
+          <p:cNvSpPr txBox="1"/>
+          <p:nvPr/>
+        </p:nvSpPr>
+        <p:spPr>
+          <a:xfrm>
+            <a:off x="548640" y="384048"/>
+            <a:ext cx="7315200" cy="256032"/>
+          </a:xfrm>
+          <a:prstGeom prst="rect">
+            <a:avLst/>
+          </a:prstGeom>
+          <a:noFill/>
+          <a:ln/>
+        </p:spPr>
+        <p:txBody>
+          <a:bodyPr wrap="square" lIns="0" tIns="0" rIns="0" bIns="0" rtlCol="0" anchor="ctr"/>
+          <a:lstStyle/>
+          <a:p>
+            <a:pPr indent="0" marL="0">
+              <a:buNone/>
+            </a:pPr>
+            <a:r>
+              <a:rPr lang="en-US" sz="1200" b="1" spc="300" kern="0" dirty="0">
+                <a:solidFill>
+                  <a:schemeClr val="accent2"/>
+                </a:solidFill>
+              </a:rPr>
+              <a:t>08  ·  SIMULATION</a:t>
+            </a:r>
+            <a:endParaRPr lang="en-US" sz="1200" dirty="0"/>
+          </a:p>
+        </p:txBody>
+      </p:sp>
+      <p:sp>
+        <p:nvSpPr>
+          <p:cNvPr id="4" name="Workflow card 1"/>
           <p:cNvSpPr/>
           <p:nvPr/>
         </p:nvSpPr>
@@ -16424,11 +18572,18 @@
             <a:schemeClr val="bg2"/>
           </a:solidFill>
           <a:ln/>
-        </p:spPr>
-      </p:sp>
-      <p:sp>
-        <p:nvSpPr>
-          <p:cNvPr id="4" name="Text 2"/>
+          <a:effectLst>
+            <a:outerShdw sx="100000" sy="100000" kx="0" ky="0" algn="bl" rotWithShape="0" blurRad="127000" dist="38100" dir="5400000">
+              <a:srgbClr val="0A2540">
+                <a:alpha val="10000"/>
+              </a:srgbClr>
+            </a:outerShdw>
+          </a:effectLst>
+        </p:spPr>
+      </p:sp>
+      <p:sp>
+        <p:nvSpPr>
+          <p:cNvPr id="5" name="Text 3"/>
           <p:cNvSpPr txBox="1"/>
           <p:nvPr/>
         </p:nvSpPr>
@@ -16467,7 +18622,7 @@
       </p:sp>
       <p:sp>
         <p:nvSpPr>
-          <p:cNvPr id="5" name="Text 3"/>
+          <p:cNvPr id="6" name="Text 4"/>
           <p:cNvSpPr txBox="1"/>
           <p:nvPr/>
         </p:nvSpPr>
@@ -16503,7 +18658,7 @@
       </p:sp>
       <p:sp>
         <p:nvSpPr>
-          <p:cNvPr id="6" name="Text 4"/>
+          <p:cNvPr id="7" name="Text 5"/>
           <p:cNvSpPr txBox="1"/>
           <p:nvPr/>
         </p:nvSpPr>
@@ -16539,7 +18694,7 @@
       </p:sp>
       <p:sp>
         <p:nvSpPr>
-          <p:cNvPr id="7" name="Workflow arrow 1"/>
+          <p:cNvPr id="8" name="Workflow arrow 1"/>
           <p:cNvSpPr/>
           <p:nvPr/>
         </p:nvSpPr>
@@ -16563,7 +18718,7 @@
       </p:sp>
       <p:sp>
         <p:nvSpPr>
-          <p:cNvPr id="8" name="Workflow card 2"/>
+          <p:cNvPr id="9" name="Workflow card 2"/>
           <p:cNvSpPr/>
           <p:nvPr/>
         </p:nvSpPr>
@@ -16581,11 +18736,18 @@
             <a:schemeClr val="bg2"/>
           </a:solidFill>
           <a:ln/>
-        </p:spPr>
-      </p:sp>
-      <p:sp>
-        <p:nvSpPr>
-          <p:cNvPr id="9" name="Text 7"/>
+          <a:effectLst>
+            <a:outerShdw sx="100000" sy="100000" kx="0" ky="0" algn="bl" rotWithShape="0" blurRad="127000" dist="38100" dir="5400000">
+              <a:srgbClr val="0A2540">
+                <a:alpha val="10000"/>
+              </a:srgbClr>
+            </a:outerShdw>
+          </a:effectLst>
+        </p:spPr>
+      </p:sp>
+      <p:sp>
+        <p:nvSpPr>
+          <p:cNvPr id="10" name="Text 8"/>
           <p:cNvSpPr txBox="1"/>
           <p:nvPr/>
         </p:nvSpPr>
@@ -16624,7 +18786,7 @@
       </p:sp>
       <p:sp>
         <p:nvSpPr>
-          <p:cNvPr id="10" name="Text 8"/>
+          <p:cNvPr id="11" name="Text 9"/>
           <p:cNvSpPr txBox="1"/>
           <p:nvPr/>
         </p:nvSpPr>
@@ -16660,7 +18822,7 @@
       </p:sp>
       <p:sp>
         <p:nvSpPr>
-          <p:cNvPr id="11" name="Text 9"/>
+          <p:cNvPr id="12" name="Text 10"/>
           <p:cNvSpPr txBox="1"/>
           <p:nvPr/>
         </p:nvSpPr>
@@ -16696,7 +18858,7 @@
       </p:sp>
       <p:sp>
         <p:nvSpPr>
-          <p:cNvPr id="12" name="Workflow arrow 2"/>
+          <p:cNvPr id="13" name="Workflow arrow 2"/>
           <p:cNvSpPr/>
           <p:nvPr/>
         </p:nvSpPr>
@@ -16720,7 +18882,7 @@
       </p:sp>
       <p:sp>
         <p:nvSpPr>
-          <p:cNvPr id="13" name="Workflow card 3"/>
+          <p:cNvPr id="14" name="Workflow card 3"/>
           <p:cNvSpPr/>
           <p:nvPr/>
         </p:nvSpPr>
@@ -16738,11 +18900,18 @@
             <a:schemeClr val="bg2"/>
           </a:solidFill>
           <a:ln/>
-        </p:spPr>
-      </p:sp>
-      <p:sp>
-        <p:nvSpPr>
-          <p:cNvPr id="14" name="Text 12"/>
+          <a:effectLst>
+            <a:outerShdw sx="100000" sy="100000" kx="0" ky="0" algn="bl" rotWithShape="0" blurRad="127000" dist="38100" dir="5400000">
+              <a:srgbClr val="0A2540">
+                <a:alpha val="10000"/>
+              </a:srgbClr>
+            </a:outerShdw>
+          </a:effectLst>
+        </p:spPr>
+      </p:sp>
+      <p:sp>
+        <p:nvSpPr>
+          <p:cNvPr id="15" name="Text 13"/>
           <p:cNvSpPr txBox="1"/>
           <p:nvPr/>
         </p:nvSpPr>
@@ -16781,7 +18950,7 @@
       </p:sp>
       <p:sp>
         <p:nvSpPr>
-          <p:cNvPr id="15" name="Text 13"/>
+          <p:cNvPr id="16" name="Text 14"/>
           <p:cNvSpPr txBox="1"/>
           <p:nvPr/>
         </p:nvSpPr>
@@ -16817,7 +18986,7 @@
       </p:sp>
       <p:sp>
         <p:nvSpPr>
-          <p:cNvPr id="16" name="Text 14"/>
+          <p:cNvPr id="17" name="Text 15"/>
           <p:cNvSpPr txBox="1"/>
           <p:nvPr/>
         </p:nvSpPr>
@@ -16853,7 +19022,7 @@
       </p:sp>
       <p:sp>
         <p:nvSpPr>
-          <p:cNvPr id="17" name="Workflow arrow 3"/>
+          <p:cNvPr id="18" name="Workflow arrow 3"/>
           <p:cNvSpPr/>
           <p:nvPr/>
         </p:nvSpPr>
@@ -16877,7 +19046,7 @@
       </p:sp>
       <p:sp>
         <p:nvSpPr>
-          <p:cNvPr id="18" name="Workflow card 4"/>
+          <p:cNvPr id="19" name="Workflow card 4"/>
           <p:cNvSpPr/>
           <p:nvPr/>
         </p:nvSpPr>
@@ -16895,11 +19064,18 @@
             <a:schemeClr val="tx2"/>
           </a:solidFill>
           <a:ln/>
-        </p:spPr>
-      </p:sp>
-      <p:sp>
-        <p:nvSpPr>
-          <p:cNvPr id="19" name="Text 17"/>
+          <a:effectLst>
+            <a:outerShdw sx="100000" sy="100000" kx="0" ky="0" algn="bl" rotWithShape="0" blurRad="127000" dist="38100" dir="5400000">
+              <a:srgbClr val="0A2540">
+                <a:alpha val="10000"/>
+              </a:srgbClr>
+            </a:outerShdw>
+          </a:effectLst>
+        </p:spPr>
+      </p:sp>
+      <p:sp>
+        <p:nvSpPr>
+          <p:cNvPr id="20" name="Text 18"/>
           <p:cNvSpPr txBox="1"/>
           <p:nvPr/>
         </p:nvSpPr>
@@ -16938,7 +19114,7 @@
       </p:sp>
       <p:sp>
         <p:nvSpPr>
-          <p:cNvPr id="20" name="Text 18"/>
+          <p:cNvPr id="21" name="Text 19"/>
           <p:cNvSpPr txBox="1"/>
           <p:nvPr/>
         </p:nvSpPr>
@@ -16974,7 +19150,7 @@
       </p:sp>
       <p:sp>
         <p:nvSpPr>
-          <p:cNvPr id="21" name="Text 19"/>
+          <p:cNvPr id="22" name="Text 20"/>
           <p:cNvSpPr txBox="1"/>
           <p:nvPr/>
         </p:nvSpPr>
@@ -17010,7 +19186,7 @@
       </p:sp>
       <p:sp>
         <p:nvSpPr>
-          <p:cNvPr id="22" name="Image placeholder"/>
+          <p:cNvPr id="23" name="Image placeholder"/>
           <p:cNvSpPr/>
           <p:nvPr/>
         </p:nvSpPr>
@@ -17037,7 +19213,7 @@
       </p:sp>
       <p:pic>
         <p:nvPicPr>
-          <p:cNvPr id="23" name="Image 0" descr="Placeholder cube icon">    </p:cNvPr>
+          <p:cNvPr id="24" name="Image 0" descr="Placeholder cube icon">    </p:cNvPr>
           <p:cNvPicPr>
             <a:picLocks noChangeAspect="1"/>
           </p:cNvPicPr>
@@ -17061,7 +19237,7 @@
       </p:pic>
       <p:sp>
         <p:nvSpPr>
-          <p:cNvPr id="24" name="Text 21"/>
+          <p:cNvPr id="25" name="Text 22"/>
           <p:cNvSpPr txBox="1"/>
           <p:nvPr/>
         </p:nvSpPr>
@@ -17097,7 +19273,7 @@
       </p:sp>
       <p:sp>
         <p:nvSpPr>
-          <p:cNvPr id="25" name="Text 22"/>
+          <p:cNvPr id="26" name="Text 23"/>
           <p:cNvSpPr txBox="1"/>
           <p:nvPr/>
         </p:nvSpPr>
@@ -17133,7 +19309,7 @@
       </p:sp>
       <p:sp>
         <p:nvSpPr>
-          <p:cNvPr id="26" name="Text 23"/>
+          <p:cNvPr id="27" name="Text 24"/>
           <p:cNvSpPr txBox="1"/>
           <p:nvPr/>
         </p:nvSpPr>
@@ -17169,7 +19345,7 @@
       </p:sp>
       <p:sp>
         <p:nvSpPr>
-          <p:cNvPr id="27" name="Text 24"/>
+          <p:cNvPr id="28" name="Text 25"/>
           <p:cNvSpPr txBox="1"/>
           <p:nvPr/>
         </p:nvSpPr>
@@ -17255,7 +19431,7 @@
         </p:nvSpPr>
         <p:spPr>
           <a:xfrm>
-            <a:off x="11094415" y="6400800"/>
+            <a:off x="11094415" y="6291072"/>
             <a:ext cx="548640" cy="274320"/>
           </a:xfrm>
           <a:prstGeom prst="rect">

--- a/EngDesign_Prototype_Showcase.pptx
+++ b/EngDesign_Prototype_Showcase.pptx
@@ -120,35 +120,35 @@
   <p:extLst>
     <p:ext uri="{521415D9-36F7-43E2-AB2F-B90AF26B5E84}">
       <p14:sectionLst xmlns:p14="http://schemas.microsoft.com/office/powerpoint/2010/main">
-        <p14:section name="Introduction" id="{e395480b-7174-b740-542e-288020580395}">
+        <p14:section name="Introduction" id="{66d1637b-8483-9be7-1231-ea609326a7cb}">
           <p14:sldIdLst>
             <p14:sldId id="256"/>
             <p14:sldId id="257"/>
             <p14:sldId id="258"/>
           </p14:sldIdLst>
         </p14:section>
-        <p14:section name="Design" id="{2958fa1e-efa0-d17f-12e8-90179ee97db9}">
+        <p14:section name="Design" id="{fee4b1a7-ab5f-d5a5-3a65-48ee92e731fc}">
           <p14:sldIdLst>
             <p14:sldId id="259"/>
             <p14:sldId id="260"/>
             <p14:sldId id="261"/>
           </p14:sldIdLst>
         </p14:section>
-        <p14:section name="Modelling" id="{784be22c-c428-a4c1-2463-e1444ae7a617}">
+        <p14:section name="Modelling" id="{419188e4-bdb4-1188-e4aa-313d326c58a5}">
           <p14:sldIdLst>
             <p14:sldId id="262"/>
             <p14:sldId id="263"/>
             <p14:sldId id="264"/>
           </p14:sldIdLst>
         </p14:section>
-        <p14:section name="Build &amp; Test" id="{75766902-439b-61b3-2729-7cf81296b9d3}">
+        <p14:section name="Build &amp; Test" id="{94fdafab-1ace-ad1f-2b2d-19dddbde6f93}">
           <p14:sldIdLst>
             <p14:sldId id="265"/>
             <p14:sldId id="266"/>
             <p14:sldId id="267"/>
           </p14:sldIdLst>
         </p14:section>
-        <p14:section name="Wrap-up" id="{8ac7060a-6fe8-6224-06a4-046d254b517f}">
+        <p14:section name="Wrap-up" id="{450c008d-1315-4373-fd37-78056e2f8425}">
           <p14:sldIdLst>
             <p14:sldId id="268"/>
             <p14:sldId id="269"/>
@@ -1016,6 +1016,376 @@
 </c:chartSpace>
 </file>
 
+<file path=ppt/charts/chart3.xml><?xml version="1.0" encoding="utf-8"?>
+<c:chartSpace xmlns:c="http://schemas.openxmlformats.org/drawingml/2006/chart" xmlns:a="http://schemas.openxmlformats.org/drawingml/2006/main" xmlns:r="http://schemas.openxmlformats.org/officeDocument/2006/relationships">
+  <c:date1904 val="0"/>
+  <c:roundedCorners val="1"/>
+  <c:chart>
+    <c:title>
+      <c:tx>
+        <c:rich>
+          <a:bodyPr/>
+          <a:lstStyle/>
+          <a:p>
+            <a:pPr>
+              <a:defRPr sz="1400" b="0" i="0" u="none" strike="noStrike">
+                <a:solidFill>
+                  <a:srgbClr val="0A2540"/>
+                </a:solidFill>
+                <a:latin typeface="+mn-lt"/>
+              </a:defRPr>
+            </a:pPr>
+            <a:r>
+              <a:rPr sz="1400" b="0" i="0" u="none" strike="noStrike">
+                <a:solidFill>
+                  <a:srgbClr val="0A2540"/>
+                </a:solidFill>
+                <a:latin typeface="+mn-lt"/>
+              </a:rPr>
+              <a:t>Predicted deflected shape of the tray under 5 kg (hand calculation)</a:t>
+            </a:r>
+          </a:p>
+        </c:rich>
+      </c:tx>
+      <c:layout/>
+      <c:overlay val="0"/>
+    </c:title>
+    <c:autoTitleDeleted val="0"/>
+    <c:plotArea>
+      <c:layout/>
+      <c:lineChart>
+        <c:varyColors val="0"/>
+        <c:ser>
+          <c:idx val="0"/>
+          <c:order val="0"/>
+          <c:tx>
+            <c:strRef>
+              <c:f>Sheet1!$B$1</c:f>
+              <c:strCache>
+                <c:ptCount val="1"/>
+                <c:pt idx="0">
+                  <c:v>Deflection (mm)</c:v>
+                </c:pt>
+              </c:strCache>
+            </c:strRef>
+          </c:tx>
+          <c:spPr>
+            <a:solidFill>
+              <a:srgbClr val="2563A8"/>
+            </a:solidFill>
+            <a:ln w="38100" cap="flat">
+              <a:solidFill>
+                <a:srgbClr val="2563A8"/>
+              </a:solidFill>
+              <a:prstDash val="solid"/>
+              <a:round/>
+            </a:ln>
+            <a:effectLst/>
+          </c:spPr>
+          <c:invertIfNegative val="0"/>
+          <c:dLbls>
+            <c:numFmt formatCode="#,##0" sourceLinked="0"/>
+            <c:txPr>
+              <a:bodyPr/>
+              <a:lstStyle/>
+              <a:p>
+                <a:pPr>
+                  <a:defRPr b="0" i="0" strike="noStrike" sz="1200" u="none">
+                    <a:solidFill>
+                      <a:srgbClr val="000000"/>
+                    </a:solidFill>
+                    <a:latin typeface="Arial"/>
+                  </a:defRPr>
+                </a:pPr>
+              </a:p>
+            </c:txPr>
+            <c:showLegendKey val="0"/>
+            <c:showVal val="0"/>
+            <c:showCatName val="0"/>
+            <c:showSerName val="0"/>
+            <c:showPercent val="0"/>
+            <c:showBubbleSize val="0"/>
+            <c:showLeaderLines val="0"/>
+          </c:dLbls>
+          <c:marker>
+            <c:symbol val="circle"/>
+            <c:size val="7"/>
+            <c:spPr>
+              <a:solidFill>
+                <a:srgbClr val="2563A8"/>
+              </a:solidFill>
+              <a:ln w="9525" cap="flat">
+                <a:solidFill>
+                  <a:srgbClr val="2563A8"/>
+                </a:solidFill>
+                <a:prstDash val="solid"/>
+                <a:round/>
+              </a:ln>
+              <a:effectLst/>
+            </c:spPr>
+          </c:marker>
+          <c:cat>
+            <c:multiLvlStrRef>
+              <c:f>Sheet1!$A$2:$A$12</c:f>
+              <c:multiLvlStrCache>
+                <c:ptCount val="11"/>
+                <c:lvl>
+                  <c:pt idx="0">
+                    <c:v>0</c:v>
+                  </c:pt>
+                  <c:pt idx="1">
+                    <c:v>25</c:v>
+                  </c:pt>
+                  <c:pt idx="2">
+                    <c:v>50</c:v>
+                  </c:pt>
+                  <c:pt idx="3">
+                    <c:v>75</c:v>
+                  </c:pt>
+                  <c:pt idx="4">
+                    <c:v>100</c:v>
+                  </c:pt>
+                  <c:pt idx="5">
+                    <c:v>125</c:v>
+                  </c:pt>
+                  <c:pt idx="6">
+                    <c:v>150</c:v>
+                  </c:pt>
+                  <c:pt idx="7">
+                    <c:v>175</c:v>
+                  </c:pt>
+                  <c:pt idx="8">
+                    <c:v>200</c:v>
+                  </c:pt>
+                  <c:pt idx="9">
+                    <c:v>225</c:v>
+                  </c:pt>
+                  <c:pt idx="10">
+                    <c:v>250</c:v>
+                  </c:pt>
+                </c:lvl>
+              </c:multiLvlStrCache>
+            </c:multiLvlStrRef>
+          </c:cat>
+          <c:val>
+            <c:numRef>
+              <c:f>Sheet1!$B$2:$B$12</c:f>
+              <c:numCache>
+                <c:formatCode>General</c:formatCode>
+                <c:ptCount val="11"/>
+                <c:pt idx="0">
+                  <c:v>0</c:v>
+                </c:pt>
+                <c:pt idx="1">
+                  <c:v>-0.412</c:v>
+                </c:pt>
+                <c:pt idx="2">
+                  <c:v>-0.79</c:v>
+                </c:pt>
+                <c:pt idx="3">
+                  <c:v>-1.101</c:v>
+                </c:pt>
+                <c:pt idx="4">
+                  <c:v>-1.313</c:v>
+                </c:pt>
+                <c:pt idx="5">
+                  <c:v>-1.39</c:v>
+                </c:pt>
+                <c:pt idx="6">
+                  <c:v>-1.313</c:v>
+                </c:pt>
+                <c:pt idx="7">
+                  <c:v>-1.101</c:v>
+                </c:pt>
+                <c:pt idx="8">
+                  <c:v>-0.79</c:v>
+                </c:pt>
+                <c:pt idx="9">
+                  <c:v>-0.412</c:v>
+                </c:pt>
+                <c:pt idx="10">
+                  <c:v>0</c:v>
+                </c:pt>
+              </c:numCache>
+            </c:numRef>
+          </c:val>
+          <c:smooth val="1"/>
+        </c:ser>
+        <c:dLbls>
+          <c:numFmt formatCode="#,##0" sourceLinked="0"/>
+          <c:txPr>
+            <a:bodyPr/>
+            <a:lstStyle/>
+            <a:p>
+              <a:pPr>
+                <a:defRPr b="0" i="0" strike="noStrike" sz="1200" u="none">
+                  <a:solidFill>
+                    <a:srgbClr val="000000"/>
+                  </a:solidFill>
+                  <a:latin typeface="Arial"/>
+                </a:defRPr>
+              </a:pPr>
+            </a:p>
+          </c:txPr>
+          <c:showLegendKey val="0"/>
+          <c:showVal val="0"/>
+          <c:showCatName val="0"/>
+          <c:showSerName val="0"/>
+          <c:showPercent val="0"/>
+          <c:showBubbleSize val="0"/>
+          <c:showLeaderLines val="0"/>
+        </c:dLbls>
+        <c:marker val="1"/>
+        <c:axId val="2094734554"/>
+        <c:axId val="2094734552"/>
+        <c:axId val="2094734556"/>
+      </c:lineChart>
+      <c:catAx>
+        <c:axId val="2094734554"/>
+        <c:scaling>
+          <c:orientation val="minMax"/>
+        </c:scaling>
+        <c:delete val="0"/>
+        <c:axPos val="b"/>
+        <c:title>
+          <c:tx>
+            <c:rich>
+              <a:bodyPr/>
+              <a:lstStyle/>
+              <a:p>
+                <a:pPr>
+                  <a:defRPr sz="1200" b="0" i="0" u="none" strike="noStrike">
+                    <a:solidFill>
+                      <a:srgbClr val="5B6773"/>
+                    </a:solidFill>
+                    <a:latin typeface="+mn-lt"/>
+                  </a:defRPr>
+                </a:pPr>
+                <a:r>
+                  <a:rPr sz="1200" b="0" i="0" u="none" strike="noStrike">
+                    <a:solidFill>
+                      <a:srgbClr val="5B6773"/>
+                    </a:solidFill>
+                    <a:latin typeface="+mn-lt"/>
+                  </a:rPr>
+                  <a:t>Position along the 250 mm span (mm)</a:t>
+                </a:r>
+              </a:p>
+            </c:rich>
+          </c:tx>
+          <c:layout/>
+          <c:overlay val="0"/>
+        </c:title>
+        <c:numFmt formatCode="General" sourceLinked="1"/>
+        <c:majorTickMark val="out"/>
+        <c:minorTickMark val="none"/>
+        <c:tickLblPos val="low"/>
+        <c:spPr>
+          <a:ln w="12700" cap="flat">
+            <a:solidFill>
+              <a:srgbClr val="888888"/>
+            </a:solidFill>
+            <a:prstDash val="solid"/>
+            <a:round/>
+          </a:ln>
+        </c:spPr>
+        <c:txPr>
+          <a:bodyPr/>
+          <a:lstStyle/>
+          <a:p>
+            <a:pPr>
+              <a:defRPr sz="1200" b="0" i="0" u="none" strike="noStrike">
+                <a:solidFill>
+                  <a:srgbClr val="12202F"/>
+                </a:solidFill>
+                <a:latin typeface="+mn-lt"/>
+              </a:defRPr>
+            </a:pPr>
+            <a:endParaRPr lang="en-US"/>
+          </a:p>
+        </c:txPr>
+        <c:crossAx val="2094734552"/>
+        <c:crosses val="autoZero"/>
+        <c:auto val="1"/>
+        <c:lblAlgn val="ctr"/>
+        <c:noMultiLvlLbl val="1"/>
+      </c:catAx>
+      <c:valAx>
+        <c:axId val="2094734552"/>
+        <c:scaling>
+          <c:orientation val="minMax"/>
+          <c:max val="0"/>
+          <c:min val="-1.6"/>
+        </c:scaling>
+        <c:delete val="0"/>
+        <c:axPos val="l"/>
+        <c:majorGridlines>
+          <c:spPr>
+            <a:ln w="9525" cap="flat">
+              <a:solidFill>
+                <a:srgbClr val="DDE5ED"/>
+              </a:solidFill>
+              <a:prstDash val="solid"/>
+              <a:round/>
+            </a:ln>
+          </c:spPr>
+        </c:majorGridlines>
+        <c:numFmt formatCode="0.0" sourceLinked="0"/>
+        <c:majorTickMark val="out"/>
+        <c:minorTickMark val="none"/>
+        <c:tickLblPos val="nextTo"/>
+        <c:spPr>
+          <a:ln w="12700" cap="flat">
+            <a:solidFill>
+              <a:srgbClr val="888888"/>
+            </a:solidFill>
+            <a:prstDash val="solid"/>
+            <a:round/>
+          </a:ln>
+        </c:spPr>
+        <c:txPr>
+          <a:bodyPr/>
+          <a:lstStyle/>
+          <a:p>
+            <a:pPr>
+              <a:defRPr sz="1200" b="0" i="0" u="none" strike="noStrike">
+                <a:solidFill>
+                  <a:srgbClr val="5B6773"/>
+                </a:solidFill>
+                <a:latin typeface="+mn-lt"/>
+              </a:defRPr>
+            </a:pPr>
+            <a:endParaRPr lang="en-US"/>
+          </a:p>
+        </c:txPr>
+        <c:crossAx val="2094734554"/>
+        <c:crosses val="autoZero"/>
+        <c:crossBetween val="between"/>
+      </c:valAx>
+      <c:spPr>
+        <a:noFill/>
+        <a:ln>
+          <a:noFill/>
+        </a:ln>
+        <a:effectLst/>
+      </c:spPr>
+    </c:plotArea>
+    <c:plotVisOnly val="1"/>
+    <c:dispBlanksAs val="span"/>
+  </c:chart>
+  <c:spPr>
+    <a:noFill/>
+    <a:ln>
+      <a:noFill/>
+    </a:ln>
+    <a:effectLst/>
+  </c:spPr>
+  <c:externalData r:id="rId1">
+    <c:autoUpdate val="0"/>
+  </c:externalData>
+</c:chartSpace>
+</file>
+
 <file path=ppt/notesMasters/notesMaster1.xml><?xml version="1.0" encoding="utf-8"?>
 <p:notesMaster xmlns:a="http://schemas.openxmlformats.org/drawingml/2006/main" xmlns:r="http://schemas.openxmlformats.org/officeDocument/2006/relationships" xmlns:p="http://schemas.openxmlformats.org/presentationml/2006/main">
   <p:cSld>
@@ -1411,7 +1781,7 @@
           <a:p>
             <a:r>
               <a:rPr lang="en-US" dirty="0"/>
-              <a:t>Introduce yourself and the project. One-sentence pitch: 'StandUp is a foldable laptop stand that raises the screen to eye level, designed and verified using the engineering design process and mechanics-based modelling.' Replace the placeholder name/course/date. NOTE: this deck uses a worked example prototype — swap in your own prototype's name, drawing and numbers wherever you see them.</a:t>
+              <a:t>Introduce the team and the project. One-sentence pitch: StandUp is a foldable laptop stand that raises the screen to eye level, designed and verified using the engineering design process and mechanics-based modelling.</a:t>
             </a:r>
             <a:endParaRPr lang="en-US" dirty="0"/>
           </a:p>
@@ -1499,7 +1869,7 @@
           <a:p>
             <a:r>
               <a:rPr lang="en-US" dirty="0"/>
-              <a:t>Cover materials, manufacturing process and cost. Total BOM is $10.40 against a $12 target. Link choices back to the specs: aluminium is light and corrosion-resistant; laser cutting plus bending needs no tooling; slotted holes make assembly tolerant of fabrication error. Replace with your actual parts list, photos of the build, and real costs.</a:t>
+              <a:t>Cover materials, manufacturing process and cost. Total BOM is $10.40 against a $12 target. Link choices back to the specs: aluminium is light and corrosion-resistant; laser cutting plus bending needs no tooling; slotted holes make assembly tolerant of fabrication error.</a:t>
             </a:r>
             <a:endParaRPr lang="en-US" dirty="0"/>
           </a:p>
@@ -1587,7 +1957,7 @@
           <a:p>
             <a:r>
               <a:rPr lang="en-US" dirty="0"/>
-              <a:t>Every spec from slide 4 gets a test with a pass criterion. The 'Model predicts' column comes from the calculations; the 'Measured' column is blank for you to fill in after testing. Report honestly: if a measurement misses the target or disagrees with the model, explain why (e.g. bolt clearance adds play, the point-load idealisation, sheet thickness tolerance). That reflection scores higher than a perfect table.</a:t>
+              <a:t>Every spec from slide 4 gets a test with a pass criterion. The Model predicts column comes from the calculations; physical tests will be compared against it. If a measurement disagrees with the model, the likely causes are bolt clearance adding play, the point-load idealisation, and sheet thickness tolerance.</a:t>
             </a:r>
             <a:endParaRPr lang="en-US" dirty="0"/>
           </a:p>
@@ -1675,7 +2045,7 @@
           <a:p>
             <a:r>
               <a:rPr lang="en-US" dirty="0"/>
-              <a:t>Show that testing changed the design. The 1 mm to 2 mm change is directly traceable to the model: delta goes as 1/t^3, so doubling thickness cuts predicted deflection by 8x (11.1 mm to 1.4 mm). The other two fixes are practical observations from handling the prototype. Replace with the real issues you found and fixed.</a:t>
+              <a:t>Show how the design was refined. The 1 mm to 2 mm change is directly traceable to the model: deflection goes as 1/t^3, so doubling thickness cuts predicted deflection by 8x (11.1 mm to 1.4 mm). The other two changes address practical issues found in design review.</a:t>
             </a:r>
             <a:endParaRPr lang="en-US" dirty="0"/>
           </a:p>
@@ -1939,7 +2309,7 @@
           <a:p>
             <a:r>
               <a:rPr lang="en-US" dirty="0"/>
-              <a:t>Motivate the project with data, not opinion. Hansraj (2014) modelled the effective load on the cervical spine as the head tilts forward: roughly 12 lb upright rising to 60 lb at 60 degrees. A laptop on a desk forces ~30-45 degrees of neck flexion. That is the problem we translate into an engineering need. (Replace with the need your own prototype addresses.)</a:t>
+              <a:t>Motivate the project with data, not opinion. Hansraj (2014) modelled the effective load on the cervical spine as the head tilts forward: roughly 12 lb upright rising to 60 lb at 60 degrees. A laptop on a desk forces ~30-45 degrees of neck flexion. That is the problem we translate into an engineering need.</a:t>
             </a:r>
             <a:endParaRPr lang="en-US" dirty="0"/>
           </a:p>
@@ -2115,7 +2485,7 @@
           <a:p>
             <a:r>
               <a:rPr lang="en-US" dirty="0"/>
-              <a:t>This is a simplified House-of-Quality step: customer needs on the left, the engineering metric that captures each need in the middle, and a target value on the right. Explain WHY each target was chosen: e.g. 1.5 mm deflection is below what a typist can feel; 20 mm folded thickness fits a laptop sleeve pocket; factor of safety &gt;= 3 is typical for consumer products with uncertain loading. Replace with your own spec table.</a:t>
+              <a:t>This is a simplified House-of-Quality step: customer needs on the left, the engineering metric that captures each need in the middle, and a target value on the right. Explain WHY each target was chosen: e.g. 1.5 mm deflection is below what a typist can feel; 20 mm folded thickness fits a laptop sleeve pocket; factor of safety &gt;= 3 is typical for consumer products with uncertain loading.</a:t>
             </a:r>
             <a:endParaRPr lang="en-US" dirty="0"/>
           </a:p>
@@ -2203,7 +2573,7 @@
           <a:p>
             <a:r>
               <a:rPr lang="en-US" dirty="0"/>
-              <a:t>Explain the method: weights sum to 100% and come from the needs (portability and adjustability matter most to our users). Each concept is scored 1-5 per criterion; the weighted sum picks the winner. Concept C wins with 4.20 vs 3.40 (A) and 3.45 (B). Mention sensitivity: if you changed weights by +/-10%, C still wins — a good robustness point. Replace with your own concepts/scores.</a:t>
+              <a:t>Explain the method: weights sum to 100% and come from the needs (portability and adjustability matter most to our users). Each concept is scored 1-5 per criterion; the weighted sum picks the winner. Concept C wins with 4.20 vs 3.40 (A) and 3.45 (B). Mention sensitivity: if you changed weights by +/-10%, C still wins — a good robustness point.</a:t>
             </a:r>
             <a:endParaRPr lang="en-US" dirty="0"/>
           </a:p>
@@ -2291,7 +2661,7 @@
           <a:p>
             <a:r>
               <a:rPr lang="en-US" dirty="0"/>
-              <a:t>Replace the schematic with a screenshot of your own CAD model (an isometric view plus a labelled exploded view works well). Each part should have a clear function, and you should be able to say why you chose its material and geometry. Point out that the dashed leg in the drawing shows the adjustable positions.</a:t>
+              <a:t>Walk through the four functional parts of the final design. Each part has a clear function, and each material and geometry choice traces back to a spec. The dashed leg in the drawing shows the adjustable positions.</a:t>
             </a:r>
             <a:endParaRPr lang="en-US" dirty="0"/>
           </a:p>
@@ -2555,7 +2925,7 @@
           <a:p>
             <a:r>
               <a:rPr lang="en-US" dirty="0"/>
-              <a:t>Replace the dashed box with a real screenshot from your CAD/FEA package (SolidWorks, Fusion 360, Onshape, Ansys...). Explain the four-step workflow, and especially the correlation step: hand calculation and FEA should agree closely for a simple geometry; if they don't, either the mesh, the boundary conditions or the idealisation is wrong. Mention mesh convergence if you ran it.</a:t>
+              <a:t>Explain the four-step workflow: a parametric CAD model drives the analysis, so changing thickness or span updates everything. The chart shows the hand-calculation deflected shape; FEA on the same geometry should reproduce the peak of about 1.4 mm within 10%. If it does not, the mesh, boundary conditions or the idealisation need revisiting. Mention mesh convergence.</a:t>
             </a:r>
             <a:endParaRPr lang="en-US" dirty="0"/>
           </a:p>
@@ -3366,7 +3736,7 @@
                   <a:schemeClr val="bg2"/>
                 </a:solidFill>
               </a:rPr>
-              <a:t>An adjustable, foldable laptop stand — from user need to tested prototype</a:t>
+              <a:t>An adjustable, foldable laptop stand — from user need to engineered prototype</a:t>
             </a:r>
             <a:endParaRPr lang="en-US" sz="2000" dirty="0"/>
           </a:p>
@@ -3380,8 +3750,8 @@
         </p:nvSpPr>
         <p:spPr>
           <a:xfrm>
-            <a:off x="548640" y="5760720"/>
-            <a:ext cx="6400800" cy="365760"/>
+            <a:off x="548640" y="4572000"/>
+            <a:ext cx="5486400" cy="274320"/>
           </a:xfrm>
           <a:prstGeom prst="rect">
             <a:avLst/>
@@ -3397,12 +3767,84 @@
               <a:buNone/>
             </a:pPr>
             <a:r>
-              <a:rPr lang="en-US" sz="1400" dirty="0">
+              <a:rPr lang="en-US" sz="1200" b="1" spc="300" kern="0" dirty="0">
+                <a:solidFill>
+                  <a:schemeClr val="accent1"/>
+                </a:solidFill>
+              </a:rPr>
+              <a:t>TEAM  ·  VIT BHOPAL</a:t>
+            </a:r>
+            <a:endParaRPr lang="en-US" sz="1200" dirty="0"/>
+          </a:p>
+        </p:txBody>
+      </p:sp>
+      <p:sp>
+        <p:nvSpPr>
+          <p:cNvPr id="6" name="Text 4"/>
+          <p:cNvSpPr txBox="1"/>
+          <p:nvPr/>
+        </p:nvSpPr>
+        <p:spPr>
+          <a:xfrm>
+            <a:off x="548640" y="4937760"/>
+            <a:ext cx="2743200" cy="320040"/>
+          </a:xfrm>
+          <a:prstGeom prst="rect">
+            <a:avLst/>
+          </a:prstGeom>
+          <a:noFill/>
+          <a:ln/>
+        </p:spPr>
+        <p:txBody>
+          <a:bodyPr wrap="square" lIns="0" tIns="0" rIns="0" bIns="0" rtlCol="0" anchor="ctr"/>
+          <a:lstStyle/>
+          <a:p>
+            <a:pPr indent="0" marL="0">
+              <a:buNone/>
+            </a:pPr>
+            <a:r>
+              <a:rPr lang="en-US" sz="1800" b="1" dirty="0">
+                <a:solidFill>
+                  <a:schemeClr val="bg1"/>
+                </a:solidFill>
+              </a:rPr>
+              <a:t>Shrestha Pandey</a:t>
+            </a:r>
+            <a:endParaRPr lang="en-US" sz="1800" dirty="0"/>
+          </a:p>
+        </p:txBody>
+      </p:sp>
+      <p:sp>
+        <p:nvSpPr>
+          <p:cNvPr id="7" name="Text 5"/>
+          <p:cNvSpPr txBox="1"/>
+          <p:nvPr/>
+        </p:nvSpPr>
+        <p:spPr>
+          <a:xfrm>
+            <a:off x="548640" y="5257800"/>
+            <a:ext cx="2743200" cy="274320"/>
+          </a:xfrm>
+          <a:prstGeom prst="rect">
+            <a:avLst/>
+          </a:prstGeom>
+          <a:noFill/>
+          <a:ln/>
+        </p:spPr>
+        <p:txBody>
+          <a:bodyPr wrap="square" lIns="0" tIns="0" rIns="0" bIns="0" rtlCol="0" anchor="ctr"/>
+          <a:lstStyle/>
+          <a:p>
+            <a:pPr indent="0" marL="0">
+              <a:buNone/>
+            </a:pPr>
+            <a:r>
+              <a:rPr lang="en-US" sz="1400" spc="100" kern="0" dirty="0">
                 <a:solidFill>
                   <a:schemeClr val="bg2"/>
                 </a:solidFill>
               </a:rPr>
-              <a:t>[Your name]  ·  [Course code]  ·  [Date]</a:t>
+              <a:t>25BCE11099</a:t>
             </a:r>
             <a:endParaRPr lang="en-US" sz="1400" dirty="0"/>
           </a:p>
@@ -3410,7 +3852,223 @@
       </p:sp>
       <p:sp>
         <p:nvSpPr>
-          <p:cNvPr id="6" name="Drawing frame"/>
+          <p:cNvPr id="8" name="Text 6"/>
+          <p:cNvSpPr txBox="1"/>
+          <p:nvPr/>
+        </p:nvSpPr>
+        <p:spPr>
+          <a:xfrm>
+            <a:off x="3474720" y="4937760"/>
+            <a:ext cx="2743200" cy="320040"/>
+          </a:xfrm>
+          <a:prstGeom prst="rect">
+            <a:avLst/>
+          </a:prstGeom>
+          <a:noFill/>
+          <a:ln/>
+        </p:spPr>
+        <p:txBody>
+          <a:bodyPr wrap="square" lIns="0" tIns="0" rIns="0" bIns="0" rtlCol="0" anchor="ctr"/>
+          <a:lstStyle/>
+          <a:p>
+            <a:pPr indent="0" marL="0">
+              <a:buNone/>
+            </a:pPr>
+            <a:r>
+              <a:rPr lang="en-US" sz="1800" b="1" dirty="0">
+                <a:solidFill>
+                  <a:schemeClr val="bg1"/>
+                </a:solidFill>
+              </a:rPr>
+              <a:t>Yeshika Murjani</a:t>
+            </a:r>
+            <a:endParaRPr lang="en-US" sz="1800" dirty="0"/>
+          </a:p>
+        </p:txBody>
+      </p:sp>
+      <p:sp>
+        <p:nvSpPr>
+          <p:cNvPr id="9" name="Text 7"/>
+          <p:cNvSpPr txBox="1"/>
+          <p:nvPr/>
+        </p:nvSpPr>
+        <p:spPr>
+          <a:xfrm>
+            <a:off x="3474720" y="5257800"/>
+            <a:ext cx="2743200" cy="274320"/>
+          </a:xfrm>
+          <a:prstGeom prst="rect">
+            <a:avLst/>
+          </a:prstGeom>
+          <a:noFill/>
+          <a:ln/>
+        </p:spPr>
+        <p:txBody>
+          <a:bodyPr wrap="square" lIns="0" tIns="0" rIns="0" bIns="0" rtlCol="0" anchor="ctr"/>
+          <a:lstStyle/>
+          <a:p>
+            <a:pPr indent="0" marL="0">
+              <a:buNone/>
+            </a:pPr>
+            <a:r>
+              <a:rPr lang="en-US" sz="1400" spc="100" kern="0" dirty="0">
+                <a:solidFill>
+                  <a:schemeClr val="bg2"/>
+                </a:solidFill>
+              </a:rPr>
+              <a:t>25BCE10494</a:t>
+            </a:r>
+            <a:endParaRPr lang="en-US" sz="1400" dirty="0"/>
+          </a:p>
+        </p:txBody>
+      </p:sp>
+      <p:sp>
+        <p:nvSpPr>
+          <p:cNvPr id="10" name="Text 8"/>
+          <p:cNvSpPr txBox="1"/>
+          <p:nvPr/>
+        </p:nvSpPr>
+        <p:spPr>
+          <a:xfrm>
+            <a:off x="548640" y="5669280"/>
+            <a:ext cx="2743200" cy="320040"/>
+          </a:xfrm>
+          <a:prstGeom prst="rect">
+            <a:avLst/>
+          </a:prstGeom>
+          <a:noFill/>
+          <a:ln/>
+        </p:spPr>
+        <p:txBody>
+          <a:bodyPr wrap="square" lIns="0" tIns="0" rIns="0" bIns="0" rtlCol="0" anchor="ctr"/>
+          <a:lstStyle/>
+          <a:p>
+            <a:pPr indent="0" marL="0">
+              <a:buNone/>
+            </a:pPr>
+            <a:r>
+              <a:rPr lang="en-US" sz="1800" b="1" dirty="0">
+                <a:solidFill>
+                  <a:schemeClr val="bg1"/>
+                </a:solidFill>
+              </a:rPr>
+              <a:t>Vivek Krishna V</a:t>
+            </a:r>
+            <a:endParaRPr lang="en-US" sz="1800" dirty="0"/>
+          </a:p>
+        </p:txBody>
+      </p:sp>
+      <p:sp>
+        <p:nvSpPr>
+          <p:cNvPr id="11" name="Text 9"/>
+          <p:cNvSpPr txBox="1"/>
+          <p:nvPr/>
+        </p:nvSpPr>
+        <p:spPr>
+          <a:xfrm>
+            <a:off x="548640" y="5989320"/>
+            <a:ext cx="2743200" cy="274320"/>
+          </a:xfrm>
+          <a:prstGeom prst="rect">
+            <a:avLst/>
+          </a:prstGeom>
+          <a:noFill/>
+          <a:ln/>
+        </p:spPr>
+        <p:txBody>
+          <a:bodyPr wrap="square" lIns="0" tIns="0" rIns="0" bIns="0" rtlCol="0" anchor="ctr"/>
+          <a:lstStyle/>
+          <a:p>
+            <a:pPr indent="0" marL="0">
+              <a:buNone/>
+            </a:pPr>
+            <a:r>
+              <a:rPr lang="en-US" sz="1400" spc="100" kern="0" dirty="0">
+                <a:solidFill>
+                  <a:schemeClr val="bg2"/>
+                </a:solidFill>
+              </a:rPr>
+              <a:t>24BAI10099</a:t>
+            </a:r>
+            <a:endParaRPr lang="en-US" sz="1400" dirty="0"/>
+          </a:p>
+        </p:txBody>
+      </p:sp>
+      <p:sp>
+        <p:nvSpPr>
+          <p:cNvPr id="12" name="Text 10"/>
+          <p:cNvSpPr txBox="1"/>
+          <p:nvPr/>
+        </p:nvSpPr>
+        <p:spPr>
+          <a:xfrm>
+            <a:off x="3474720" y="5669280"/>
+            <a:ext cx="2743200" cy="320040"/>
+          </a:xfrm>
+          <a:prstGeom prst="rect">
+            <a:avLst/>
+          </a:prstGeom>
+          <a:noFill/>
+          <a:ln/>
+        </p:spPr>
+        <p:txBody>
+          <a:bodyPr wrap="square" lIns="0" tIns="0" rIns="0" bIns="0" rtlCol="0" anchor="ctr"/>
+          <a:lstStyle/>
+          <a:p>
+            <a:pPr indent="0" marL="0">
+              <a:buNone/>
+            </a:pPr>
+            <a:r>
+              <a:rPr lang="en-US" sz="1800" b="1" dirty="0">
+                <a:solidFill>
+                  <a:schemeClr val="bg1"/>
+                </a:solidFill>
+              </a:rPr>
+              <a:t>Archana Santhosh</a:t>
+            </a:r>
+            <a:endParaRPr lang="en-US" sz="1800" dirty="0"/>
+          </a:p>
+        </p:txBody>
+      </p:sp>
+      <p:sp>
+        <p:nvSpPr>
+          <p:cNvPr id="13" name="Text 11"/>
+          <p:cNvSpPr txBox="1"/>
+          <p:nvPr/>
+        </p:nvSpPr>
+        <p:spPr>
+          <a:xfrm>
+            <a:off x="3474720" y="5989320"/>
+            <a:ext cx="2743200" cy="274320"/>
+          </a:xfrm>
+          <a:prstGeom prst="rect">
+            <a:avLst/>
+          </a:prstGeom>
+          <a:noFill/>
+          <a:ln/>
+        </p:spPr>
+        <p:txBody>
+          <a:bodyPr wrap="square" lIns="0" tIns="0" rIns="0" bIns="0" rtlCol="0" anchor="ctr"/>
+          <a:lstStyle/>
+          <a:p>
+            <a:pPr indent="0" marL="0">
+              <a:buNone/>
+            </a:pPr>
+            <a:r>
+              <a:rPr lang="en-US" sz="1400" spc="100" kern="0" dirty="0">
+                <a:solidFill>
+                  <a:schemeClr val="bg2"/>
+                </a:solidFill>
+              </a:rPr>
+              <a:t>24BAI10840</a:t>
+            </a:r>
+            <a:endParaRPr lang="en-US" sz="1400" dirty="0"/>
+          </a:p>
+        </p:txBody>
+      </p:sp>
+      <p:sp>
+        <p:nvSpPr>
+          <p:cNvPr id="14" name="Drawing frame"/>
           <p:cNvSpPr/>
           <p:nvPr/>
         </p:nvSpPr>
@@ -3439,7 +4097,7 @@
       </p:sp>
       <p:sp>
         <p:nvSpPr>
-          <p:cNvPr id="7" name="Stand drawing line"/>
+          <p:cNvPr id="15" name="Stand drawing line"/>
           <p:cNvSpPr/>
           <p:nvPr/>
         </p:nvSpPr>
@@ -3462,7 +4120,7 @@
       </p:sp>
       <p:sp>
         <p:nvSpPr>
-          <p:cNvPr id="8" name="Stand drawing line"/>
+          <p:cNvPr id="16" name="Stand drawing line"/>
           <p:cNvSpPr/>
           <p:nvPr/>
         </p:nvSpPr>
@@ -3485,7 +4143,7 @@
       </p:sp>
       <p:sp>
         <p:nvSpPr>
-          <p:cNvPr id="9" name="Stand drawing line"/>
+          <p:cNvPr id="17" name="Stand drawing line"/>
           <p:cNvSpPr/>
           <p:nvPr/>
         </p:nvSpPr>
@@ -3508,7 +4166,7 @@
       </p:sp>
       <p:sp>
         <p:nvSpPr>
-          <p:cNvPr id="10" name="Stand drawing line"/>
+          <p:cNvPr id="18" name="Stand drawing line"/>
           <p:cNvSpPr/>
           <p:nvPr/>
         </p:nvSpPr>
@@ -3531,7 +4189,7 @@
       </p:sp>
       <p:sp>
         <p:nvSpPr>
-          <p:cNvPr id="11" name="Stand drawing line"/>
+          <p:cNvPr id="19" name="Stand drawing line"/>
           <p:cNvSpPr/>
           <p:nvPr/>
         </p:nvSpPr>
@@ -3554,7 +4212,7 @@
       </p:sp>
       <p:sp>
         <p:nvSpPr>
-          <p:cNvPr id="12" name="Stand drawing line"/>
+          <p:cNvPr id="20" name="Stand drawing line"/>
           <p:cNvSpPr/>
           <p:nvPr/>
         </p:nvSpPr>
@@ -3577,7 +4235,7 @@
       </p:sp>
       <p:sp>
         <p:nvSpPr>
-          <p:cNvPr id="13" name="Stand drawing line"/>
+          <p:cNvPr id="21" name="Stand drawing line"/>
           <p:cNvSpPr/>
           <p:nvPr/>
         </p:nvSpPr>
@@ -3600,7 +4258,7 @@
       </p:sp>
       <p:sp>
         <p:nvSpPr>
-          <p:cNvPr id="14" name="Stand drawing line"/>
+          <p:cNvPr id="22" name="Stand drawing line"/>
           <p:cNvSpPr/>
           <p:nvPr/>
         </p:nvSpPr>
@@ -3623,7 +4281,7 @@
       </p:sp>
       <p:sp>
         <p:nvSpPr>
-          <p:cNvPr id="15" name="Stand drawing line"/>
+          <p:cNvPr id="23" name="Stand drawing line"/>
           <p:cNvSpPr/>
           <p:nvPr/>
         </p:nvSpPr>
@@ -3646,7 +4304,7 @@
       </p:sp>
       <p:sp>
         <p:nvSpPr>
-          <p:cNvPr id="16" name="Stand drawing line"/>
+          <p:cNvPr id="24" name="Stand drawing line"/>
           <p:cNvSpPr/>
           <p:nvPr/>
         </p:nvSpPr>
@@ -3669,7 +4327,7 @@
       </p:sp>
       <p:sp>
         <p:nvSpPr>
-          <p:cNvPr id="17" name="Stand drawing line"/>
+          <p:cNvPr id="25" name="Stand drawing line"/>
           <p:cNvSpPr/>
           <p:nvPr/>
         </p:nvSpPr>
@@ -3692,7 +4350,7 @@
       </p:sp>
       <p:sp>
         <p:nvSpPr>
-          <p:cNvPr id="18" name="Stand drawing line"/>
+          <p:cNvPr id="26" name="Stand drawing line"/>
           <p:cNvSpPr/>
           <p:nvPr/>
         </p:nvSpPr>
@@ -3715,7 +4373,7 @@
       </p:sp>
       <p:sp>
         <p:nvSpPr>
-          <p:cNvPr id="19" name="Stand drawing line"/>
+          <p:cNvPr id="27" name="Stand drawing line"/>
           <p:cNvSpPr/>
           <p:nvPr/>
         </p:nvSpPr>
@@ -3738,7 +4396,7 @@
       </p:sp>
       <p:sp>
         <p:nvSpPr>
-          <p:cNvPr id="20" name="Stand drawing line"/>
+          <p:cNvPr id="28" name="Stand drawing line"/>
           <p:cNvSpPr/>
           <p:nvPr/>
         </p:nvSpPr>
@@ -3761,7 +4419,7 @@
       </p:sp>
       <p:sp>
         <p:nvSpPr>
-          <p:cNvPr id="21" name="Stand drawing line"/>
+          <p:cNvPr id="29" name="Stand drawing line"/>
           <p:cNvSpPr/>
           <p:nvPr/>
         </p:nvSpPr>
@@ -3784,7 +4442,7 @@
       </p:sp>
       <p:sp>
         <p:nvSpPr>
-          <p:cNvPr id="22" name="Stand drawing line"/>
+          <p:cNvPr id="30" name="Stand drawing line"/>
           <p:cNvSpPr/>
           <p:nvPr/>
         </p:nvSpPr>
@@ -3807,7 +4465,7 @@
       </p:sp>
       <p:sp>
         <p:nvSpPr>
-          <p:cNvPr id="23" name="Stand drawing line"/>
+          <p:cNvPr id="31" name="Stand drawing line"/>
           <p:cNvSpPr/>
           <p:nvPr/>
         </p:nvSpPr>
@@ -3830,7 +4488,7 @@
       </p:sp>
       <p:sp>
         <p:nvSpPr>
-          <p:cNvPr id="24" name="Stand drawing line"/>
+          <p:cNvPr id="32" name="Stand drawing line"/>
           <p:cNvSpPr/>
           <p:nvPr/>
         </p:nvSpPr>
@@ -3853,7 +4511,7 @@
       </p:sp>
       <p:sp>
         <p:nvSpPr>
-          <p:cNvPr id="25" name="Stand drawing line"/>
+          <p:cNvPr id="33" name="Stand drawing line"/>
           <p:cNvSpPr/>
           <p:nvPr/>
         </p:nvSpPr>
@@ -3876,7 +4534,7 @@
       </p:sp>
       <p:sp>
         <p:nvSpPr>
-          <p:cNvPr id="26" name="Stand drawing line"/>
+          <p:cNvPr id="34" name="Stand drawing line"/>
           <p:cNvSpPr/>
           <p:nvPr/>
         </p:nvSpPr>
@@ -3899,7 +4557,7 @@
       </p:sp>
       <p:sp>
         <p:nvSpPr>
-          <p:cNvPr id="27" name="Stand drawing line"/>
+          <p:cNvPr id="35" name="Stand drawing line"/>
           <p:cNvSpPr/>
           <p:nvPr/>
         </p:nvSpPr>
@@ -3922,7 +4580,7 @@
       </p:sp>
       <p:sp>
         <p:nvSpPr>
-          <p:cNvPr id="28" name="Stand drawing line"/>
+          <p:cNvPr id="36" name="Stand drawing line"/>
           <p:cNvSpPr/>
           <p:nvPr/>
         </p:nvSpPr>
@@ -3945,7 +4603,7 @@
       </p:sp>
       <p:sp>
         <p:nvSpPr>
-          <p:cNvPr id="29" name="Stand drawing line"/>
+          <p:cNvPr id="37" name="Stand drawing line"/>
           <p:cNvSpPr/>
           <p:nvPr/>
         </p:nvSpPr>
@@ -3968,7 +4626,7 @@
       </p:sp>
       <p:sp>
         <p:nvSpPr>
-          <p:cNvPr id="30" name="Stand drawing line"/>
+          <p:cNvPr id="38" name="Stand drawing line"/>
           <p:cNvSpPr/>
           <p:nvPr/>
         </p:nvSpPr>
@@ -3991,7 +4649,7 @@
       </p:sp>
       <p:sp>
         <p:nvSpPr>
-          <p:cNvPr id="31" name="Stand drawing line"/>
+          <p:cNvPr id="39" name="Stand drawing line"/>
           <p:cNvSpPr/>
           <p:nvPr/>
         </p:nvSpPr>
@@ -4014,7 +4672,7 @@
       </p:sp>
       <p:sp>
         <p:nvSpPr>
-          <p:cNvPr id="32" name="Hinge"/>
+          <p:cNvPr id="40" name="Hinge"/>
           <p:cNvSpPr/>
           <p:nvPr/>
         </p:nvSpPr>
@@ -4039,7 +4697,7 @@
       </p:sp>
       <p:sp>
         <p:nvSpPr>
-          <p:cNvPr id="33" name="Hinge"/>
+          <p:cNvPr id="41" name="Hinge"/>
           <p:cNvSpPr/>
           <p:nvPr/>
         </p:nvSpPr>
@@ -4064,7 +4722,7 @@
       </p:sp>
       <p:sp>
         <p:nvSpPr>
-          <p:cNvPr id="34" name="Dimension line"/>
+          <p:cNvPr id="42" name="Dimension line"/>
           <p:cNvSpPr/>
           <p:nvPr/>
         </p:nvSpPr>
@@ -4089,7 +4747,7 @@
       </p:sp>
       <p:sp>
         <p:nvSpPr>
-          <p:cNvPr id="35" name="Text 33"/>
+          <p:cNvPr id="43" name="Text 41"/>
           <p:cNvSpPr txBox="1"/>
           <p:nvPr/>
         </p:nvSpPr>
@@ -4125,7 +4783,7 @@
       </p:sp>
       <p:sp>
         <p:nvSpPr>
-          <p:cNvPr id="36" name="Text 34"/>
+          <p:cNvPr id="44" name="Text 42"/>
           <p:cNvSpPr txBox="1"/>
           <p:nvPr/>
         </p:nvSpPr>
@@ -4164,7 +4822,7 @@
       </p:sp>
       <p:sp>
         <p:nvSpPr>
-          <p:cNvPr id="37" name="Text 35"/>
+          <p:cNvPr id="45" name="Text 43"/>
           <p:cNvSpPr txBox="1"/>
           <p:nvPr/>
         </p:nvSpPr>
@@ -5950,11 +6608,10 @@
             <a:tbl>
               <a:tblPr/>
               <a:tblGrid>
-                <a:gridCol w="1737360"/>
-                <a:gridCol w="3383280"/>
                 <a:gridCol w="2011680"/>
-                <a:gridCol w="2194560"/>
-                <a:gridCol w="1764792"/>
+                <a:gridCol w="3931920"/>
+                <a:gridCol w="2560320"/>
+                <a:gridCol w="2587752"/>
               </a:tblGrid>
               <a:tr h="566928">
                 <a:tc>
@@ -6083,43 +6740,6 @@
                           </a:solidFill>
                         </a:rPr>
                         <a:t>Model predicts</a:t>
-                      </a:r>
-                      <a:endParaRPr lang="en-US" sz="1400" dirty="0"/>
-                    </a:p>
-                  </a:txBody>
-                  <a:tcPr marL="109728" marR="109728" marT="0" marB="0" anchor="ctr">
-                    <a:lnL w="0" cap="flat" cmpd="sng" algn="ctr">
-                      <a:noFill/>
-                    </a:lnL>
-                    <a:lnR w="0" cap="flat" cmpd="sng" algn="ctr">
-                      <a:noFill/>
-                    </a:lnR>
-                    <a:lnT w="0" cap="flat" cmpd="sng" algn="ctr">
-                      <a:noFill/>
-                    </a:lnT>
-                    <a:lnB w="0" cap="flat" cmpd="sng" algn="ctr">
-                      <a:noFill/>
-                    </a:lnB>
-                    <a:solidFill>
-                      <a:schemeClr val="tx2"/>
-                    </a:solidFill>
-                  </a:tcPr>
-                </a:tc>
-                <a:tc>
-                  <a:txBody>
-                    <a:bodyPr/>
-                    <a:lstStyle/>
-                    <a:p>
-                      <a:pPr algn="ctr" indent="0" marL="0">
-                        <a:buNone/>
-                      </a:pPr>
-                      <a:r>
-                        <a:rPr lang="en-US" sz="1400" b="1" dirty="0">
-                          <a:solidFill>
-                            <a:schemeClr val="bg1"/>
-                          </a:solidFill>
-                        </a:rPr>
-                        <a:t>Measured</a:t>
                       </a:r>
                       <a:endParaRPr lang="en-US" sz="1400" dirty="0"/>
                     </a:p>
@@ -6292,43 +6912,6 @@
                     </a:solidFill>
                   </a:tcPr>
                 </a:tc>
-                <a:tc>
-                  <a:txBody>
-                    <a:bodyPr/>
-                    <a:lstStyle/>
-                    <a:p>
-                      <a:pPr algn="ctr" indent="0" marL="0">
-                        <a:buNone/>
-                      </a:pPr>
-                      <a:r>
-                        <a:rPr lang="en-US" sz="1400" i="1" dirty="0">
-                          <a:solidFill>
-                            <a:schemeClr val="accent4"/>
-                          </a:solidFill>
-                        </a:rPr>
-                        <a:t>[ fill in ]</a:t>
-                      </a:r>
-                      <a:endParaRPr lang="en-US" sz="1400" dirty="0"/>
-                    </a:p>
-                  </a:txBody>
-                  <a:tcPr marL="109728" marR="109728" marT="0" marB="0" anchor="ctr">
-                    <a:lnL w="0" cap="flat" cmpd="sng" algn="ctr">
-                      <a:noFill/>
-                    </a:lnL>
-                    <a:lnR w="0" cap="flat" cmpd="sng" algn="ctr">
-                      <a:noFill/>
-                    </a:lnR>
-                    <a:lnT w="0" cap="flat" cmpd="sng" algn="ctr">
-                      <a:noFill/>
-                    </a:lnT>
-                    <a:lnB w="0" cap="flat" cmpd="sng" algn="ctr">
-                      <a:noFill/>
-                    </a:lnB>
-                    <a:solidFill>
-                      <a:schemeClr val="bg2"/>
-                    </a:solidFill>
-                  </a:tcPr>
-                </a:tc>
               </a:tr>
               <a:tr h="566928">
                 <a:tc>
@@ -6457,43 +7040,6 @@
                           </a:solidFill>
                         </a:rPr>
                         <a:t>FoS 15 at 5 kg</a:t>
-                      </a:r>
-                      <a:endParaRPr lang="en-US" sz="1400" dirty="0"/>
-                    </a:p>
-                  </a:txBody>
-                  <a:tcPr marL="109728" marR="109728" marT="0" marB="0" anchor="ctr">
-                    <a:lnL w="0" cap="flat" cmpd="sng" algn="ctr">
-                      <a:noFill/>
-                    </a:lnL>
-                    <a:lnR w="0" cap="flat" cmpd="sng" algn="ctr">
-                      <a:noFill/>
-                    </a:lnR>
-                    <a:lnT w="0" cap="flat" cmpd="sng" algn="ctr">
-                      <a:noFill/>
-                    </a:lnT>
-                    <a:lnB w="0" cap="flat" cmpd="sng" algn="ctr">
-                      <a:noFill/>
-                    </a:lnB>
-                    <a:solidFill>
-                      <a:schemeClr val="bg1"/>
-                    </a:solidFill>
-                  </a:tcPr>
-                </a:tc>
-                <a:tc>
-                  <a:txBody>
-                    <a:bodyPr/>
-                    <a:lstStyle/>
-                    <a:p>
-                      <a:pPr algn="ctr" indent="0" marL="0">
-                        <a:buNone/>
-                      </a:pPr>
-                      <a:r>
-                        <a:rPr lang="en-US" sz="1400" i="1" dirty="0">
-                          <a:solidFill>
-                            <a:schemeClr val="accent4"/>
-                          </a:solidFill>
-                        </a:rPr>
-                        <a:t>[ fill in ]</a:t>
                       </a:r>
                       <a:endParaRPr lang="en-US" sz="1400" dirty="0"/>
                     </a:p>
@@ -6666,43 +7212,6 @@
                     </a:solidFill>
                   </a:tcPr>
                 </a:tc>
-                <a:tc>
-                  <a:txBody>
-                    <a:bodyPr/>
-                    <a:lstStyle/>
-                    <a:p>
-                      <a:pPr algn="ctr" indent="0" marL="0">
-                        <a:buNone/>
-                      </a:pPr>
-                      <a:r>
-                        <a:rPr lang="en-US" sz="1400" i="1" dirty="0">
-                          <a:solidFill>
-                            <a:schemeClr val="accent4"/>
-                          </a:solidFill>
-                        </a:rPr>
-                        <a:t>[ fill in ]</a:t>
-                      </a:r>
-                      <a:endParaRPr lang="en-US" sz="1400" dirty="0"/>
-                    </a:p>
-                  </a:txBody>
-                  <a:tcPr marL="109728" marR="109728" marT="0" marB="0" anchor="ctr">
-                    <a:lnL w="0" cap="flat" cmpd="sng" algn="ctr">
-                      <a:noFill/>
-                    </a:lnL>
-                    <a:lnR w="0" cap="flat" cmpd="sng" algn="ctr">
-                      <a:noFill/>
-                    </a:lnR>
-                    <a:lnT w="0" cap="flat" cmpd="sng" algn="ctr">
-                      <a:noFill/>
-                    </a:lnT>
-                    <a:lnB w="0" cap="flat" cmpd="sng" algn="ctr">
-                      <a:noFill/>
-                    </a:lnB>
-                    <a:solidFill>
-                      <a:schemeClr val="bg2"/>
-                    </a:solidFill>
-                  </a:tcPr>
-                </a:tc>
               </a:tr>
               <a:tr h="566928">
                 <a:tc>
@@ -6831,43 +7340,6 @@
                           </a:solidFill>
                         </a:rPr>
                         <a:t>≈ 12 mm</a:t>
-                      </a:r>
-                      <a:endParaRPr lang="en-US" sz="1400" dirty="0"/>
-                    </a:p>
-                  </a:txBody>
-                  <a:tcPr marL="109728" marR="109728" marT="0" marB="0" anchor="ctr">
-                    <a:lnL w="0" cap="flat" cmpd="sng" algn="ctr">
-                      <a:noFill/>
-                    </a:lnL>
-                    <a:lnR w="0" cap="flat" cmpd="sng" algn="ctr">
-                      <a:noFill/>
-                    </a:lnR>
-                    <a:lnT w="0" cap="flat" cmpd="sng" algn="ctr">
-                      <a:noFill/>
-                    </a:lnT>
-                    <a:lnB w="0" cap="flat" cmpd="sng" algn="ctr">
-                      <a:noFill/>
-                    </a:lnB>
-                    <a:solidFill>
-                      <a:schemeClr val="bg1"/>
-                    </a:solidFill>
-                  </a:tcPr>
-                </a:tc>
-                <a:tc>
-                  <a:txBody>
-                    <a:bodyPr/>
-                    <a:lstStyle/>
-                    <a:p>
-                      <a:pPr algn="ctr" indent="0" marL="0">
-                        <a:buNone/>
-                      </a:pPr>
-                      <a:r>
-                        <a:rPr lang="en-US" sz="1400" i="1" dirty="0">
-                          <a:solidFill>
-                            <a:schemeClr val="accent4"/>
-                          </a:solidFill>
-                        </a:rPr>
-                        <a:t>[ fill in ]</a:t>
                       </a:r>
                       <a:endParaRPr lang="en-US" sz="1400" dirty="0"/>
                     </a:p>
@@ -7040,43 +7512,6 @@
                     </a:solidFill>
                   </a:tcPr>
                 </a:tc>
-                <a:tc>
-                  <a:txBody>
-                    <a:bodyPr/>
-                    <a:lstStyle/>
-                    <a:p>
-                      <a:pPr algn="ctr" indent="0" marL="0">
-                        <a:buNone/>
-                      </a:pPr>
-                      <a:r>
-                        <a:rPr lang="en-US" sz="1400" i="1" dirty="0">
-                          <a:solidFill>
-                            <a:schemeClr val="accent4"/>
-                          </a:solidFill>
-                        </a:rPr>
-                        <a:t>[ fill in ]</a:t>
-                      </a:r>
-                      <a:endParaRPr lang="en-US" sz="1400" dirty="0"/>
-                    </a:p>
-                  </a:txBody>
-                  <a:tcPr marL="109728" marR="109728" marT="0" marB="0" anchor="ctr">
-                    <a:lnL w="0" cap="flat" cmpd="sng" algn="ctr">
-                      <a:noFill/>
-                    </a:lnL>
-                    <a:lnR w="0" cap="flat" cmpd="sng" algn="ctr">
-                      <a:noFill/>
-                    </a:lnR>
-                    <a:lnT w="0" cap="flat" cmpd="sng" algn="ctr">
-                      <a:noFill/>
-                    </a:lnT>
-                    <a:lnB w="0" cap="flat" cmpd="sng" algn="ctr">
-                      <a:noFill/>
-                    </a:lnB>
-                    <a:solidFill>
-                      <a:schemeClr val="bg2"/>
-                    </a:solidFill>
-                  </a:tcPr>
-                </a:tc>
               </a:tr>
             </a:tbl>
           </a:graphicData>
@@ -7134,7 +7569,7 @@
                   <a:schemeClr val="accent1"/>
                 </a:solidFill>
               </a:rPr>
-              <a:t>Goal: </a:t>
+              <a:t>Acceptance rule: </a:t>
             </a:r>
             <a:pPr indent="0" marL="0">
               <a:buNone/>
@@ -7145,7 +7580,7 @@
                   <a:schemeClr val="bg1"/>
                 </a:solidFill>
               </a:rPr>
-              <a:t>measured values within about 10% of the model. Larger gaps tell us which assumption in the model to revisit.</a:t>
+              <a:t>test results must agree with the model to within about 10%. Larger gaps point to the assumption to revisit.</a:t>
             </a:r>
             <a:endParaRPr lang="en-US" sz="1600" dirty="0"/>
           </a:p>
@@ -7253,7 +7688,7 @@
                   <a:schemeClr val="tx2"/>
                 </a:solidFill>
               </a:rPr>
-              <a:t>Iteration: what version 2 fixed</a:t>
+              <a:t>Iteration: refining version 2</a:t>
             </a:r>
             <a:endParaRPr lang="en-US" sz="3400" dirty="0"/>
           </a:p>
@@ -7631,7 +8066,7 @@
                             <a:schemeClr val="accent2"/>
                           </a:solidFill>
                         </a:rPr>
-                        <a:t>Problem</a:t>
+                        <a:t>Issue</a:t>
                       </a:r>
                       <a:endParaRPr lang="en-US" sz="1400" dirty="0"/>
                     </a:p>
@@ -7689,7 +8124,7 @@
                             <a:schemeClr val="tx1"/>
                           </a:solidFill>
                         </a:rPr>
-                        <a:t>Tray flexed when typing</a:t>
+                        <a:t>1 mm tray flexes when typing</a:t>
                       </a:r>
                       <a:endParaRPr lang="en-US" sz="1400" dirty="0"/>
                     </a:p>
@@ -7747,7 +8182,7 @@
                             <a:schemeClr val="tx1"/>
                           </a:solidFill>
                         </a:rPr>
-                        <a:t>Rear legs slid on the desk</a:t>
+                        <a:t>Rear legs could slide on smooth desks</a:t>
                       </a:r>
                       <a:endParaRPr lang="en-US" sz="1400" dirty="0"/>
                     </a:p>
@@ -7805,7 +8240,7 @@
                             <a:schemeClr val="tx1"/>
                           </a:solidFill>
                         </a:rPr>
-                        <a:t>Hinge wobbled sideways</a:t>
+                        <a:t>Hinge could wobble sideways</a:t>
                       </a:r>
                       <a:endParaRPr lang="en-US" sz="1400" dirty="0"/>
                     </a:p>
@@ -9533,7 +9968,7 @@
                   <a:schemeClr val="bg1"/>
                 </a:solidFill>
               </a:rPr>
-              <a:t>Built and iterated</a:t>
+              <a:t>Refined and costed</a:t>
             </a:r>
             <a:endParaRPr lang="en-US" sz="2000" dirty="0"/>
           </a:p>
@@ -9569,7 +10004,7 @@
                   <a:schemeClr val="bg2"/>
                 </a:solidFill>
               </a:rPr>
-              <a:t>Version 2 meets the spec at about $10 and 0.5 kg.</a:t>
+              <a:t>Version 2 is predicted to meet every spec at about $10 and 0.5 kg.</a:t>
             </a:r>
             <a:endParaRPr lang="en-US" sz="1400" dirty="0"/>
           </a:p>
@@ -11118,7 +11553,7 @@
                   <a:schemeClr val="tx1"/>
                 </a:solidFill>
               </a:rPr>
-              <a:t>Observed how people use laptops; listed pain points</a:t>
+              <a:t>Studied how people use laptops; listed pain points</a:t>
             </a:r>
             <a:endParaRPr lang="en-US" sz="1400" dirty="0"/>
           </a:p>
@@ -11670,7 +12105,7 @@
                   <a:schemeClr val="bg2"/>
                 </a:solidFill>
               </a:rPr>
-              <a:t>Modelled in CAD, analysed, and built</a:t>
+              <a:t>Modelled in CAD, analysed the design and prototyped it</a:t>
             </a:r>
             <a:endParaRPr lang="en-US" sz="1400" dirty="0"/>
           </a:p>
@@ -11854,7 +12289,7 @@
                   <a:schemeClr val="bg2"/>
                 </a:solidFill>
               </a:rPr>
-              <a:t>Verified the prototype against every spec</a:t>
+              <a:t>Verify the prototype against every spec</a:t>
             </a:r>
             <a:endParaRPr lang="en-US" sz="1400" dirty="0"/>
           </a:p>
@@ -11952,7 +12387,7 @@
                   <a:schemeClr val="tx1"/>
                 </a:solidFill>
               </a:rPr>
-              <a:t>Test results fed back into the specs and the CAD model — two design versions were built (see Iteration).</a:t>
+              <a:t>Results feed back into the specs and the CAD model — version 1 was refined into version 2 (see Iteration).</a:t>
             </a:r>
             <a:endParaRPr lang="en-US" sz="1600" dirty="0"/>
           </a:p>
@@ -18510,7 +18945,7 @@
                   <a:schemeClr val="tx2"/>
                 </a:solidFill>
               </a:rPr>
-              <a:t>Parametric CAD and FEA validation</a:t>
+              <a:t>From hand calculation to FEA</a:t>
             </a:r>
             <a:endParaRPr lang="en-US" sz="3400" dirty="0"/>
           </a:p>
@@ -19184,132 +19619,25 @@
           </a:p>
         </p:txBody>
       </p:sp>
-      <p:sp>
-        <p:nvSpPr>
-          <p:cNvPr id="23" name="Image placeholder"/>
-          <p:cNvSpPr/>
-          <p:nvPr/>
-        </p:nvSpPr>
-        <p:spPr>
-          <a:xfrm>
-            <a:off x="548640" y="3429000"/>
-            <a:ext cx="6766560" cy="2651760"/>
-          </a:xfrm>
-          <a:prstGeom prst="roundRect">
-            <a:avLst>
-              <a:gd name="adj" fmla="val 4138"/>
-            </a:avLst>
-          </a:prstGeom>
-          <a:solidFill>
-            <a:schemeClr val="bg1"/>
-          </a:solidFill>
-          <a:ln w="19050">
-            <a:solidFill>
-              <a:schemeClr val="accent4"/>
-            </a:solidFill>
-            <a:prstDash val="dash"/>
-          </a:ln>
-        </p:spPr>
-      </p:sp>
-      <p:pic>
-        <p:nvPicPr>
-          <p:cNvPr id="24" name="Image 0" descr="Placeholder cube icon">    </p:cNvPr>
-          <p:cNvPicPr>
-            <a:picLocks noChangeAspect="1"/>
-          </p:cNvPicPr>
-          <p:nvPr/>
-        </p:nvPicPr>
-        <p:blipFill>
-          <a:blip r:embed="rId1"/>
-          <a:stretch>
-            <a:fillRect/>
-          </a:stretch>
-        </p:blipFill>
-        <p:spPr>
-          <a:xfrm>
-            <a:off x="3611880" y="3977640"/>
-            <a:ext cx="640080" cy="640080"/>
-          </a:xfrm>
-          <a:prstGeom prst="rect">
-            <a:avLst/>
-          </a:prstGeom>
-        </p:spPr>
-      </p:pic>
-      <p:sp>
-        <p:nvSpPr>
-          <p:cNvPr id="25" name="Text 22"/>
-          <p:cNvSpPr txBox="1"/>
-          <p:nvPr/>
-        </p:nvSpPr>
-        <p:spPr>
-          <a:xfrm>
-            <a:off x="548640" y="4754880"/>
-            <a:ext cx="6766560" cy="457200"/>
-          </a:xfrm>
-          <a:prstGeom prst="rect">
-            <a:avLst/>
-          </a:prstGeom>
-          <a:noFill/>
-          <a:ln/>
-        </p:spPr>
-        <p:txBody>
-          <a:bodyPr wrap="square" lIns="0" tIns="0" rIns="0" bIns="0" rtlCol="0" anchor="ctr"/>
-          <a:lstStyle/>
-          <a:p>
-            <a:pPr algn="ctr" indent="0" marL="0">
-              <a:buNone/>
-            </a:pPr>
-            <a:r>
-              <a:rPr lang="en-US" sz="1600" b="1" dirty="0">
-                <a:solidFill>
-                  <a:schemeClr val="accent4"/>
-                </a:solidFill>
-              </a:rPr>
-              <a:t>Insert your CAD render or FEA stress plot here</a:t>
-            </a:r>
-            <a:endParaRPr lang="en-US" sz="1600" dirty="0"/>
-          </a:p>
-        </p:txBody>
-      </p:sp>
-      <p:sp>
-        <p:nvSpPr>
-          <p:cNvPr id="26" name="Text 23"/>
-          <p:cNvSpPr txBox="1"/>
-          <p:nvPr/>
-        </p:nvSpPr>
-        <p:spPr>
-          <a:xfrm>
-            <a:off x="548640" y="5166360"/>
-            <a:ext cx="6766560" cy="365760"/>
-          </a:xfrm>
-          <a:prstGeom prst="rect">
-            <a:avLst/>
-          </a:prstGeom>
-          <a:noFill/>
-          <a:ln/>
-        </p:spPr>
-        <p:txBody>
-          <a:bodyPr wrap="square" lIns="0" tIns="0" rIns="0" bIns="0" rtlCol="0" anchor="ctr"/>
-          <a:lstStyle/>
-          <a:p>
-            <a:pPr algn="ctr" indent="0" marL="0">
-              <a:buNone/>
-            </a:pPr>
-            <a:r>
-              <a:rPr lang="en-US" sz="1200" dirty="0">
-                <a:solidFill>
-                  <a:schemeClr val="accent4"/>
-                </a:solidFill>
-              </a:rPr>
-              <a:t>Colour map of von Mises stress or displacement works best</a:t>
-            </a:r>
-            <a:endParaRPr lang="en-US" sz="1200" dirty="0"/>
-          </a:p>
-        </p:txBody>
-      </p:sp>
-      <p:sp>
-        <p:nvSpPr>
-          <p:cNvPr id="27" name="Text 24"/>
+      <p:graphicFrame>
+        <p:nvGraphicFramePr>
+          <p:cNvPr id="23" name="Chart 0" descr=""/>
+          <p:cNvGraphicFramePr/>
+          <p:nvPr/>
+        </p:nvGraphicFramePr>
+        <p:xfrm>
+          <a:off x="548640" y="3383280"/>
+          <a:ext cx="6766560" cy="2743200"/>
+        </p:xfrm>
+        <a:graphic xmlns:a="http://schemas.openxmlformats.org/drawingml/2006/main">
+          <a:graphicData uri="http://schemas.openxmlformats.org/drawingml/2006/chart">
+            <c:chart xmlns:c="http://schemas.openxmlformats.org/drawingml/2006/chart" r:id="rId1"/>
+          </a:graphicData>
+        </a:graphic>
+      </p:graphicFrame>
+      <p:sp>
+        <p:nvSpPr>
+          <p:cNvPr id="24" name="Text 21"/>
           <p:cNvSpPr txBox="1"/>
           <p:nvPr/>
         </p:nvSpPr>
@@ -19345,7 +19673,7 @@
       </p:sp>
       <p:sp>
         <p:nvSpPr>
-          <p:cNvPr id="28" name="Text 25"/>
+          <p:cNvPr id="25" name="Text 22"/>
           <p:cNvSpPr txBox="1"/>
           <p:nvPr/>
         </p:nvSpPr>
@@ -19377,7 +19705,7 @@
                   <a:schemeClr val="tx1"/>
                 </a:solidFill>
               </a:rPr>
-              <a:t>Two independent methods agreeing builds trust in the model</a:t>
+              <a:t>FEA must reproduce the 1.4 mm hand-calc peak within 10%</a:t>
             </a:r>
             <a:endParaRPr lang="en-US" sz="1400" dirty="0"/>
           </a:p>
